--- a/ITACORDA_INDUSTRIA_E_COMERCIO.pptx
+++ b/ITACORDA_INDUSTRIA_E_COMERCIO.pptx
@@ -162,10 +162,10 @@
                 <c:formatCode>General</c:formatCode>
                 <c:ptCount val="2"/>
                 <c:pt idx="0">
-                  <c:v>107</c:v>
+                  <c:v>0</c:v>
                 </c:pt>
                 <c:pt idx="1">
-                  <c:v>66</c:v>
+                  <c:v>61</c:v>
                 </c:pt>
               </c:numCache>
             </c:numRef>
@@ -211,7 +211,7 @@
                 <c:formatCode>General</c:formatCode>
                 <c:ptCount val="2"/>
                 <c:pt idx="0">
-                  <c:v>1</c:v>
+                  <c:v>0</c:v>
                 </c:pt>
                 <c:pt idx="1">
                   <c:v>1</c:v>
@@ -3688,7 +3688,7 @@
         <p:spPr>
           <a:xfrm>
             <a:off x="1005840" y="2240279"/>
-            <a:ext cx="2377439" cy="891540"/>
+            <a:ext cx="2377440" cy="868680"/>
           </a:xfrm>
           <a:prstGeom prst="rect">
             <a:avLst/>
@@ -3709,7 +3709,7 @@
                 </a:solidFill>
                 <a:latin typeface="Calibri"/>
               </a:rPr>
-              <a:t>67</a:t>
+              <a:t>62</a:t>
             </a:r>
           </a:p>
         </p:txBody>
@@ -3722,8 +3722,8 @@
         </p:nvSpPr>
         <p:spPr>
           <a:xfrm>
-            <a:off x="1005840" y="3058668"/>
-            <a:ext cx="2377439" cy="548640"/>
+            <a:off x="1005840" y="3090672"/>
+            <a:ext cx="2377440" cy="411480"/>
           </a:xfrm>
           <a:prstGeom prst="rect">
             <a:avLst/>
@@ -3803,7 +3803,7 @@
         <p:spPr>
           <a:xfrm>
             <a:off x="3931920" y="2240279"/>
-            <a:ext cx="2377439" cy="891540"/>
+            <a:ext cx="2377440" cy="868680"/>
           </a:xfrm>
           <a:prstGeom prst="rect">
             <a:avLst/>
@@ -3824,7 +3824,7 @@
                 </a:solidFill>
                 <a:latin typeface="Calibri"/>
               </a:rPr>
-              <a:t>66</a:t>
+              <a:t>61</a:t>
             </a:r>
           </a:p>
         </p:txBody>
@@ -3837,8 +3837,8 @@
         </p:nvSpPr>
         <p:spPr>
           <a:xfrm>
-            <a:off x="3931920" y="3058668"/>
-            <a:ext cx="2377439" cy="548640"/>
+            <a:off x="3931920" y="3090672"/>
+            <a:ext cx="2377440" cy="411480"/>
           </a:xfrm>
           <a:prstGeom prst="rect">
             <a:avLst/>
@@ -3918,7 +3918,7 @@
         <p:spPr>
           <a:xfrm>
             <a:off x="6858000" y="2240279"/>
-            <a:ext cx="2377439" cy="891540"/>
+            <a:ext cx="2377440" cy="868680"/>
           </a:xfrm>
           <a:prstGeom prst="rect">
             <a:avLst/>
@@ -3952,8 +3952,8 @@
         </p:nvSpPr>
         <p:spPr>
           <a:xfrm>
-            <a:off x="6858000" y="3058668"/>
-            <a:ext cx="2377439" cy="548640"/>
+            <a:off x="6858000" y="3090672"/>
+            <a:ext cx="2377440" cy="411480"/>
           </a:xfrm>
           <a:prstGeom prst="rect">
             <a:avLst/>
@@ -4033,7 +4033,7 @@
         <p:spPr>
           <a:xfrm>
             <a:off x="9784080" y="2240279"/>
-            <a:ext cx="2377439" cy="891540"/>
+            <a:ext cx="2377440" cy="868680"/>
           </a:xfrm>
           <a:prstGeom prst="rect">
             <a:avLst/>
@@ -4054,7 +4054,7 @@
                 </a:solidFill>
                 <a:latin typeface="Calibri"/>
               </a:rPr>
-              <a:t>98.5%</a:t>
+              <a:t>98.4%</a:t>
             </a:r>
           </a:p>
         </p:txBody>
@@ -4067,8 +4067,8 @@
         </p:nvSpPr>
         <p:spPr>
           <a:xfrm>
-            <a:off x="9784080" y="3058668"/>
-            <a:ext cx="2377439" cy="548640"/>
+            <a:off x="9784080" y="3090672"/>
+            <a:ext cx="2377440" cy="411480"/>
           </a:xfrm>
           <a:prstGeom prst="rect">
             <a:avLst/>
@@ -4121,7 +4121,7 @@
               <a:tr h="475488">
                 <a:tc>
                   <a:txBody>
-                    <a:bodyPr wrap="square"/>
+                    <a:bodyPr/>
                     <a:lstStyle/>
                     <a:p>
                       <a:pPr algn="ctr"/>
@@ -4144,7 +4144,7 @@
                 </a:tc>
                 <a:tc>
                   <a:txBody>
-                    <a:bodyPr wrap="square"/>
+                    <a:bodyPr/>
                     <a:lstStyle/>
                     <a:p>
                       <a:pPr algn="ctr"/>
@@ -4167,7 +4167,7 @@
                 </a:tc>
                 <a:tc>
                   <a:txBody>
-                    <a:bodyPr wrap="square"/>
+                    <a:bodyPr/>
                     <a:lstStyle/>
                     <a:p>
                       <a:pPr algn="ctr"/>
@@ -4190,7 +4190,7 @@
                 </a:tc>
                 <a:tc>
                   <a:txBody>
-                    <a:bodyPr wrap="square"/>
+                    <a:bodyPr/>
                     <a:lstStyle/>
                     <a:p>
                       <a:pPr algn="ctr"/>
@@ -4215,18 +4215,18 @@
               <a:tr h="475488">
                 <a:tc>
                   <a:txBody>
-                    <a:bodyPr wrap="square"/>
-                    <a:lstStyle/>
-                    <a:p>
-                      <a:pPr algn="l"/>
-                      <a:r>
-                        <a:rPr sz="1000" b="0">
-                          <a:solidFill>
-                            <a:srgbClr val="1D1B43"/>
-                          </a:solidFill>
-                          <a:latin typeface="Calibri"/>
-                        </a:rPr>
-                        <a:t>Total Entregas</a:t>
+                    <a:bodyPr/>
+                    <a:lstStyle/>
+                    <a:p>
+                      <a:pPr algn="l"/>
+                      <a:r>
+                        <a:rPr sz="1000" b="0">
+                          <a:solidFill>
+                            <a:srgbClr val="1D1B43"/>
+                          </a:solidFill>
+                          <a:latin typeface="Calibri"/>
+                        </a:rPr>
+                        <a:t>Total</a:t>
                       </a:r>
                     </a:p>
                   </a:txBody>
@@ -4238,18 +4238,18 @@
                 </a:tc>
                 <a:tc>
                   <a:txBody>
-                    <a:bodyPr wrap="square"/>
-                    <a:lstStyle/>
-                    <a:p>
-                      <a:pPr algn="l"/>
-                      <a:r>
-                        <a:rPr sz="1000" b="0">
-                          <a:solidFill>
-                            <a:srgbClr val="1D1B43"/>
-                          </a:solidFill>
-                          <a:latin typeface="Calibri"/>
-                        </a:rPr>
-                        <a:t>108</a:t>
+                    <a:bodyPr/>
+                    <a:lstStyle/>
+                    <a:p>
+                      <a:pPr algn="l"/>
+                      <a:r>
+                        <a:rPr sz="1000" b="0">
+                          <a:solidFill>
+                            <a:srgbClr val="1D1B43"/>
+                          </a:solidFill>
+                          <a:latin typeface="Calibri"/>
+                        </a:rPr>
+                        <a:t>0</a:t>
                       </a:r>
                     </a:p>
                   </a:txBody>
@@ -4261,18 +4261,18 @@
                 </a:tc>
                 <a:tc>
                   <a:txBody>
-                    <a:bodyPr wrap="square"/>
-                    <a:lstStyle/>
-                    <a:p>
-                      <a:pPr algn="l"/>
-                      <a:r>
-                        <a:rPr sz="1000" b="0">
-                          <a:solidFill>
-                            <a:srgbClr val="1D1B43"/>
-                          </a:solidFill>
-                          <a:latin typeface="Calibri"/>
-                        </a:rPr>
-                        <a:t>67</a:t>
+                    <a:bodyPr/>
+                    <a:lstStyle/>
+                    <a:p>
+                      <a:pPr algn="l"/>
+                      <a:r>
+                        <a:rPr sz="1000" b="0">
+                          <a:solidFill>
+                            <a:srgbClr val="1D1B43"/>
+                          </a:solidFill>
+                          <a:latin typeface="Calibri"/>
+                        </a:rPr>
+                        <a:t>62</a:t>
                       </a:r>
                     </a:p>
                   </a:txBody>
@@ -4284,18 +4284,18 @@
                 </a:tc>
                 <a:tc>
                   <a:txBody>
-                    <a:bodyPr wrap="square"/>
-                    <a:lstStyle/>
-                    <a:p>
-                      <a:pPr algn="l"/>
-                      <a:r>
-                        <a:rPr sz="1000" b="0">
-                          <a:solidFill>
-                            <a:srgbClr val="1D1B43"/>
-                          </a:solidFill>
-                          <a:latin typeface="Calibri"/>
-                        </a:rPr>
-                        <a:t>- 41</a:t>
+                    <a:bodyPr/>
+                    <a:lstStyle/>
+                    <a:p>
+                      <a:pPr algn="l"/>
+                      <a:r>
+                        <a:rPr sz="1000" b="0">
+                          <a:solidFill>
+                            <a:srgbClr val="1D1B43"/>
+                          </a:solidFill>
+                          <a:latin typeface="Calibri"/>
+                        </a:rPr>
+                        <a:t>+ 62</a:t>
                       </a:r>
                     </a:p>
                   </a:txBody>
@@ -4309,7 +4309,7 @@
               <a:tr h="475488">
                 <a:tc>
                   <a:txBody>
-                    <a:bodyPr wrap="square"/>
+                    <a:bodyPr/>
                     <a:lstStyle/>
                     <a:p>
                       <a:pPr algn="l"/>
@@ -4332,18 +4332,18 @@
                 </a:tc>
                 <a:tc>
                   <a:txBody>
-                    <a:bodyPr wrap="square"/>
-                    <a:lstStyle/>
-                    <a:p>
-                      <a:pPr algn="l"/>
-                      <a:r>
-                        <a:rPr sz="1000" b="0">
-                          <a:solidFill>
-                            <a:srgbClr val="1D1B43"/>
-                          </a:solidFill>
-                          <a:latin typeface="Calibri"/>
-                        </a:rPr>
-                        <a:t>107</a:t>
+                    <a:bodyPr/>
+                    <a:lstStyle/>
+                    <a:p>
+                      <a:pPr algn="l"/>
+                      <a:r>
+                        <a:rPr sz="1000" b="0">
+                          <a:solidFill>
+                            <a:srgbClr val="1D1B43"/>
+                          </a:solidFill>
+                          <a:latin typeface="Calibri"/>
+                        </a:rPr>
+                        <a:t>0</a:t>
                       </a:r>
                     </a:p>
                   </a:txBody>
@@ -4355,18 +4355,18 @@
                 </a:tc>
                 <a:tc>
                   <a:txBody>
-                    <a:bodyPr wrap="square"/>
-                    <a:lstStyle/>
-                    <a:p>
-                      <a:pPr algn="l"/>
-                      <a:r>
-                        <a:rPr sz="1000" b="0">
-                          <a:solidFill>
-                            <a:srgbClr val="1D1B43"/>
-                          </a:solidFill>
-                          <a:latin typeface="Calibri"/>
-                        </a:rPr>
-                        <a:t>66</a:t>
+                    <a:bodyPr/>
+                    <a:lstStyle/>
+                    <a:p>
+                      <a:pPr algn="l"/>
+                      <a:r>
+                        <a:rPr sz="1000" b="0">
+                          <a:solidFill>
+                            <a:srgbClr val="1D1B43"/>
+                          </a:solidFill>
+                          <a:latin typeface="Calibri"/>
+                        </a:rPr>
+                        <a:t>61</a:t>
                       </a:r>
                     </a:p>
                   </a:txBody>
@@ -4378,18 +4378,18 @@
                 </a:tc>
                 <a:tc>
                   <a:txBody>
-                    <a:bodyPr wrap="square"/>
-                    <a:lstStyle/>
-                    <a:p>
-                      <a:pPr algn="l"/>
-                      <a:r>
-                        <a:rPr sz="1000" b="0">
-                          <a:solidFill>
-                            <a:srgbClr val="1D1B43"/>
-                          </a:solidFill>
-                          <a:latin typeface="Calibri"/>
-                        </a:rPr>
-                        <a:t>- 41</a:t>
+                    <a:bodyPr/>
+                    <a:lstStyle/>
+                    <a:p>
+                      <a:pPr algn="l"/>
+                      <a:r>
+                        <a:rPr sz="1000" b="0">
+                          <a:solidFill>
+                            <a:srgbClr val="1D1B43"/>
+                          </a:solidFill>
+                          <a:latin typeface="Calibri"/>
+                        </a:rPr>
+                        <a:t>+ 61</a:t>
                       </a:r>
                     </a:p>
                   </a:txBody>
@@ -4403,18 +4403,18 @@
               <a:tr h="475488">
                 <a:tc>
                   <a:txBody>
-                    <a:bodyPr wrap="square"/>
-                    <a:lstStyle/>
-                    <a:p>
-                      <a:pPr algn="l"/>
-                      <a:r>
-                        <a:rPr sz="1000" b="0">
-                          <a:solidFill>
-                            <a:srgbClr val="1D1B43"/>
-                          </a:solidFill>
-                          <a:latin typeface="Calibri"/>
-                        </a:rPr>
-                        <a:t>Fora do Prazo</a:t>
+                    <a:bodyPr/>
+                    <a:lstStyle/>
+                    <a:p>
+                      <a:pPr algn="l"/>
+                      <a:r>
+                        <a:rPr sz="1000" b="0">
+                          <a:solidFill>
+                            <a:srgbClr val="1D1B43"/>
+                          </a:solidFill>
+                          <a:latin typeface="Calibri"/>
+                        </a:rPr>
+                        <a:t>Fora Prazo</a:t>
                       </a:r>
                     </a:p>
                   </a:txBody>
@@ -4426,7 +4426,30 @@
                 </a:tc>
                 <a:tc>
                   <a:txBody>
-                    <a:bodyPr wrap="square"/>
+                    <a:bodyPr/>
+                    <a:lstStyle/>
+                    <a:p>
+                      <a:pPr algn="l"/>
+                      <a:r>
+                        <a:rPr sz="1000" b="0">
+                          <a:solidFill>
+                            <a:srgbClr val="1D1B43"/>
+                          </a:solidFill>
+                          <a:latin typeface="Calibri"/>
+                        </a:rPr>
+                        <a:t>0</a:t>
+                      </a:r>
+                    </a:p>
+                  </a:txBody>
+                  <a:tcPr>
+                    <a:solidFill>
+                      <a:srgbClr val="FFFFFF"/>
+                    </a:solidFill>
+                  </a:tcPr>
+                </a:tc>
+                <a:tc>
+                  <a:txBody>
+                    <a:bodyPr/>
                     <a:lstStyle/>
                     <a:p>
                       <a:pPr algn="l"/>
@@ -4449,41 +4472,18 @@
                 </a:tc>
                 <a:tc>
                   <a:txBody>
-                    <a:bodyPr wrap="square"/>
-                    <a:lstStyle/>
-                    <a:p>
-                      <a:pPr algn="l"/>
-                      <a:r>
-                        <a:rPr sz="1000" b="0">
-                          <a:solidFill>
-                            <a:srgbClr val="1D1B43"/>
-                          </a:solidFill>
-                          <a:latin typeface="Calibri"/>
-                        </a:rPr>
-                        <a:t>1</a:t>
-                      </a:r>
-                    </a:p>
-                  </a:txBody>
-                  <a:tcPr>
-                    <a:solidFill>
-                      <a:srgbClr val="FFFFFF"/>
-                    </a:solidFill>
-                  </a:tcPr>
-                </a:tc>
-                <a:tc>
-                  <a:txBody>
-                    <a:bodyPr wrap="square"/>
-                    <a:lstStyle/>
-                    <a:p>
-                      <a:pPr algn="l"/>
-                      <a:r>
-                        <a:rPr sz="1000" b="0">
-                          <a:solidFill>
-                            <a:srgbClr val="1D1B43"/>
-                          </a:solidFill>
-                          <a:latin typeface="Calibri"/>
-                        </a:rPr>
-                        <a:t>- 0</a:t>
+                    <a:bodyPr/>
+                    <a:lstStyle/>
+                    <a:p>
+                      <a:pPr algn="l"/>
+                      <a:r>
+                        <a:rPr sz="1000" b="0">
+                          <a:solidFill>
+                            <a:srgbClr val="1D1B43"/>
+                          </a:solidFill>
+                          <a:latin typeface="Calibri"/>
+                        </a:rPr>
+                        <a:t>+ 1</a:t>
                       </a:r>
                     </a:p>
                   </a:txBody>
@@ -4497,7 +4497,7 @@
               <a:tr h="475488">
                 <a:tc>
                   <a:txBody>
-                    <a:bodyPr wrap="square"/>
+                    <a:bodyPr/>
                     <a:lstStyle/>
                     <a:p>
                       <a:pPr algn="l"/>
@@ -4520,18 +4520,18 @@
                 </a:tc>
                 <a:tc>
                   <a:txBody>
-                    <a:bodyPr wrap="square"/>
-                    <a:lstStyle/>
-                    <a:p>
-                      <a:pPr algn="l"/>
-                      <a:r>
-                        <a:rPr sz="1000" b="0">
-                          <a:solidFill>
-                            <a:srgbClr val="1D1B43"/>
-                          </a:solidFill>
-                          <a:latin typeface="Calibri"/>
-                        </a:rPr>
-                        <a:t>99.1%</a:t>
+                    <a:bodyPr/>
+                    <a:lstStyle/>
+                    <a:p>
+                      <a:pPr algn="l"/>
+                      <a:r>
+                        <a:rPr sz="1000" b="0">
+                          <a:solidFill>
+                            <a:srgbClr val="1D1B43"/>
+                          </a:solidFill>
+                          <a:latin typeface="Calibri"/>
+                        </a:rPr>
+                        <a:t>98.4%</a:t>
                       </a:r>
                     </a:p>
                   </a:txBody>
@@ -4543,18 +4543,18 @@
                 </a:tc>
                 <a:tc>
                   <a:txBody>
-                    <a:bodyPr wrap="square"/>
-                    <a:lstStyle/>
-                    <a:p>
-                      <a:pPr algn="l"/>
-                      <a:r>
-                        <a:rPr sz="1000" b="0">
-                          <a:solidFill>
-                            <a:srgbClr val="1D1B43"/>
-                          </a:solidFill>
-                          <a:latin typeface="Calibri"/>
-                        </a:rPr>
-                        <a:t>98.5%</a:t>
+                    <a:bodyPr/>
+                    <a:lstStyle/>
+                    <a:p>
+                      <a:pPr algn="l"/>
+                      <a:r>
+                        <a:rPr sz="1000" b="0">
+                          <a:solidFill>
+                            <a:srgbClr val="1D1B43"/>
+                          </a:solidFill>
+                          <a:latin typeface="Calibri"/>
+                        </a:rPr>
+                        <a:t>98.4%</a:t>
                       </a:r>
                     </a:p>
                   </a:txBody>
@@ -4566,18 +4566,18 @@
                 </a:tc>
                 <a:tc>
                   <a:txBody>
-                    <a:bodyPr wrap="square"/>
-                    <a:lstStyle/>
-                    <a:p>
-                      <a:pPr algn="l"/>
-                      <a:r>
-                        <a:rPr sz="1000" b="0">
-                          <a:solidFill>
-                            <a:srgbClr val="1D1B43"/>
-                          </a:solidFill>
-                          <a:latin typeface="Calibri"/>
-                        </a:rPr>
-                        <a:t>- 0.6pp</a:t>
+                    <a:bodyPr/>
+                    <a:lstStyle/>
+                    <a:p>
+                      <a:pPr algn="l"/>
+                      <a:r>
+                        <a:rPr sz="1000" b="0">
+                          <a:solidFill>
+                            <a:srgbClr val="1D1B43"/>
+                          </a:solidFill>
+                          <a:latin typeface="Calibri"/>
+                        </a:rPr>
+                        <a:t>+ 0.0pp</a:t>
                       </a:r>
                     </a:p>
                   </a:txBody>
@@ -4766,7 +4766,7 @@
               <a:tr h="438912">
                 <a:tc>
                   <a:txBody>
-                    <a:bodyPr wrap="square"/>
+                    <a:bodyPr/>
                     <a:lstStyle/>
                     <a:p>
                       <a:pPr algn="ctr"/>
@@ -4789,7 +4789,7 @@
                 </a:tc>
                 <a:tc>
                   <a:txBody>
-                    <a:bodyPr wrap="square"/>
+                    <a:bodyPr/>
                     <a:lstStyle/>
                     <a:p>
                       <a:pPr algn="ctr"/>
@@ -4812,7 +4812,7 @@
                 </a:tc>
                 <a:tc>
                   <a:txBody>
-                    <a:bodyPr wrap="square"/>
+                    <a:bodyPr/>
                     <a:lstStyle/>
                     <a:p>
                       <a:pPr algn="ctr"/>
@@ -4835,7 +4835,7 @@
                 </a:tc>
                 <a:tc>
                   <a:txBody>
-                    <a:bodyPr wrap="square"/>
+                    <a:bodyPr/>
                     <a:lstStyle/>
                     <a:p>
                       <a:pPr algn="ctr"/>
@@ -4858,7 +4858,7 @@
                 </a:tc>
                 <a:tc>
                   <a:txBody>
-                    <a:bodyPr wrap="square"/>
+                    <a:bodyPr/>
                     <a:lstStyle/>
                     <a:p>
                       <a:pPr algn="ctr"/>
@@ -4883,7 +4883,7 @@
               <a:tr h="438912">
                 <a:tc>
                   <a:txBody>
-                    <a:bodyPr wrap="square"/>
+                    <a:bodyPr/>
                     <a:lstStyle/>
                     <a:p>
                       <a:pPr algn="l"/>
@@ -4906,18 +4906,18 @@
                 </a:tc>
                 <a:tc>
                   <a:txBody>
-                    <a:bodyPr wrap="square"/>
-                    <a:lstStyle/>
-                    <a:p>
-                      <a:pPr algn="l"/>
-                      <a:r>
-                        <a:rPr sz="1000" b="0">
-                          <a:solidFill>
-                            <a:srgbClr val="1D1B43"/>
-                          </a:solidFill>
-                          <a:latin typeface="Calibri"/>
-                        </a:rPr>
-                        <a:t>108</a:t>
+                    <a:bodyPr/>
+                    <a:lstStyle/>
+                    <a:p>
+                      <a:pPr algn="l"/>
+                      <a:r>
+                        <a:rPr sz="1000" b="0">
+                          <a:solidFill>
+                            <a:srgbClr val="1D1B43"/>
+                          </a:solidFill>
+                          <a:latin typeface="Calibri"/>
+                        </a:rPr>
+                        <a:t>0</a:t>
                       </a:r>
                     </a:p>
                   </a:txBody>
@@ -4929,18 +4929,18 @@
                 </a:tc>
                 <a:tc>
                   <a:txBody>
-                    <a:bodyPr wrap="square"/>
-                    <a:lstStyle/>
-                    <a:p>
-                      <a:pPr algn="l"/>
-                      <a:r>
-                        <a:rPr sz="1000" b="0">
-                          <a:solidFill>
-                            <a:srgbClr val="1D1B43"/>
-                          </a:solidFill>
-                          <a:latin typeface="Calibri"/>
-                        </a:rPr>
-                        <a:t>107</a:t>
+                    <a:bodyPr/>
+                    <a:lstStyle/>
+                    <a:p>
+                      <a:pPr algn="l"/>
+                      <a:r>
+                        <a:rPr sz="1000" b="0">
+                          <a:solidFill>
+                            <a:srgbClr val="1D1B43"/>
+                          </a:solidFill>
+                          <a:latin typeface="Calibri"/>
+                        </a:rPr>
+                        <a:t>0</a:t>
                       </a:r>
                     </a:p>
                   </a:txBody>
@@ -4952,18 +4952,18 @@
                 </a:tc>
                 <a:tc>
                   <a:txBody>
-                    <a:bodyPr wrap="square"/>
-                    <a:lstStyle/>
-                    <a:p>
-                      <a:pPr algn="l"/>
-                      <a:r>
-                        <a:rPr sz="1000" b="0">
-                          <a:solidFill>
-                            <a:srgbClr val="1D1B43"/>
-                          </a:solidFill>
-                          <a:latin typeface="Calibri"/>
-                        </a:rPr>
-                        <a:t>1</a:t>
+                    <a:bodyPr/>
+                    <a:lstStyle/>
+                    <a:p>
+                      <a:pPr algn="l"/>
+                      <a:r>
+                        <a:rPr sz="1000" b="0">
+                          <a:solidFill>
+                            <a:srgbClr val="1D1B43"/>
+                          </a:solidFill>
+                          <a:latin typeface="Calibri"/>
+                        </a:rPr>
+                        <a:t>0</a:t>
                       </a:r>
                     </a:p>
                   </a:txBody>
@@ -4975,18 +4975,18 @@
                 </a:tc>
                 <a:tc>
                   <a:txBody>
-                    <a:bodyPr wrap="square"/>
-                    <a:lstStyle/>
-                    <a:p>
-                      <a:pPr algn="l"/>
-                      <a:r>
-                        <a:rPr sz="1000" b="0">
-                          <a:solidFill>
-                            <a:srgbClr val="1D1B43"/>
-                          </a:solidFill>
-                          <a:latin typeface="Calibri"/>
-                        </a:rPr>
-                        <a:t>99.1%</a:t>
+                    <a:bodyPr/>
+                    <a:lstStyle/>
+                    <a:p>
+                      <a:pPr algn="l"/>
+                      <a:r>
+                        <a:rPr sz="1000" b="0">
+                          <a:solidFill>
+                            <a:srgbClr val="1D1B43"/>
+                          </a:solidFill>
+                          <a:latin typeface="Calibri"/>
+                        </a:rPr>
+                        <a:t>98.4%</a:t>
                       </a:r>
                     </a:p>
                   </a:txBody>
@@ -5000,7 +5000,7 @@
               <a:tr h="438912">
                 <a:tc>
                   <a:txBody>
-                    <a:bodyPr wrap="square"/>
+                    <a:bodyPr/>
                     <a:lstStyle/>
                     <a:p>
                       <a:pPr algn="l"/>
@@ -5023,18 +5023,18 @@
                 </a:tc>
                 <a:tc>
                   <a:txBody>
-                    <a:bodyPr wrap="square"/>
-                    <a:lstStyle/>
-                    <a:p>
-                      <a:pPr algn="l"/>
-                      <a:r>
-                        <a:rPr sz="1000" b="0">
-                          <a:solidFill>
-                            <a:srgbClr val="1D1B43"/>
-                          </a:solidFill>
-                          <a:latin typeface="Calibri"/>
-                        </a:rPr>
-                        <a:t>67</a:t>
+                    <a:bodyPr/>
+                    <a:lstStyle/>
+                    <a:p>
+                      <a:pPr algn="l"/>
+                      <a:r>
+                        <a:rPr sz="1000" b="0">
+                          <a:solidFill>
+                            <a:srgbClr val="1D1B43"/>
+                          </a:solidFill>
+                          <a:latin typeface="Calibri"/>
+                        </a:rPr>
+                        <a:t>62</a:t>
                       </a:r>
                     </a:p>
                   </a:txBody>
@@ -5046,18 +5046,18 @@
                 </a:tc>
                 <a:tc>
                   <a:txBody>
-                    <a:bodyPr wrap="square"/>
-                    <a:lstStyle/>
-                    <a:p>
-                      <a:pPr algn="l"/>
-                      <a:r>
-                        <a:rPr sz="1000" b="0">
-                          <a:solidFill>
-                            <a:srgbClr val="1D1B43"/>
-                          </a:solidFill>
-                          <a:latin typeface="Calibri"/>
-                        </a:rPr>
-                        <a:t>66</a:t>
+                    <a:bodyPr/>
+                    <a:lstStyle/>
+                    <a:p>
+                      <a:pPr algn="l"/>
+                      <a:r>
+                        <a:rPr sz="1000" b="0">
+                          <a:solidFill>
+                            <a:srgbClr val="1D1B43"/>
+                          </a:solidFill>
+                          <a:latin typeface="Calibri"/>
+                        </a:rPr>
+                        <a:t>61</a:t>
                       </a:r>
                     </a:p>
                   </a:txBody>
@@ -5069,7 +5069,7 @@
                 </a:tc>
                 <a:tc>
                   <a:txBody>
-                    <a:bodyPr wrap="square"/>
+                    <a:bodyPr/>
                     <a:lstStyle/>
                     <a:p>
                       <a:pPr algn="l"/>
@@ -5092,18 +5092,18 @@
                 </a:tc>
                 <a:tc>
                   <a:txBody>
-                    <a:bodyPr wrap="square"/>
-                    <a:lstStyle/>
-                    <a:p>
-                      <a:pPr algn="l"/>
-                      <a:r>
-                        <a:rPr sz="1000" b="0">
-                          <a:solidFill>
-                            <a:srgbClr val="1D1B43"/>
-                          </a:solidFill>
-                          <a:latin typeface="Calibri"/>
-                        </a:rPr>
-                        <a:t>98.5%</a:t>
+                    <a:bodyPr/>
+                    <a:lstStyle/>
+                    <a:p>
+                      <a:pPr algn="l"/>
+                      <a:r>
+                        <a:rPr sz="1000" b="0">
+                          <a:solidFill>
+                            <a:srgbClr val="1D1B43"/>
+                          </a:solidFill>
+                          <a:latin typeface="Calibri"/>
+                        </a:rPr>
+                        <a:t>98.4%</a:t>
                       </a:r>
                     </a:p>
                   </a:txBody>
@@ -5191,7 +5191,7 @@
                 </a:solidFill>
                 <a:latin typeface="Calibri"/>
               </a:rPr>
-              <a:t>PERFORMANCE: 98.5% - EXCELENTE</a:t>
+              <a:t>PERFORMANCE: 98.4% - EXCELENTE</a:t>
             </a:r>
           </a:p>
         </p:txBody>
@@ -5352,7 +5352,7 @@
               <a:tr h="384048">
                 <a:tc>
                   <a:txBody>
-                    <a:bodyPr wrap="square"/>
+                    <a:bodyPr/>
                     <a:lstStyle/>
                     <a:p>
                       <a:pPr algn="ctr"/>
@@ -5375,7 +5375,7 @@
                 </a:tc>
                 <a:tc>
                   <a:txBody>
-                    <a:bodyPr wrap="square"/>
+                    <a:bodyPr/>
                     <a:lstStyle/>
                     <a:p>
                       <a:pPr algn="ctr"/>
@@ -5398,7 +5398,7 @@
                 </a:tc>
                 <a:tc>
                   <a:txBody>
-                    <a:bodyPr wrap="square"/>
+                    <a:bodyPr/>
                     <a:lstStyle/>
                     <a:p>
                       <a:pPr algn="ctr"/>
@@ -5421,7 +5421,7 @@
                 </a:tc>
                 <a:tc>
                   <a:txBody>
-                    <a:bodyPr wrap="square"/>
+                    <a:bodyPr/>
                     <a:lstStyle/>
                     <a:p>
                       <a:pPr algn="ctr"/>
@@ -5444,7 +5444,7 @@
                 </a:tc>
                 <a:tc>
                   <a:txBody>
-                    <a:bodyPr wrap="square"/>
+                    <a:bodyPr/>
                     <a:lstStyle/>
                     <a:p>
                       <a:pPr algn="ctr"/>
@@ -5469,7 +5469,7 @@
               <a:tr h="384048">
                 <a:tc>
                   <a:txBody>
-                    <a:bodyPr wrap="square"/>
+                    <a:bodyPr/>
                     <a:lstStyle/>
                     <a:p>
                       <a:pPr algn="l"/>
@@ -5492,7 +5492,7 @@
                 </a:tc>
                 <a:tc>
                   <a:txBody>
-                    <a:bodyPr wrap="square"/>
+                    <a:bodyPr/>
                     <a:lstStyle/>
                     <a:p>
                       <a:pPr algn="l"/>
@@ -5515,7 +5515,7 @@
                 </a:tc>
                 <a:tc>
                   <a:txBody>
-                    <a:bodyPr wrap="square"/>
+                    <a:bodyPr/>
                     <a:lstStyle/>
                     <a:p>
                       <a:pPr algn="l"/>
@@ -5538,7 +5538,7 @@
                 </a:tc>
                 <a:tc>
                   <a:txBody>
-                    <a:bodyPr wrap="square"/>
+                    <a:bodyPr/>
                     <a:lstStyle/>
                     <a:p>
                       <a:pPr algn="l"/>
@@ -5561,7 +5561,7 @@
                 </a:tc>
                 <a:tc>
                   <a:txBody>
-                    <a:bodyPr wrap="square"/>
+                    <a:bodyPr/>
                     <a:lstStyle/>
                     <a:p>
                       <a:pPr algn="l"/>
@@ -5744,7 +5744,7 @@
               <a:tr h="457200">
                 <a:tc>
                   <a:txBody>
-                    <a:bodyPr wrap="square"/>
+                    <a:bodyPr/>
                     <a:lstStyle/>
                     <a:p>
                       <a:pPr algn="ctr"/>
@@ -5767,7 +5767,7 @@
                 </a:tc>
                 <a:tc>
                   <a:txBody>
-                    <a:bodyPr wrap="square"/>
+                    <a:bodyPr/>
                     <a:lstStyle/>
                     <a:p>
                       <a:pPr algn="ctr"/>
@@ -5790,7 +5790,7 @@
                 </a:tc>
                 <a:tc>
                   <a:txBody>
-                    <a:bodyPr wrap="square"/>
+                    <a:bodyPr/>
                     <a:lstStyle/>
                     <a:p>
                       <a:pPr algn="ctr"/>
@@ -5813,7 +5813,7 @@
                 </a:tc>
                 <a:tc>
                   <a:txBody>
-                    <a:bodyPr wrap="square"/>
+                    <a:bodyPr/>
                     <a:lstStyle/>
                     <a:p>
                       <a:pPr algn="ctr"/>
@@ -5836,7 +5836,7 @@
                 </a:tc>
                 <a:tc>
                   <a:txBody>
-                    <a:bodyPr wrap="square"/>
+                    <a:bodyPr/>
                     <a:lstStyle/>
                     <a:p>
                       <a:pPr algn="ctr"/>
@@ -5859,7 +5859,7 @@
                 </a:tc>
                 <a:tc>
                   <a:txBody>
-                    <a:bodyPr wrap="square"/>
+                    <a:bodyPr/>
                     <a:lstStyle/>
                     <a:p>
                       <a:pPr algn="ctr"/>
@@ -5884,7 +5884,7 @@
               <a:tr h="457200">
                 <a:tc>
                   <a:txBody>
-                    <a:bodyPr wrap="square"/>
+                    <a:bodyPr/>
                     <a:lstStyle/>
                     <a:p>
                       <a:pPr algn="l"/>
@@ -5907,18 +5907,18 @@
                 </a:tc>
                 <a:tc>
                   <a:txBody>
-                    <a:bodyPr wrap="square"/>
-                    <a:lstStyle/>
-                    <a:p>
-                      <a:pPr algn="l"/>
-                      <a:r>
-                        <a:rPr sz="1000" b="0">
-                          <a:solidFill>
-                            <a:srgbClr val="1D1B43"/>
-                          </a:solidFill>
-                          <a:latin typeface="Calibri"/>
-                        </a:rPr>
-                        <a:t>62</a:t>
+                    <a:bodyPr/>
+                    <a:lstStyle/>
+                    <a:p>
+                      <a:pPr algn="l"/>
+                      <a:r>
+                        <a:rPr sz="1000" b="0">
+                          <a:solidFill>
+                            <a:srgbClr val="1D1B43"/>
+                          </a:solidFill>
+                          <a:latin typeface="Calibri"/>
+                        </a:rPr>
+                        <a:t>57</a:t>
                       </a:r>
                     </a:p>
                   </a:txBody>
@@ -5930,18 +5930,18 @@
                 </a:tc>
                 <a:tc>
                   <a:txBody>
-                    <a:bodyPr wrap="square"/>
-                    <a:lstStyle/>
-                    <a:p>
-                      <a:pPr algn="l"/>
-                      <a:r>
-                        <a:rPr sz="1000" b="0">
-                          <a:solidFill>
-                            <a:srgbClr val="1D1B43"/>
-                          </a:solidFill>
-                          <a:latin typeface="Calibri"/>
-                        </a:rPr>
-                        <a:t>61</a:t>
+                    <a:bodyPr/>
+                    <a:lstStyle/>
+                    <a:p>
+                      <a:pPr algn="l"/>
+                      <a:r>
+                        <a:rPr sz="1000" b="0">
+                          <a:solidFill>
+                            <a:srgbClr val="1D1B43"/>
+                          </a:solidFill>
+                          <a:latin typeface="Calibri"/>
+                        </a:rPr>
+                        <a:t>56</a:t>
                       </a:r>
                     </a:p>
                   </a:txBody>
@@ -5953,7 +5953,7 @@
                 </a:tc>
                 <a:tc>
                   <a:txBody>
-                    <a:bodyPr wrap="square"/>
+                    <a:bodyPr/>
                     <a:lstStyle/>
                     <a:p>
                       <a:pPr algn="l"/>
@@ -5976,18 +5976,18 @@
                 </a:tc>
                 <a:tc>
                   <a:txBody>
-                    <a:bodyPr wrap="square"/>
-                    <a:lstStyle/>
-                    <a:p>
-                      <a:pPr algn="l"/>
-                      <a:r>
-                        <a:rPr sz="1000" b="0">
-                          <a:solidFill>
-                            <a:srgbClr val="1D1B43"/>
-                          </a:solidFill>
-                          <a:latin typeface="Calibri"/>
-                        </a:rPr>
-                        <a:t>98.4%</a:t>
+                    <a:bodyPr/>
+                    <a:lstStyle/>
+                    <a:p>
+                      <a:pPr algn="l"/>
+                      <a:r>
+                        <a:rPr sz="1000" b="0">
+                          <a:solidFill>
+                            <a:srgbClr val="1D1B43"/>
+                          </a:solidFill>
+                          <a:latin typeface="Calibri"/>
+                        </a:rPr>
+                        <a:t>98.2%</a:t>
                       </a:r>
                     </a:p>
                   </a:txBody>
@@ -5999,7 +5999,7 @@
                 </a:tc>
                 <a:tc>
                   <a:txBody>
-                    <a:bodyPr wrap="square"/>
+                    <a:bodyPr/>
                     <a:lstStyle/>
                     <a:p>
                       <a:pPr algn="l"/>
@@ -6024,7 +6024,7 @@
               <a:tr h="457200">
                 <a:tc>
                   <a:txBody>
-                    <a:bodyPr wrap="square"/>
+                    <a:bodyPr/>
                     <a:lstStyle/>
                     <a:p>
                       <a:pPr algn="l"/>
@@ -6047,7 +6047,7 @@
                 </a:tc>
                 <a:tc>
                   <a:txBody>
-                    <a:bodyPr wrap="square"/>
+                    <a:bodyPr/>
                     <a:lstStyle/>
                     <a:p>
                       <a:pPr algn="l"/>
@@ -6070,7 +6070,7 @@
                 </a:tc>
                 <a:tc>
                   <a:txBody>
-                    <a:bodyPr wrap="square"/>
+                    <a:bodyPr/>
                     <a:lstStyle/>
                     <a:p>
                       <a:pPr algn="l"/>
@@ -6093,7 +6093,7 @@
                 </a:tc>
                 <a:tc>
                   <a:txBody>
-                    <a:bodyPr wrap="square"/>
+                    <a:bodyPr/>
                     <a:lstStyle/>
                     <a:p>
                       <a:pPr algn="l"/>
@@ -6116,7 +6116,7 @@
                 </a:tc>
                 <a:tc>
                   <a:txBody>
-                    <a:bodyPr wrap="square"/>
+                    <a:bodyPr/>
                     <a:lstStyle/>
                     <a:p>
                       <a:pPr algn="l"/>
@@ -6139,7 +6139,7 @@
                 </a:tc>
                 <a:tc>
                   <a:txBody>
-                    <a:bodyPr wrap="square"/>
+                    <a:bodyPr/>
                     <a:lstStyle/>
                     <a:p>
                       <a:pPr algn="l"/>
@@ -6164,7 +6164,7 @@
               <a:tr h="457200">
                 <a:tc>
                   <a:txBody>
-                    <a:bodyPr wrap="square"/>
+                    <a:bodyPr/>
                     <a:lstStyle/>
                     <a:p>
                       <a:pPr algn="l"/>
@@ -6187,7 +6187,7 @@
                 </a:tc>
                 <a:tc>
                   <a:txBody>
-                    <a:bodyPr wrap="square"/>
+                    <a:bodyPr/>
                     <a:lstStyle/>
                     <a:p>
                       <a:pPr algn="l"/>
@@ -6210,7 +6210,7 @@
                 </a:tc>
                 <a:tc>
                   <a:txBody>
-                    <a:bodyPr wrap="square"/>
+                    <a:bodyPr/>
                     <a:lstStyle/>
                     <a:p>
                       <a:pPr algn="l"/>
@@ -6233,7 +6233,7 @@
                 </a:tc>
                 <a:tc>
                   <a:txBody>
-                    <a:bodyPr wrap="square"/>
+                    <a:bodyPr/>
                     <a:lstStyle/>
                     <a:p>
                       <a:pPr algn="l"/>
@@ -6256,7 +6256,7 @@
                 </a:tc>
                 <a:tc>
                   <a:txBody>
-                    <a:bodyPr wrap="square"/>
+                    <a:bodyPr/>
                     <a:lstStyle/>
                     <a:p>
                       <a:pPr algn="l"/>
@@ -6279,7 +6279,7 @@
                 </a:tc>
                 <a:tc>
                   <a:txBody>
-                    <a:bodyPr wrap="square"/>
+                    <a:bodyPr/>
                     <a:lstStyle/>
                     <a:p>
                       <a:pPr algn="l"/>
@@ -6463,7 +6463,7 @@
               <a:tr h="292608">
                 <a:tc>
                   <a:txBody>
-                    <a:bodyPr wrap="square"/>
+                    <a:bodyPr/>
                     <a:lstStyle/>
                     <a:p>
                       <a:pPr algn="ctr"/>
@@ -6486,7 +6486,7 @@
                 </a:tc>
                 <a:tc>
                   <a:txBody>
-                    <a:bodyPr wrap="square"/>
+                    <a:bodyPr/>
                     <a:lstStyle/>
                     <a:p>
                       <a:pPr algn="ctr"/>
@@ -6509,7 +6509,7 @@
                 </a:tc>
                 <a:tc>
                   <a:txBody>
-                    <a:bodyPr wrap="square"/>
+                    <a:bodyPr/>
                     <a:lstStyle/>
                     <a:p>
                       <a:pPr algn="ctr"/>
@@ -6532,7 +6532,7 @@
                 </a:tc>
                 <a:tc>
                   <a:txBody>
-                    <a:bodyPr wrap="square"/>
+                    <a:bodyPr/>
                     <a:lstStyle/>
                     <a:p>
                       <a:pPr algn="ctr"/>
@@ -6555,7 +6555,7 @@
                 </a:tc>
                 <a:tc>
                   <a:txBody>
-                    <a:bodyPr wrap="square"/>
+                    <a:bodyPr/>
                     <a:lstStyle/>
                     <a:p>
                       <a:pPr algn="ctr"/>
@@ -6578,7 +6578,7 @@
                 </a:tc>
                 <a:tc>
                   <a:txBody>
-                    <a:bodyPr wrap="square"/>
+                    <a:bodyPr/>
                     <a:lstStyle/>
                     <a:p>
                       <a:pPr algn="ctr"/>
@@ -6601,7 +6601,7 @@
                 </a:tc>
                 <a:tc>
                   <a:txBody>
-                    <a:bodyPr wrap="square"/>
+                    <a:bodyPr/>
                     <a:lstStyle/>
                     <a:p>
                       <a:pPr algn="ctr"/>
@@ -6626,7 +6626,7 @@
               <a:tr h="292608">
                 <a:tc>
                   <a:txBody>
-                    <a:bodyPr wrap="square"/>
+                    <a:bodyPr/>
                     <a:lstStyle/>
                     <a:p>
                       <a:pPr algn="l"/>
@@ -6649,18 +6649,18 @@
                 </a:tc>
                 <a:tc>
                   <a:txBody>
-                    <a:bodyPr wrap="square"/>
-                    <a:lstStyle/>
-                    <a:p>
-                      <a:pPr algn="l"/>
-                      <a:r>
-                        <a:rPr sz="1000" b="0">
-                          <a:solidFill>
-                            <a:srgbClr val="1D1B43"/>
-                          </a:solidFill>
-                          <a:latin typeface="Calibri"/>
-                        </a:rPr>
-                        <a:t>BMB MATERIAL DE CONS - SAO PAULO / SP</a:t>
+                    <a:bodyPr/>
+                    <a:lstStyle/>
+                    <a:p>
+                      <a:pPr algn="l"/>
+                      <a:r>
+                        <a:rPr sz="1000" b="0">
+                          <a:solidFill>
+                            <a:srgbClr val="1D1B43"/>
+                          </a:solidFill>
+                          <a:latin typeface="Calibri"/>
+                        </a:rPr>
+                        <a:t>BMB MATERIAL DE CONS - SUZANO / SP</a:t>
                       </a:r>
                     </a:p>
                   </a:txBody>
@@ -6672,18 +6672,18 @@
                 </a:tc>
                 <a:tc>
                   <a:txBody>
-                    <a:bodyPr wrap="square"/>
-                    <a:lstStyle/>
-                    <a:p>
-                      <a:pPr algn="l"/>
-                      <a:r>
-                        <a:rPr sz="1000" b="0">
-                          <a:solidFill>
-                            <a:srgbClr val="1D1B43"/>
-                          </a:solidFill>
-                          <a:latin typeface="Calibri"/>
-                        </a:rPr>
-                        <a:t>9</a:t>
+                    <a:bodyPr/>
+                    <a:lstStyle/>
+                    <a:p>
+                      <a:pPr algn="l"/>
+                      <a:r>
+                        <a:rPr sz="1000" b="0">
+                          <a:solidFill>
+                            <a:srgbClr val="1D1B43"/>
+                          </a:solidFill>
+                          <a:latin typeface="Calibri"/>
+                        </a:rPr>
+                        <a:t>6</a:t>
                       </a:r>
                     </a:p>
                   </a:txBody>
@@ -6695,18 +6695,18 @@
                 </a:tc>
                 <a:tc>
                   <a:txBody>
-                    <a:bodyPr wrap="square"/>
-                    <a:lstStyle/>
-                    <a:p>
-                      <a:pPr algn="l"/>
-                      <a:r>
-                        <a:rPr sz="1000" b="0">
-                          <a:solidFill>
-                            <a:srgbClr val="1D1B43"/>
-                          </a:solidFill>
-                          <a:latin typeface="Calibri"/>
-                        </a:rPr>
-                        <a:t>9</a:t>
+                    <a:bodyPr/>
+                    <a:lstStyle/>
+                    <a:p>
+                      <a:pPr algn="l"/>
+                      <a:r>
+                        <a:rPr sz="1000" b="0">
+                          <a:solidFill>
+                            <a:srgbClr val="1D1B43"/>
+                          </a:solidFill>
+                          <a:latin typeface="Calibri"/>
+                        </a:rPr>
+                        <a:t>6</a:t>
                       </a:r>
                     </a:p>
                   </a:txBody>
@@ -6718,7 +6718,7 @@
                 </a:tc>
                 <a:tc>
                   <a:txBody>
-                    <a:bodyPr wrap="square"/>
+                    <a:bodyPr/>
                     <a:lstStyle/>
                     <a:p>
                       <a:pPr algn="l"/>
@@ -6741,7 +6741,7 @@
                 </a:tc>
                 <a:tc>
                   <a:txBody>
-                    <a:bodyPr wrap="square"/>
+                    <a:bodyPr/>
                     <a:lstStyle/>
                     <a:p>
                       <a:pPr algn="l"/>
@@ -6764,7 +6764,7 @@
                 </a:tc>
                 <a:tc>
                   <a:txBody>
-                    <a:bodyPr wrap="square"/>
+                    <a:bodyPr/>
                     <a:lstStyle/>
                     <a:p>
                       <a:pPr algn="l"/>
@@ -6789,7 +6789,7 @@
               <a:tr h="292608">
                 <a:tc>
                   <a:txBody>
-                    <a:bodyPr wrap="square"/>
+                    <a:bodyPr/>
                     <a:lstStyle/>
                     <a:p>
                       <a:pPr algn="l"/>
@@ -6812,18 +6812,18 @@
                 </a:tc>
                 <a:tc>
                   <a:txBody>
-                    <a:bodyPr wrap="square"/>
-                    <a:lstStyle/>
-                    <a:p>
-                      <a:pPr algn="l"/>
-                      <a:r>
-                        <a:rPr sz="1000" b="0">
-                          <a:solidFill>
-                            <a:srgbClr val="1D1B43"/>
-                          </a:solidFill>
-                          <a:latin typeface="Calibri"/>
-                        </a:rPr>
-                        <a:t>BMB MATERIAL DE CONS - SUZANO / SP</a:t>
+                    <a:bodyPr/>
+                    <a:lstStyle/>
+                    <a:p>
+                      <a:pPr algn="l"/>
+                      <a:r>
+                        <a:rPr sz="1000" b="0">
+                          <a:solidFill>
+                            <a:srgbClr val="1D1B43"/>
+                          </a:solidFill>
+                          <a:latin typeface="Calibri"/>
+                        </a:rPr>
+                        <a:t>BMB MATERIAL DE CONS - SAO PAULO / SP</a:t>
                       </a:r>
                     </a:p>
                   </a:txBody>
@@ -6835,18 +6835,18 @@
                 </a:tc>
                 <a:tc>
                   <a:txBody>
-                    <a:bodyPr wrap="square"/>
-                    <a:lstStyle/>
-                    <a:p>
-                      <a:pPr algn="l"/>
-                      <a:r>
-                        <a:rPr sz="1000" b="0">
-                          <a:solidFill>
-                            <a:srgbClr val="1D1B43"/>
-                          </a:solidFill>
-                          <a:latin typeface="Calibri"/>
-                        </a:rPr>
-                        <a:t>6</a:t>
+                    <a:bodyPr/>
+                    <a:lstStyle/>
+                    <a:p>
+                      <a:pPr algn="l"/>
+                      <a:r>
+                        <a:rPr sz="1000" b="0">
+                          <a:solidFill>
+                            <a:srgbClr val="1D1B43"/>
+                          </a:solidFill>
+                          <a:latin typeface="Calibri"/>
+                        </a:rPr>
+                        <a:t>5</a:t>
                       </a:r>
                     </a:p>
                   </a:txBody>
@@ -6858,18 +6858,18 @@
                 </a:tc>
                 <a:tc>
                   <a:txBody>
-                    <a:bodyPr wrap="square"/>
-                    <a:lstStyle/>
-                    <a:p>
-                      <a:pPr algn="l"/>
-                      <a:r>
-                        <a:rPr sz="1000" b="0">
-                          <a:solidFill>
-                            <a:srgbClr val="1D1B43"/>
-                          </a:solidFill>
-                          <a:latin typeface="Calibri"/>
-                        </a:rPr>
-                        <a:t>6</a:t>
+                    <a:bodyPr/>
+                    <a:lstStyle/>
+                    <a:p>
+                      <a:pPr algn="l"/>
+                      <a:r>
+                        <a:rPr sz="1000" b="0">
+                          <a:solidFill>
+                            <a:srgbClr val="1D1B43"/>
+                          </a:solidFill>
+                          <a:latin typeface="Calibri"/>
+                        </a:rPr>
+                        <a:t>5</a:t>
                       </a:r>
                     </a:p>
                   </a:txBody>
@@ -6881,7 +6881,7 @@
                 </a:tc>
                 <a:tc>
                   <a:txBody>
-                    <a:bodyPr wrap="square"/>
+                    <a:bodyPr/>
                     <a:lstStyle/>
                     <a:p>
                       <a:pPr algn="l"/>
@@ -6904,7 +6904,7 @@
                 </a:tc>
                 <a:tc>
                   <a:txBody>
-                    <a:bodyPr wrap="square"/>
+                    <a:bodyPr/>
                     <a:lstStyle/>
                     <a:p>
                       <a:pPr algn="l"/>
@@ -6927,7 +6927,7 @@
                 </a:tc>
                 <a:tc>
                   <a:txBody>
-                    <a:bodyPr wrap="square"/>
+                    <a:bodyPr/>
                     <a:lstStyle/>
                     <a:p>
                       <a:pPr algn="l"/>
@@ -6952,7 +6952,7 @@
               <a:tr h="292608">
                 <a:tc>
                   <a:txBody>
-                    <a:bodyPr wrap="square"/>
+                    <a:bodyPr/>
                     <a:lstStyle/>
                     <a:p>
                       <a:pPr algn="l"/>
@@ -6975,7 +6975,7 @@
                 </a:tc>
                 <a:tc>
                   <a:txBody>
-                    <a:bodyPr wrap="square"/>
+                    <a:bodyPr/>
                     <a:lstStyle/>
                     <a:p>
                       <a:pPr algn="l"/>
@@ -6998,7 +6998,7 @@
                 </a:tc>
                 <a:tc>
                   <a:txBody>
-                    <a:bodyPr wrap="square"/>
+                    <a:bodyPr/>
                     <a:lstStyle/>
                     <a:p>
                       <a:pPr algn="l"/>
@@ -7021,7 +7021,7 @@
                 </a:tc>
                 <a:tc>
                   <a:txBody>
-                    <a:bodyPr wrap="square"/>
+                    <a:bodyPr/>
                     <a:lstStyle/>
                     <a:p>
                       <a:pPr algn="l"/>
@@ -7044,7 +7044,7 @@
                 </a:tc>
                 <a:tc>
                   <a:txBody>
-                    <a:bodyPr wrap="square"/>
+                    <a:bodyPr/>
                     <a:lstStyle/>
                     <a:p>
                       <a:pPr algn="l"/>
@@ -7067,7 +7067,7 @@
                 </a:tc>
                 <a:tc>
                   <a:txBody>
-                    <a:bodyPr wrap="square"/>
+                    <a:bodyPr/>
                     <a:lstStyle/>
                     <a:p>
                       <a:pPr algn="l"/>
@@ -7090,7 +7090,7 @@
                 </a:tc>
                 <a:tc>
                   <a:txBody>
-                    <a:bodyPr wrap="square"/>
+                    <a:bodyPr/>
                     <a:lstStyle/>
                     <a:p>
                       <a:pPr algn="l"/>
@@ -7115,7 +7115,7 @@
               <a:tr h="292608">
                 <a:tc>
                   <a:txBody>
-                    <a:bodyPr wrap="square"/>
+                    <a:bodyPr/>
                     <a:lstStyle/>
                     <a:p>
                       <a:pPr algn="l"/>
@@ -7138,7 +7138,7 @@
                 </a:tc>
                 <a:tc>
                   <a:txBody>
-                    <a:bodyPr wrap="square"/>
+                    <a:bodyPr/>
                     <a:lstStyle/>
                     <a:p>
                       <a:pPr algn="l"/>
@@ -7161,7 +7161,7 @@
                 </a:tc>
                 <a:tc>
                   <a:txBody>
-                    <a:bodyPr wrap="square"/>
+                    <a:bodyPr/>
                     <a:lstStyle/>
                     <a:p>
                       <a:pPr algn="l"/>
@@ -7184,7 +7184,7 @@
                 </a:tc>
                 <a:tc>
                   <a:txBody>
-                    <a:bodyPr wrap="square"/>
+                    <a:bodyPr/>
                     <a:lstStyle/>
                     <a:p>
                       <a:pPr algn="l"/>
@@ -7207,7 +7207,7 @@
                 </a:tc>
                 <a:tc>
                   <a:txBody>
-                    <a:bodyPr wrap="square"/>
+                    <a:bodyPr/>
                     <a:lstStyle/>
                     <a:p>
                       <a:pPr algn="l"/>
@@ -7230,7 +7230,7 @@
                 </a:tc>
                 <a:tc>
                   <a:txBody>
-                    <a:bodyPr wrap="square"/>
+                    <a:bodyPr/>
                     <a:lstStyle/>
                     <a:p>
                       <a:pPr algn="l"/>
@@ -7253,7 +7253,7 @@
                 </a:tc>
                 <a:tc>
                   <a:txBody>
-                    <a:bodyPr wrap="square"/>
+                    <a:bodyPr/>
                     <a:lstStyle/>
                     <a:p>
                       <a:pPr algn="l"/>
@@ -7278,7 +7278,7 @@
               <a:tr h="292608">
                 <a:tc>
                   <a:txBody>
-                    <a:bodyPr wrap="square"/>
+                    <a:bodyPr/>
                     <a:lstStyle/>
                     <a:p>
                       <a:pPr algn="l"/>
@@ -7301,18 +7301,18 @@
                 </a:tc>
                 <a:tc>
                   <a:txBody>
-                    <a:bodyPr wrap="square"/>
-                    <a:lstStyle/>
-                    <a:p>
-                      <a:pPr algn="l"/>
-                      <a:r>
-                        <a:rPr sz="1000" b="0">
-                          <a:solidFill>
-                            <a:srgbClr val="1D1B43"/>
-                          </a:solidFill>
-                          <a:latin typeface="Calibri"/>
-                        </a:rPr>
-                        <a:t>CONSTRUDECOR S/A - GUARULHOS / SP</a:t>
+                    <a:bodyPr/>
+                    <a:lstStyle/>
+                    <a:p>
+                      <a:pPr algn="l"/>
+                      <a:r>
+                        <a:rPr sz="1000" b="0">
+                          <a:solidFill>
+                            <a:srgbClr val="1D1B43"/>
+                          </a:solidFill>
+                          <a:latin typeface="Calibri"/>
+                        </a:rPr>
+                        <a:t>ITACORDA INDUSTRIA E - PENHA / SC</a:t>
                       </a:r>
                     </a:p>
                   </a:txBody>
@@ -7324,7 +7324,7 @@
                 </a:tc>
                 <a:tc>
                   <a:txBody>
-                    <a:bodyPr wrap="square"/>
+                    <a:bodyPr/>
                     <a:lstStyle/>
                     <a:p>
                       <a:pPr algn="l"/>
@@ -7347,7 +7347,7 @@
                 </a:tc>
                 <a:tc>
                   <a:txBody>
-                    <a:bodyPr wrap="square"/>
+                    <a:bodyPr/>
                     <a:lstStyle/>
                     <a:p>
                       <a:pPr algn="l"/>
@@ -7370,7 +7370,7 @@
                 </a:tc>
                 <a:tc>
                   <a:txBody>
-                    <a:bodyPr wrap="square"/>
+                    <a:bodyPr/>
                     <a:lstStyle/>
                     <a:p>
                       <a:pPr algn="l"/>
@@ -7393,7 +7393,7 @@
                 </a:tc>
                 <a:tc>
                   <a:txBody>
-                    <a:bodyPr wrap="square"/>
+                    <a:bodyPr/>
                     <a:lstStyle/>
                     <a:p>
                       <a:pPr algn="l"/>
@@ -7416,7 +7416,7 @@
                 </a:tc>
                 <a:tc>
                   <a:txBody>
-                    <a:bodyPr wrap="square"/>
+                    <a:bodyPr/>
                     <a:lstStyle/>
                     <a:p>
                       <a:pPr algn="l"/>
@@ -7441,7 +7441,7 @@
               <a:tr h="292608">
                 <a:tc>
                   <a:txBody>
-                    <a:bodyPr wrap="square"/>
+                    <a:bodyPr/>
                     <a:lstStyle/>
                     <a:p>
                       <a:pPr algn="l"/>
@@ -7464,18 +7464,18 @@
                 </a:tc>
                 <a:tc>
                   <a:txBody>
-                    <a:bodyPr wrap="square"/>
-                    <a:lstStyle/>
-                    <a:p>
-                      <a:pPr algn="l"/>
-                      <a:r>
-                        <a:rPr sz="1000" b="0">
-                          <a:solidFill>
-                            <a:srgbClr val="1D1B43"/>
-                          </a:solidFill>
-                          <a:latin typeface="Calibri"/>
-                        </a:rPr>
-                        <a:t>ITACORDA INDUSTRIA E - PENHA / SC</a:t>
+                    <a:bodyPr/>
+                    <a:lstStyle/>
+                    <a:p>
+                      <a:pPr algn="l"/>
+                      <a:r>
+                        <a:rPr sz="1000" b="0">
+                          <a:solidFill>
+                            <a:srgbClr val="1D1B43"/>
+                          </a:solidFill>
+                          <a:latin typeface="Calibri"/>
+                        </a:rPr>
+                        <a:t>MAX LONAS E ACESSORI - GUARULHOS / SP</a:t>
                       </a:r>
                     </a:p>
                   </a:txBody>
@@ -7487,18 +7487,18 @@
                 </a:tc>
                 <a:tc>
                   <a:txBody>
-                    <a:bodyPr wrap="square"/>
-                    <a:lstStyle/>
-                    <a:p>
-                      <a:pPr algn="l"/>
-                      <a:r>
-                        <a:rPr sz="1000" b="0">
-                          <a:solidFill>
-                            <a:srgbClr val="1D1B43"/>
-                          </a:solidFill>
-                          <a:latin typeface="Calibri"/>
-                        </a:rPr>
-                        <a:t>4</a:t>
+                    <a:bodyPr/>
+                    <a:lstStyle/>
+                    <a:p>
+                      <a:pPr algn="l"/>
+                      <a:r>
+                        <a:rPr sz="1000" b="0">
+                          <a:solidFill>
+                            <a:srgbClr val="1D1B43"/>
+                          </a:solidFill>
+                          <a:latin typeface="Calibri"/>
+                        </a:rPr>
+                        <a:t>3</a:t>
                       </a:r>
                     </a:p>
                   </a:txBody>
@@ -7510,18 +7510,18 @@
                 </a:tc>
                 <a:tc>
                   <a:txBody>
-                    <a:bodyPr wrap="square"/>
-                    <a:lstStyle/>
-                    <a:p>
-                      <a:pPr algn="l"/>
-                      <a:r>
-                        <a:rPr sz="1000" b="0">
-                          <a:solidFill>
-                            <a:srgbClr val="1D1B43"/>
-                          </a:solidFill>
-                          <a:latin typeface="Calibri"/>
-                        </a:rPr>
-                        <a:t>4</a:t>
+                    <a:bodyPr/>
+                    <a:lstStyle/>
+                    <a:p>
+                      <a:pPr algn="l"/>
+                      <a:r>
+                        <a:rPr sz="1000" b="0">
+                          <a:solidFill>
+                            <a:srgbClr val="1D1B43"/>
+                          </a:solidFill>
+                          <a:latin typeface="Calibri"/>
+                        </a:rPr>
+                        <a:t>3</a:t>
                       </a:r>
                     </a:p>
                   </a:txBody>
@@ -7533,7 +7533,7 @@
                 </a:tc>
                 <a:tc>
                   <a:txBody>
-                    <a:bodyPr wrap="square"/>
+                    <a:bodyPr/>
                     <a:lstStyle/>
                     <a:p>
                       <a:pPr algn="l"/>
@@ -7556,7 +7556,7 @@
                 </a:tc>
                 <a:tc>
                   <a:txBody>
-                    <a:bodyPr wrap="square"/>
+                    <a:bodyPr/>
                     <a:lstStyle/>
                     <a:p>
                       <a:pPr algn="l"/>
@@ -7579,7 +7579,7 @@
                 </a:tc>
                 <a:tc>
                   <a:txBody>
-                    <a:bodyPr wrap="square"/>
+                    <a:bodyPr/>
                     <a:lstStyle/>
                     <a:p>
                       <a:pPr algn="l"/>
@@ -7604,7 +7604,7 @@
               <a:tr h="292608">
                 <a:tc>
                   <a:txBody>
-                    <a:bodyPr wrap="square"/>
+                    <a:bodyPr/>
                     <a:lstStyle/>
                     <a:p>
                       <a:pPr algn="l"/>
@@ -7627,18 +7627,18 @@
                 </a:tc>
                 <a:tc>
                   <a:txBody>
-                    <a:bodyPr wrap="square"/>
-                    <a:lstStyle/>
-                    <a:p>
-                      <a:pPr algn="l"/>
-                      <a:r>
-                        <a:rPr sz="1000" b="0">
-                          <a:solidFill>
-                            <a:srgbClr val="1D1B43"/>
-                          </a:solidFill>
-                          <a:latin typeface="Calibri"/>
-                        </a:rPr>
-                        <a:t>MAX LONAS E ACESSORI - GUARULHOS / SP</a:t>
+                    <a:bodyPr/>
+                    <a:lstStyle/>
+                    <a:p>
+                      <a:pPr algn="l"/>
+                      <a:r>
+                        <a:rPr sz="1000" b="0">
+                          <a:solidFill>
+                            <a:srgbClr val="1D1B43"/>
+                          </a:solidFill>
+                          <a:latin typeface="Calibri"/>
+                        </a:rPr>
+                        <a:t>CONSTRUDECOR S/A - GUARULHOS / SP</a:t>
                       </a:r>
                     </a:p>
                   </a:txBody>
@@ -7650,7 +7650,7 @@
                 </a:tc>
                 <a:tc>
                   <a:txBody>
-                    <a:bodyPr wrap="square"/>
+                    <a:bodyPr/>
                     <a:lstStyle/>
                     <a:p>
                       <a:pPr algn="l"/>
@@ -7673,7 +7673,7 @@
                 </a:tc>
                 <a:tc>
                   <a:txBody>
-                    <a:bodyPr wrap="square"/>
+                    <a:bodyPr/>
                     <a:lstStyle/>
                     <a:p>
                       <a:pPr algn="l"/>
@@ -7696,7 +7696,7 @@
                 </a:tc>
                 <a:tc>
                   <a:txBody>
-                    <a:bodyPr wrap="square"/>
+                    <a:bodyPr/>
                     <a:lstStyle/>
                     <a:p>
                       <a:pPr algn="l"/>
@@ -7719,7 +7719,7 @@
                 </a:tc>
                 <a:tc>
                   <a:txBody>
-                    <a:bodyPr wrap="square"/>
+                    <a:bodyPr/>
                     <a:lstStyle/>
                     <a:p>
                       <a:pPr algn="l"/>
@@ -7742,7 +7742,7 @@
                 </a:tc>
                 <a:tc>
                   <a:txBody>
-                    <a:bodyPr wrap="square"/>
+                    <a:bodyPr/>
                     <a:lstStyle/>
                     <a:p>
                       <a:pPr algn="l"/>
@@ -7767,7 +7767,7 @@
               <a:tr h="292608">
                 <a:tc>
                   <a:txBody>
-                    <a:bodyPr wrap="square"/>
+                    <a:bodyPr/>
                     <a:lstStyle/>
                     <a:p>
                       <a:pPr algn="l"/>
@@ -7790,7 +7790,7 @@
                 </a:tc>
                 <a:tc>
                   <a:txBody>
-                    <a:bodyPr wrap="square"/>
+                    <a:bodyPr/>
                     <a:lstStyle/>
                     <a:p>
                       <a:pPr algn="l"/>
@@ -7813,7 +7813,7 @@
                 </a:tc>
                 <a:tc>
                   <a:txBody>
-                    <a:bodyPr wrap="square"/>
+                    <a:bodyPr/>
                     <a:lstStyle/>
                     <a:p>
                       <a:pPr algn="l"/>
@@ -7836,7 +7836,7 @@
                 </a:tc>
                 <a:tc>
                   <a:txBody>
-                    <a:bodyPr wrap="square"/>
+                    <a:bodyPr/>
                     <a:lstStyle/>
                     <a:p>
                       <a:pPr algn="l"/>
@@ -7859,7 +7859,7 @@
                 </a:tc>
                 <a:tc>
                   <a:txBody>
-                    <a:bodyPr wrap="square"/>
+                    <a:bodyPr/>
                     <a:lstStyle/>
                     <a:p>
                       <a:pPr algn="l"/>
@@ -7882,7 +7882,7 @@
                 </a:tc>
                 <a:tc>
                   <a:txBody>
-                    <a:bodyPr wrap="square"/>
+                    <a:bodyPr/>
                     <a:lstStyle/>
                     <a:p>
                       <a:pPr algn="l"/>
@@ -7905,7 +7905,7 @@
                 </a:tc>
                 <a:tc>
                   <a:txBody>
-                    <a:bodyPr wrap="square"/>
+                    <a:bodyPr/>
                     <a:lstStyle/>
                     <a:p>
                       <a:pPr algn="l"/>
@@ -7930,7 +7930,7 @@
               <a:tr h="292608">
                 <a:tc>
                   <a:txBody>
-                    <a:bodyPr wrap="square"/>
+                    <a:bodyPr/>
                     <a:lstStyle/>
                     <a:p>
                       <a:pPr algn="l"/>
@@ -7953,7 +7953,7 @@
                 </a:tc>
                 <a:tc>
                   <a:txBody>
-                    <a:bodyPr wrap="square"/>
+                    <a:bodyPr/>
                     <a:lstStyle/>
                     <a:p>
                       <a:pPr algn="l"/>
@@ -7976,7 +7976,7 @@
                 </a:tc>
                 <a:tc>
                   <a:txBody>
-                    <a:bodyPr wrap="square"/>
+                    <a:bodyPr/>
                     <a:lstStyle/>
                     <a:p>
                       <a:pPr algn="l"/>
@@ -7999,7 +7999,7 @@
                 </a:tc>
                 <a:tc>
                   <a:txBody>
-                    <a:bodyPr wrap="square"/>
+                    <a:bodyPr/>
                     <a:lstStyle/>
                     <a:p>
                       <a:pPr algn="l"/>
@@ -8022,7 +8022,7 @@
                 </a:tc>
                 <a:tc>
                   <a:txBody>
-                    <a:bodyPr wrap="square"/>
+                    <a:bodyPr/>
                     <a:lstStyle/>
                     <a:p>
                       <a:pPr algn="l"/>
@@ -8045,7 +8045,7 @@
                 </a:tc>
                 <a:tc>
                   <a:txBody>
-                    <a:bodyPr wrap="square"/>
+                    <a:bodyPr/>
                     <a:lstStyle/>
                     <a:p>
                       <a:pPr algn="l"/>
@@ -8068,7 +8068,7 @@
                 </a:tc>
                 <a:tc>
                   <a:txBody>
-                    <a:bodyPr wrap="square"/>
+                    <a:bodyPr/>
                     <a:lstStyle/>
                     <a:p>
                       <a:pPr algn="l"/>
@@ -8093,7 +8093,7 @@
               <a:tr h="292608">
                 <a:tc>
                   <a:txBody>
-                    <a:bodyPr wrap="square"/>
+                    <a:bodyPr/>
                     <a:lstStyle/>
                     <a:p>
                       <a:pPr algn="l"/>
@@ -8116,7 +8116,7 @@
                 </a:tc>
                 <a:tc>
                   <a:txBody>
-                    <a:bodyPr wrap="square"/>
+                    <a:bodyPr/>
                     <a:lstStyle/>
                     <a:p>
                       <a:pPr algn="l"/>
@@ -8139,7 +8139,7 @@
                 </a:tc>
                 <a:tc>
                   <a:txBody>
-                    <a:bodyPr wrap="square"/>
+                    <a:bodyPr/>
                     <a:lstStyle/>
                     <a:p>
                       <a:pPr algn="l"/>
@@ -8162,7 +8162,7 @@
                 </a:tc>
                 <a:tc>
                   <a:txBody>
-                    <a:bodyPr wrap="square"/>
+                    <a:bodyPr/>
                     <a:lstStyle/>
                     <a:p>
                       <a:pPr algn="l"/>
@@ -8185,7 +8185,7 @@
                 </a:tc>
                 <a:tc>
                   <a:txBody>
-                    <a:bodyPr wrap="square"/>
+                    <a:bodyPr/>
                     <a:lstStyle/>
                     <a:p>
                       <a:pPr algn="l"/>
@@ -8208,7 +8208,7 @@
                 </a:tc>
                 <a:tc>
                   <a:txBody>
-                    <a:bodyPr wrap="square"/>
+                    <a:bodyPr/>
                     <a:lstStyle/>
                     <a:p>
                       <a:pPr algn="l"/>
@@ -8231,7 +8231,7 @@
                 </a:tc>
                 <a:tc>
                   <a:txBody>
-                    <a:bodyPr wrap="square"/>
+                    <a:bodyPr/>
                     <a:lstStyle/>
                     <a:p>
                       <a:pPr algn="l"/>
@@ -8256,7 +8256,7 @@
               <a:tr h="292608">
                 <a:tc>
                   <a:txBody>
-                    <a:bodyPr wrap="square"/>
+                    <a:bodyPr/>
                     <a:lstStyle/>
                     <a:p>
                       <a:pPr algn="l"/>
@@ -8279,7 +8279,7 @@
                 </a:tc>
                 <a:tc>
                   <a:txBody>
-                    <a:bodyPr wrap="square"/>
+                    <a:bodyPr/>
                     <a:lstStyle/>
                     <a:p>
                       <a:pPr algn="l"/>
@@ -8302,7 +8302,7 @@
                 </a:tc>
                 <a:tc>
                   <a:txBody>
-                    <a:bodyPr wrap="square"/>
+                    <a:bodyPr/>
                     <a:lstStyle/>
                     <a:p>
                       <a:pPr algn="l"/>
@@ -8325,7 +8325,7 @@
                 </a:tc>
                 <a:tc>
                   <a:txBody>
-                    <a:bodyPr wrap="square"/>
+                    <a:bodyPr/>
                     <a:lstStyle/>
                     <a:p>
                       <a:pPr algn="l"/>
@@ -8348,7 +8348,7 @@
                 </a:tc>
                 <a:tc>
                   <a:txBody>
-                    <a:bodyPr wrap="square"/>
+                    <a:bodyPr/>
                     <a:lstStyle/>
                     <a:p>
                       <a:pPr algn="l"/>
@@ -8371,7 +8371,7 @@
                 </a:tc>
                 <a:tc>
                   <a:txBody>
-                    <a:bodyPr wrap="square"/>
+                    <a:bodyPr/>
                     <a:lstStyle/>
                     <a:p>
                       <a:pPr algn="l"/>
@@ -8394,7 +8394,7 @@
                 </a:tc>
                 <a:tc>
                   <a:txBody>
-                    <a:bodyPr wrap="square"/>
+                    <a:bodyPr/>
                     <a:lstStyle/>
                     <a:p>
                       <a:pPr algn="l"/>
@@ -8419,7 +8419,7 @@
               <a:tr h="292608">
                 <a:tc>
                   <a:txBody>
-                    <a:bodyPr wrap="square"/>
+                    <a:bodyPr/>
                     <a:lstStyle/>
                     <a:p>
                       <a:pPr algn="l"/>
@@ -8442,7 +8442,7 @@
                 </a:tc>
                 <a:tc>
                   <a:txBody>
-                    <a:bodyPr wrap="square"/>
+                    <a:bodyPr/>
                     <a:lstStyle/>
                     <a:p>
                       <a:pPr algn="l"/>
@@ -8465,7 +8465,7 @@
                 </a:tc>
                 <a:tc>
                   <a:txBody>
-                    <a:bodyPr wrap="square"/>
+                    <a:bodyPr/>
                     <a:lstStyle/>
                     <a:p>
                       <a:pPr algn="l"/>
@@ -8488,7 +8488,7 @@
                 </a:tc>
                 <a:tc>
                   <a:txBody>
-                    <a:bodyPr wrap="square"/>
+                    <a:bodyPr/>
                     <a:lstStyle/>
                     <a:p>
                       <a:pPr algn="l"/>
@@ -8511,7 +8511,7 @@
                 </a:tc>
                 <a:tc>
                   <a:txBody>
-                    <a:bodyPr wrap="square"/>
+                    <a:bodyPr/>
                     <a:lstStyle/>
                     <a:p>
                       <a:pPr algn="l"/>
@@ -8534,7 +8534,7 @@
                 </a:tc>
                 <a:tc>
                   <a:txBody>
-                    <a:bodyPr wrap="square"/>
+                    <a:bodyPr/>
                     <a:lstStyle/>
                     <a:p>
                       <a:pPr algn="l"/>
@@ -8557,7 +8557,7 @@
                 </a:tc>
                 <a:tc>
                   <a:txBody>
-                    <a:bodyPr wrap="square"/>
+                    <a:bodyPr/>
                     <a:lstStyle/>
                     <a:p>
                       <a:pPr algn="l"/>
@@ -8582,7 +8582,7 @@
               <a:tr h="292608">
                 <a:tc>
                   <a:txBody>
-                    <a:bodyPr wrap="square"/>
+                    <a:bodyPr/>
                     <a:lstStyle/>
                     <a:p>
                       <a:pPr algn="l"/>
@@ -8605,7 +8605,7 @@
                 </a:tc>
                 <a:tc>
                   <a:txBody>
-                    <a:bodyPr wrap="square"/>
+                    <a:bodyPr/>
                     <a:lstStyle/>
                     <a:p>
                       <a:pPr algn="l"/>
@@ -8628,7 +8628,7 @@
                 </a:tc>
                 <a:tc>
                   <a:txBody>
-                    <a:bodyPr wrap="square"/>
+                    <a:bodyPr/>
                     <a:lstStyle/>
                     <a:p>
                       <a:pPr algn="l"/>
@@ -8651,7 +8651,7 @@
                 </a:tc>
                 <a:tc>
                   <a:txBody>
-                    <a:bodyPr wrap="square"/>
+                    <a:bodyPr/>
                     <a:lstStyle/>
                     <a:p>
                       <a:pPr algn="l"/>
@@ -8674,7 +8674,7 @@
                 </a:tc>
                 <a:tc>
                   <a:txBody>
-                    <a:bodyPr wrap="square"/>
+                    <a:bodyPr/>
                     <a:lstStyle/>
                     <a:p>
                       <a:pPr algn="l"/>
@@ -8697,7 +8697,7 @@
                 </a:tc>
                 <a:tc>
                   <a:txBody>
-                    <a:bodyPr wrap="square"/>
+                    <a:bodyPr/>
                     <a:lstStyle/>
                     <a:p>
                       <a:pPr algn="l"/>
@@ -8720,7 +8720,7 @@
                 </a:tc>
                 <a:tc>
                   <a:txBody>
-                    <a:bodyPr wrap="square"/>
+                    <a:bodyPr/>
                     <a:lstStyle/>
                     <a:p>
                       <a:pPr algn="l"/>
@@ -8745,7 +8745,7 @@
               <a:tr h="292608">
                 <a:tc>
                   <a:txBody>
-                    <a:bodyPr wrap="square"/>
+                    <a:bodyPr/>
                     <a:lstStyle/>
                     <a:p>
                       <a:pPr algn="l"/>
@@ -8768,7 +8768,7 @@
                 </a:tc>
                 <a:tc>
                   <a:txBody>
-                    <a:bodyPr wrap="square"/>
+                    <a:bodyPr/>
                     <a:lstStyle/>
                     <a:p>
                       <a:pPr algn="l"/>
@@ -8791,7 +8791,7 @@
                 </a:tc>
                 <a:tc>
                   <a:txBody>
-                    <a:bodyPr wrap="square"/>
+                    <a:bodyPr/>
                     <a:lstStyle/>
                     <a:p>
                       <a:pPr algn="l"/>
@@ -8814,7 +8814,7 @@
                 </a:tc>
                 <a:tc>
                   <a:txBody>
-                    <a:bodyPr wrap="square"/>
+                    <a:bodyPr/>
                     <a:lstStyle/>
                     <a:p>
                       <a:pPr algn="l"/>
@@ -8837,7 +8837,7 @@
                 </a:tc>
                 <a:tc>
                   <a:txBody>
-                    <a:bodyPr wrap="square"/>
+                    <a:bodyPr/>
                     <a:lstStyle/>
                     <a:p>
                       <a:pPr algn="l"/>
@@ -8860,7 +8860,7 @@
                 </a:tc>
                 <a:tc>
                   <a:txBody>
-                    <a:bodyPr wrap="square"/>
+                    <a:bodyPr/>
                     <a:lstStyle/>
                     <a:p>
                       <a:pPr algn="l"/>
@@ -8883,7 +8883,7 @@
                 </a:tc>
                 <a:tc>
                   <a:txBody>
-                    <a:bodyPr wrap="square"/>
+                    <a:bodyPr/>
                     <a:lstStyle/>
                     <a:p>
                       <a:pPr algn="l"/>

--- a/ITACORDA_INDUSTRIA_E_COMERCIO.pptx
+++ b/ITACORDA_INDUSTRIA_E_COMERCIO.pptx
@@ -147,10 +147,10 @@
               <c:strCache>
                 <c:ptCount val="2"/>
                 <c:pt idx="0">
-                  <c:v>Marco 2026</c:v>
+                  <c:v>Abril 2026</c:v>
                 </c:pt>
                 <c:pt idx="1">
-                  <c:v>Abril 2026</c:v>
+                  <c:v>Maio 2026</c:v>
                 </c:pt>
               </c:strCache>
             </c:strRef>
@@ -162,10 +162,10 @@
                 <c:formatCode>General</c:formatCode>
                 <c:ptCount val="2"/>
                 <c:pt idx="0">
-                  <c:v>0</c:v>
+                  <c:v>62</c:v>
                 </c:pt>
                 <c:pt idx="1">
-                  <c:v>61</c:v>
+                  <c:v>56</c:v>
                 </c:pt>
               </c:numCache>
             </c:numRef>
@@ -196,10 +196,10 @@
               <c:strCache>
                 <c:ptCount val="2"/>
                 <c:pt idx="0">
-                  <c:v>Marco 2026</c:v>
+                  <c:v>Abril 2026</c:v>
                 </c:pt>
                 <c:pt idx="1">
-                  <c:v>Abril 2026</c:v>
+                  <c:v>Maio 2026</c:v>
                 </c:pt>
               </c:strCache>
             </c:strRef>
@@ -214,7 +214,7 @@
                   <c:v>0</c:v>
                 </c:pt>
                 <c:pt idx="1">
-                  <c:v>1</c:v>
+                  <c:v>5</c:v>
                 </c:pt>
               </c:numCache>
             </c:numRef>
@@ -3387,7 +3387,7 @@
                 </a:solidFill>
                 <a:latin typeface="Calibri"/>
               </a:rPr>
-              <a:t>INDICADORES ABRIL 2026</a:t>
+              <a:t>INDICADORES MAIO 2026</a:t>
             </a:r>
           </a:p>
         </p:txBody>
@@ -3709,7 +3709,7 @@
                 </a:solidFill>
                 <a:latin typeface="Calibri"/>
               </a:rPr>
-              <a:t>62</a:t>
+              <a:t>61</a:t>
             </a:r>
           </a:p>
         </p:txBody>
@@ -3824,7 +3824,7 @@
                 </a:solidFill>
                 <a:latin typeface="Calibri"/>
               </a:rPr>
-              <a:t>61</a:t>
+              <a:t>56</a:t>
             </a:r>
           </a:p>
         </p:txBody>
@@ -3939,7 +3939,7 @@
                 </a:solidFill>
                 <a:latin typeface="Calibri"/>
               </a:rPr>
-              <a:t>1</a:t>
+              <a:t>5</a:t>
             </a:r>
           </a:p>
         </p:txBody>
@@ -4050,11 +4050,11 @@
             <a:r>
               <a:rPr sz="2800" b="1">
                 <a:solidFill>
-                  <a:srgbClr val="10B981"/>
+                  <a:srgbClr val="F59E0B"/>
                 </a:solidFill>
                 <a:latin typeface="Calibri"/>
               </a:rPr>
-              <a:t>98.4%</a:t>
+              <a:t>91.8%</a:t>
             </a:r>
           </a:p>
         </p:txBody>
@@ -4155,7 +4155,7 @@
                           </a:solidFill>
                           <a:latin typeface="Calibri"/>
                         </a:rPr>
-                        <a:t>Marco 2026</a:t>
+                        <a:t>Abril 2026</a:t>
                       </a:r>
                     </a:p>
                   </a:txBody>
@@ -4178,7 +4178,7 @@
                           </a:solidFill>
                           <a:latin typeface="Calibri"/>
                         </a:rPr>
-                        <a:t>Abril 2026</a:t>
+                        <a:t>Maio 2026</a:t>
                       </a:r>
                     </a:p>
                   </a:txBody>
@@ -4249,7 +4249,7 @@
                           </a:solidFill>
                           <a:latin typeface="Calibri"/>
                         </a:rPr>
-                        <a:t>0</a:t>
+                        <a:t>62</a:t>
                       </a:r>
                     </a:p>
                   </a:txBody>
@@ -4272,7 +4272,7 @@
                           </a:solidFill>
                           <a:latin typeface="Calibri"/>
                         </a:rPr>
-                        <a:t>62</a:t>
+                        <a:t>61</a:t>
                       </a:r>
                     </a:p>
                   </a:txBody>
@@ -4295,7 +4295,7 @@
                           </a:solidFill>
                           <a:latin typeface="Calibri"/>
                         </a:rPr>
-                        <a:t>+ 62</a:t>
+                        <a:t>- 1</a:t>
                       </a:r>
                     </a:p>
                   </a:txBody>
@@ -4343,7 +4343,7 @@
                           </a:solidFill>
                           <a:latin typeface="Calibri"/>
                         </a:rPr>
-                        <a:t>0</a:t>
+                        <a:t>62</a:t>
                       </a:r>
                     </a:p>
                   </a:txBody>
@@ -4366,7 +4366,7 @@
                           </a:solidFill>
                           <a:latin typeface="Calibri"/>
                         </a:rPr>
-                        <a:t>61</a:t>
+                        <a:t>56</a:t>
                       </a:r>
                     </a:p>
                   </a:txBody>
@@ -4389,7 +4389,7 @@
                           </a:solidFill>
                           <a:latin typeface="Calibri"/>
                         </a:rPr>
-                        <a:t>+ 61</a:t>
+                        <a:t>- 6</a:t>
                       </a:r>
                     </a:p>
                   </a:txBody>
@@ -4460,7 +4460,7 @@
                           </a:solidFill>
                           <a:latin typeface="Calibri"/>
                         </a:rPr>
-                        <a:t>1</a:t>
+                        <a:t>5</a:t>
                       </a:r>
                     </a:p>
                   </a:txBody>
@@ -4483,7 +4483,7 @@
                           </a:solidFill>
                           <a:latin typeface="Calibri"/>
                         </a:rPr>
-                        <a:t>+ 1</a:t>
+                        <a:t>+ 5</a:t>
                       </a:r>
                     </a:p>
                   </a:txBody>
@@ -4531,7 +4531,7 @@
                           </a:solidFill>
                           <a:latin typeface="Calibri"/>
                         </a:rPr>
-                        <a:t>98.4%</a:t>
+                        <a:t>100.0%</a:t>
                       </a:r>
                     </a:p>
                   </a:txBody>
@@ -4554,7 +4554,7 @@
                           </a:solidFill>
                           <a:latin typeface="Calibri"/>
                         </a:rPr>
-                        <a:t>98.4%</a:t>
+                        <a:t>91.8%</a:t>
                       </a:r>
                     </a:p>
                   </a:txBody>
@@ -4577,7 +4577,7 @@
                           </a:solidFill>
                           <a:latin typeface="Calibri"/>
                         </a:rPr>
-                        <a:t>+ 0.0pp</a:t>
+                        <a:t>- 8.2pp</a:t>
                       </a:r>
                     </a:p>
                   </a:txBody>
@@ -4894,7 +4894,7 @@
                           </a:solidFill>
                           <a:latin typeface="Calibri"/>
                         </a:rPr>
-                        <a:t>Marco 2026</a:t>
+                        <a:t>Abril 2026</a:t>
                       </a:r>
                     </a:p>
                   </a:txBody>
@@ -4917,6 +4917,52 @@
                           </a:solidFill>
                           <a:latin typeface="Calibri"/>
                         </a:rPr>
+                        <a:t>62</a:t>
+                      </a:r>
+                    </a:p>
+                  </a:txBody>
+                  <a:tcPr>
+                    <a:solidFill>
+                      <a:srgbClr val="FFFFFF"/>
+                    </a:solidFill>
+                  </a:tcPr>
+                </a:tc>
+                <a:tc>
+                  <a:txBody>
+                    <a:bodyPr/>
+                    <a:lstStyle/>
+                    <a:p>
+                      <a:pPr algn="l"/>
+                      <a:r>
+                        <a:rPr sz="1000" b="0">
+                          <a:solidFill>
+                            <a:srgbClr val="1D1B43"/>
+                          </a:solidFill>
+                          <a:latin typeface="Calibri"/>
+                        </a:rPr>
+                        <a:t>62</a:t>
+                      </a:r>
+                    </a:p>
+                  </a:txBody>
+                  <a:tcPr>
+                    <a:solidFill>
+                      <a:srgbClr val="FFFFFF"/>
+                    </a:solidFill>
+                  </a:tcPr>
+                </a:tc>
+                <a:tc>
+                  <a:txBody>
+                    <a:bodyPr/>
+                    <a:lstStyle/>
+                    <a:p>
+                      <a:pPr algn="l"/>
+                      <a:r>
+                        <a:rPr sz="1000" b="0">
+                          <a:solidFill>
+                            <a:srgbClr val="1D1B43"/>
+                          </a:solidFill>
+                          <a:latin typeface="Calibri"/>
+                        </a:rPr>
                         <a:t>0</a:t>
                       </a:r>
                     </a:p>
@@ -4940,53 +4986,7 @@
                           </a:solidFill>
                           <a:latin typeface="Calibri"/>
                         </a:rPr>
-                        <a:t>0</a:t>
-                      </a:r>
-                    </a:p>
-                  </a:txBody>
-                  <a:tcPr>
-                    <a:solidFill>
-                      <a:srgbClr val="FFFFFF"/>
-                    </a:solidFill>
-                  </a:tcPr>
-                </a:tc>
-                <a:tc>
-                  <a:txBody>
-                    <a:bodyPr/>
-                    <a:lstStyle/>
-                    <a:p>
-                      <a:pPr algn="l"/>
-                      <a:r>
-                        <a:rPr sz="1000" b="0">
-                          <a:solidFill>
-                            <a:srgbClr val="1D1B43"/>
-                          </a:solidFill>
-                          <a:latin typeface="Calibri"/>
-                        </a:rPr>
-                        <a:t>0</a:t>
-                      </a:r>
-                    </a:p>
-                  </a:txBody>
-                  <a:tcPr>
-                    <a:solidFill>
-                      <a:srgbClr val="FFFFFF"/>
-                    </a:solidFill>
-                  </a:tcPr>
-                </a:tc>
-                <a:tc>
-                  <a:txBody>
-                    <a:bodyPr/>
-                    <a:lstStyle/>
-                    <a:p>
-                      <a:pPr algn="l"/>
-                      <a:r>
-                        <a:rPr sz="1000" b="0">
-                          <a:solidFill>
-                            <a:srgbClr val="1D1B43"/>
-                          </a:solidFill>
-                          <a:latin typeface="Calibri"/>
-                        </a:rPr>
-                        <a:t>98.4%</a:t>
+                        <a:t>100.0%</a:t>
                       </a:r>
                     </a:p>
                   </a:txBody>
@@ -5011,7 +5011,7 @@
                           </a:solidFill>
                           <a:latin typeface="Calibri"/>
                         </a:rPr>
-                        <a:t>Abril 2026</a:t>
+                        <a:t>Maio 2026</a:t>
                       </a:r>
                     </a:p>
                   </a:txBody>
@@ -5034,7 +5034,7 @@
                           </a:solidFill>
                           <a:latin typeface="Calibri"/>
                         </a:rPr>
-                        <a:t>62</a:t>
+                        <a:t>61</a:t>
                       </a:r>
                     </a:p>
                   </a:txBody>
@@ -5057,7 +5057,7 @@
                           </a:solidFill>
                           <a:latin typeface="Calibri"/>
                         </a:rPr>
-                        <a:t>61</a:t>
+                        <a:t>56</a:t>
                       </a:r>
                     </a:p>
                   </a:txBody>
@@ -5080,7 +5080,7 @@
                           </a:solidFill>
                           <a:latin typeface="Calibri"/>
                         </a:rPr>
-                        <a:t>1</a:t>
+                        <a:t>5</a:t>
                       </a:r>
                     </a:p>
                   </a:txBody>
@@ -5103,7 +5103,7 @@
                           </a:solidFill>
                           <a:latin typeface="Calibri"/>
                         </a:rPr>
-                        <a:t>98.4%</a:t>
+                        <a:t>91.8%</a:t>
                       </a:r>
                     </a:p>
                   </a:txBody>
@@ -5191,7 +5191,7 @@
                 </a:solidFill>
                 <a:latin typeface="Calibri"/>
               </a:rPr>
-              <a:t>PERFORMANCE: 98.4% - EXCELENTE</a:t>
+              <a:t>PERFORMANCE: 91.8% - REGULAR</a:t>
             </a:r>
           </a:p>
         </p:txBody>
@@ -5276,7 +5276,7 @@
                 </a:solidFill>
                 <a:latin typeface="Calibri"/>
               </a:rPr>
-              <a:t>OCORRENCIAS FORA DO PRAZO (1)</a:t>
+              <a:t>OCORRENCIAS FORA DO PRAZO (5)</a:t>
             </a:r>
           </a:p>
         </p:txBody>
@@ -5334,7 +5334,7 @@
         </p:nvGraphicFramePr>
         <p:xfrm>
           <a:off x="457200" y="1828800"/>
-          <a:ext cx="11429999" cy="768096"/>
+          <a:ext cx="11429999" cy="2304288"/>
         </p:xfrm>
         <a:graphic>
           <a:graphicData uri="http://schemas.openxmlformats.org/drawingml/2006/table">
@@ -5480,7 +5480,7 @@
                           </a:solidFill>
                           <a:latin typeface="Calibri"/>
                         </a:rPr>
-                        <a:t>276924</a:t>
+                        <a:t>280638</a:t>
                       </a:r>
                     </a:p>
                   </a:txBody>
@@ -5503,7 +5503,7 @@
                           </a:solidFill>
                           <a:latin typeface="Calibri"/>
                         </a:rPr>
-                        <a:t>TRANSPORTADORA PENHE - SAO PAULO / SP</a:t>
+                        <a:t>CLODOALDO COM DE ENC - GUARULHOS / SP</a:t>
                       </a:r>
                     </a:p>
                   </a:txBody>
@@ -5526,12 +5526,434 @@
                           </a:solidFill>
                           <a:latin typeface="Calibri"/>
                         </a:rPr>
+                        <a:t>GUARULHOS/SP</a:t>
+                      </a:r>
+                    </a:p>
+                  </a:txBody>
+                  <a:tcPr>
+                    <a:solidFill>
+                      <a:srgbClr val="FFFFFF"/>
+                    </a:solidFill>
+                  </a:tcPr>
+                </a:tc>
+                <a:tc>
+                  <a:txBody>
+                    <a:bodyPr/>
+                    <a:lstStyle/>
+                    <a:p>
+                      <a:pPr algn="l"/>
+                      <a:r>
+                        <a:rPr sz="1000" b="0">
+                          <a:solidFill>
+                            <a:srgbClr val="1D1B43"/>
+                          </a:solidFill>
+                          <a:latin typeface="Calibri"/>
+                        </a:rPr>
+                        <a:t>04/05/2026</a:t>
+                      </a:r>
+                    </a:p>
+                  </a:txBody>
+                  <a:tcPr>
+                    <a:solidFill>
+                      <a:srgbClr val="FFFFFF"/>
+                    </a:solidFill>
+                  </a:tcPr>
+                </a:tc>
+                <a:tc>
+                  <a:txBody>
+                    <a:bodyPr/>
+                    <a:lstStyle/>
+                    <a:p>
+                      <a:pPr algn="l"/>
+                      <a:r>
+                        <a:rPr sz="1000" b="0">
+                          <a:solidFill>
+                            <a:srgbClr val="1D1B43"/>
+                          </a:solidFill>
+                          <a:latin typeface="Calibri"/>
+                        </a:rPr>
+                        <a:t>ENTREGUE FORA DO PRAZO</a:t>
+                      </a:r>
+                    </a:p>
+                  </a:txBody>
+                  <a:tcPr>
+                    <a:solidFill>
+                      <a:srgbClr val="FFFFFF"/>
+                    </a:solidFill>
+                  </a:tcPr>
+                </a:tc>
+              </a:tr>
+              <a:tr h="384048">
+                <a:tc>
+                  <a:txBody>
+                    <a:bodyPr/>
+                    <a:lstStyle/>
+                    <a:p>
+                      <a:pPr algn="l"/>
+                      <a:r>
+                        <a:rPr sz="1000" b="0">
+                          <a:solidFill>
+                            <a:srgbClr val="1D1B43"/>
+                          </a:solidFill>
+                          <a:latin typeface="Calibri"/>
+                        </a:rPr>
+                        <a:t>280639</a:t>
+                      </a:r>
+                    </a:p>
+                  </a:txBody>
+                  <a:tcPr>
+                    <a:solidFill>
+                      <a:srgbClr val="F2F2F2"/>
+                    </a:solidFill>
+                  </a:tcPr>
+                </a:tc>
+                <a:tc>
+                  <a:txBody>
+                    <a:bodyPr/>
+                    <a:lstStyle/>
+                    <a:p>
+                      <a:pPr algn="l"/>
+                      <a:r>
+                        <a:rPr sz="1000" b="0">
+                          <a:solidFill>
+                            <a:srgbClr val="1D1B43"/>
+                          </a:solidFill>
+                          <a:latin typeface="Calibri"/>
+                        </a:rPr>
+                        <a:t>CLODOALDO COM DE ENC - GUARULHOS / SP</a:t>
+                      </a:r>
+                    </a:p>
+                  </a:txBody>
+                  <a:tcPr>
+                    <a:solidFill>
+                      <a:srgbClr val="F2F2F2"/>
+                    </a:solidFill>
+                  </a:tcPr>
+                </a:tc>
+                <a:tc>
+                  <a:txBody>
+                    <a:bodyPr/>
+                    <a:lstStyle/>
+                    <a:p>
+                      <a:pPr algn="l"/>
+                      <a:r>
+                        <a:rPr sz="1000" b="0">
+                          <a:solidFill>
+                            <a:srgbClr val="1D1B43"/>
+                          </a:solidFill>
+                          <a:latin typeface="Calibri"/>
+                        </a:rPr>
+                        <a:t>GUARULHOS/SP</a:t>
+                      </a:r>
+                    </a:p>
+                  </a:txBody>
+                  <a:tcPr>
+                    <a:solidFill>
+                      <a:srgbClr val="F2F2F2"/>
+                    </a:solidFill>
+                  </a:tcPr>
+                </a:tc>
+                <a:tc>
+                  <a:txBody>
+                    <a:bodyPr/>
+                    <a:lstStyle/>
+                    <a:p>
+                      <a:pPr algn="l"/>
+                      <a:r>
+                        <a:rPr sz="1000" b="0">
+                          <a:solidFill>
+                            <a:srgbClr val="1D1B43"/>
+                          </a:solidFill>
+                          <a:latin typeface="Calibri"/>
+                        </a:rPr>
+                        <a:t>04/05/2026</a:t>
+                      </a:r>
+                    </a:p>
+                  </a:txBody>
+                  <a:tcPr>
+                    <a:solidFill>
+                      <a:srgbClr val="F2F2F2"/>
+                    </a:solidFill>
+                  </a:tcPr>
+                </a:tc>
+                <a:tc>
+                  <a:txBody>
+                    <a:bodyPr/>
+                    <a:lstStyle/>
+                    <a:p>
+                      <a:pPr algn="l"/>
+                      <a:r>
+                        <a:rPr sz="1000" b="0">
+                          <a:solidFill>
+                            <a:srgbClr val="1D1B43"/>
+                          </a:solidFill>
+                          <a:latin typeface="Calibri"/>
+                        </a:rPr>
+                        <a:t>ENTREGUE FORA DO PRAZO</a:t>
+                      </a:r>
+                    </a:p>
+                  </a:txBody>
+                  <a:tcPr>
+                    <a:solidFill>
+                      <a:srgbClr val="F2F2F2"/>
+                    </a:solidFill>
+                  </a:tcPr>
+                </a:tc>
+              </a:tr>
+              <a:tr h="384048">
+                <a:tc>
+                  <a:txBody>
+                    <a:bodyPr/>
+                    <a:lstStyle/>
+                    <a:p>
+                      <a:pPr algn="l"/>
+                      <a:r>
+                        <a:rPr sz="1000" b="0">
+                          <a:solidFill>
+                            <a:srgbClr val="1D1B43"/>
+                          </a:solidFill>
+                          <a:latin typeface="Calibri"/>
+                        </a:rPr>
+                        <a:t>281514</a:t>
+                      </a:r>
+                    </a:p>
+                  </a:txBody>
+                  <a:tcPr>
+                    <a:solidFill>
+                      <a:srgbClr val="FFFFFF"/>
+                    </a:solidFill>
+                  </a:tcPr>
+                </a:tc>
+                <a:tc>
+                  <a:txBody>
+                    <a:bodyPr/>
+                    <a:lstStyle/>
+                    <a:p>
+                      <a:pPr algn="l"/>
+                      <a:r>
+                        <a:rPr sz="1000" b="0">
+                          <a:solidFill>
+                            <a:srgbClr val="1D1B43"/>
+                          </a:solidFill>
+                          <a:latin typeface="Calibri"/>
+                        </a:rPr>
+                        <a:t>JORTEK EXPRESS - GUARULHOS / SP</a:t>
+                      </a:r>
+                    </a:p>
+                  </a:txBody>
+                  <a:tcPr>
+                    <a:solidFill>
+                      <a:srgbClr val="FFFFFF"/>
+                    </a:solidFill>
+                  </a:tcPr>
+                </a:tc>
+                <a:tc>
+                  <a:txBody>
+                    <a:bodyPr/>
+                    <a:lstStyle/>
+                    <a:p>
+                      <a:pPr algn="l"/>
+                      <a:r>
+                        <a:rPr sz="1000" b="0">
+                          <a:solidFill>
+                            <a:srgbClr val="1D1B43"/>
+                          </a:solidFill>
+                          <a:latin typeface="Calibri"/>
+                        </a:rPr>
+                        <a:t>GUARULHOS/SP</a:t>
+                      </a:r>
+                    </a:p>
+                  </a:txBody>
+                  <a:tcPr>
+                    <a:solidFill>
+                      <a:srgbClr val="FFFFFF"/>
+                    </a:solidFill>
+                  </a:tcPr>
+                </a:tc>
+                <a:tc>
+                  <a:txBody>
+                    <a:bodyPr/>
+                    <a:lstStyle/>
+                    <a:p>
+                      <a:pPr algn="l"/>
+                      <a:r>
+                        <a:rPr sz="1000" b="0">
+                          <a:solidFill>
+                            <a:srgbClr val="1D1B43"/>
+                          </a:solidFill>
+                          <a:latin typeface="Calibri"/>
+                        </a:rPr>
+                        <a:t>07/05/2026</a:t>
+                      </a:r>
+                    </a:p>
+                  </a:txBody>
+                  <a:tcPr>
+                    <a:solidFill>
+                      <a:srgbClr val="FFFFFF"/>
+                    </a:solidFill>
+                  </a:tcPr>
+                </a:tc>
+                <a:tc>
+                  <a:txBody>
+                    <a:bodyPr/>
+                    <a:lstStyle/>
+                    <a:p>
+                      <a:pPr algn="l"/>
+                      <a:r>
+                        <a:rPr sz="1000" b="0">
+                          <a:solidFill>
+                            <a:srgbClr val="1D1B43"/>
+                          </a:solidFill>
+                          <a:latin typeface="Calibri"/>
+                        </a:rPr>
+                        <a:t>ENTREGUE FORA DO PRAZO</a:t>
+                      </a:r>
+                    </a:p>
+                  </a:txBody>
+                  <a:tcPr>
+                    <a:solidFill>
+                      <a:srgbClr val="FFFFFF"/>
+                    </a:solidFill>
+                  </a:tcPr>
+                </a:tc>
+              </a:tr>
+              <a:tr h="384048">
+                <a:tc>
+                  <a:txBody>
+                    <a:bodyPr/>
+                    <a:lstStyle/>
+                    <a:p>
+                      <a:pPr algn="l"/>
+                      <a:r>
+                        <a:rPr sz="1000" b="0">
+                          <a:solidFill>
+                            <a:srgbClr val="1D1B43"/>
+                          </a:solidFill>
+                          <a:latin typeface="Calibri"/>
+                        </a:rPr>
+                        <a:t>281845</a:t>
+                      </a:r>
+                    </a:p>
+                  </a:txBody>
+                  <a:tcPr>
+                    <a:solidFill>
+                      <a:srgbClr val="F2F2F2"/>
+                    </a:solidFill>
+                  </a:tcPr>
+                </a:tc>
+                <a:tc>
+                  <a:txBody>
+                    <a:bodyPr/>
+                    <a:lstStyle/>
+                    <a:p>
+                      <a:pPr algn="l"/>
+                      <a:r>
+                        <a:rPr sz="1000" b="0">
+                          <a:solidFill>
+                            <a:srgbClr val="1D1B43"/>
+                          </a:solidFill>
+                          <a:latin typeface="Calibri"/>
+                        </a:rPr>
+                        <a:t>7 OLIVEIRAS DISTRIBU - SAO PAULO / SP</a:t>
+                      </a:r>
+                    </a:p>
+                  </a:txBody>
+                  <a:tcPr>
+                    <a:solidFill>
+                      <a:srgbClr val="F2F2F2"/>
+                    </a:solidFill>
+                  </a:tcPr>
+                </a:tc>
+                <a:tc>
+                  <a:txBody>
+                    <a:bodyPr/>
+                    <a:lstStyle/>
+                    <a:p>
+                      <a:pPr algn="l"/>
+                      <a:r>
+                        <a:rPr sz="1000" b="0">
+                          <a:solidFill>
+                            <a:srgbClr val="1D1B43"/>
+                          </a:solidFill>
+                          <a:latin typeface="Calibri"/>
+                        </a:rPr>
                         <a:t>SAO PAULO/SP</a:t>
                       </a:r>
                     </a:p>
                   </a:txBody>
                   <a:tcPr>
                     <a:solidFill>
+                      <a:srgbClr val="F2F2F2"/>
+                    </a:solidFill>
+                  </a:tcPr>
+                </a:tc>
+                <a:tc>
+                  <a:txBody>
+                    <a:bodyPr/>
+                    <a:lstStyle/>
+                    <a:p>
+                      <a:pPr algn="l"/>
+                      <a:r>
+                        <a:rPr sz="1000" b="0">
+                          <a:solidFill>
+                            <a:srgbClr val="1D1B43"/>
+                          </a:solidFill>
+                          <a:latin typeface="Calibri"/>
+                        </a:rPr>
+                        <a:t>11/05/2026</a:t>
+                      </a:r>
+                    </a:p>
+                  </a:txBody>
+                  <a:tcPr>
+                    <a:solidFill>
+                      <a:srgbClr val="F2F2F2"/>
+                    </a:solidFill>
+                  </a:tcPr>
+                </a:tc>
+                <a:tc>
+                  <a:txBody>
+                    <a:bodyPr/>
+                    <a:lstStyle/>
+                    <a:p>
+                      <a:pPr algn="l"/>
+                      <a:r>
+                        <a:rPr sz="1000" b="0">
+                          <a:solidFill>
+                            <a:srgbClr val="1D1B43"/>
+                          </a:solidFill>
+                          <a:latin typeface="Calibri"/>
+                        </a:rPr>
+                        <a:t>ENTREGUE FORA DO PRAZO</a:t>
+                      </a:r>
+                    </a:p>
+                  </a:txBody>
+                  <a:tcPr>
+                    <a:solidFill>
+                      <a:srgbClr val="F2F2F2"/>
+                    </a:solidFill>
+                  </a:tcPr>
+                </a:tc>
+              </a:tr>
+              <a:tr h="384048">
+                <a:tc>
+                  <a:txBody>
+                    <a:bodyPr/>
+                    <a:lstStyle/>
+                    <a:p>
+                      <a:pPr algn="l"/>
+                      <a:r>
+                        <a:rPr sz="1000" b="0">
+                          <a:solidFill>
+                            <a:srgbClr val="1D1B43"/>
+                          </a:solidFill>
+                          <a:latin typeface="Calibri"/>
+                        </a:rPr>
+                        <a:t>282484</a:t>
+                      </a:r>
+                    </a:p>
+                  </a:txBody>
+                  <a:tcPr>
+                    <a:solidFill>
                       <a:srgbClr val="FFFFFF"/>
                     </a:solidFill>
                   </a:tcPr>
@@ -5549,7 +5971,53 @@
                           </a:solidFill>
                           <a:latin typeface="Calibri"/>
                         </a:rPr>
-                        <a:t>01/04/2026</a:t>
+                        <a:t>PRADA PLUS DO BRASIL - SAO PAULO / SP</a:t>
+                      </a:r>
+                    </a:p>
+                  </a:txBody>
+                  <a:tcPr>
+                    <a:solidFill>
+                      <a:srgbClr val="FFFFFF"/>
+                    </a:solidFill>
+                  </a:tcPr>
+                </a:tc>
+                <a:tc>
+                  <a:txBody>
+                    <a:bodyPr/>
+                    <a:lstStyle/>
+                    <a:p>
+                      <a:pPr algn="l"/>
+                      <a:r>
+                        <a:rPr sz="1000" b="0">
+                          <a:solidFill>
+                            <a:srgbClr val="1D1B43"/>
+                          </a:solidFill>
+                          <a:latin typeface="Calibri"/>
+                        </a:rPr>
+                        <a:t>SAO PAULO/SP</a:t>
+                      </a:r>
+                    </a:p>
+                  </a:txBody>
+                  <a:tcPr>
+                    <a:solidFill>
+                      <a:srgbClr val="FFFFFF"/>
+                    </a:solidFill>
+                  </a:tcPr>
+                </a:tc>
+                <a:tc>
+                  <a:txBody>
+                    <a:bodyPr/>
+                    <a:lstStyle/>
+                    <a:p>
+                      <a:pPr algn="l"/>
+                      <a:r>
+                        <a:rPr sz="1000" b="0">
+                          <a:solidFill>
+                            <a:srgbClr val="1D1B43"/>
+                          </a:solidFill>
+                          <a:latin typeface="Calibri"/>
+                        </a:rPr>
+                        <a:t>14/05/2026</a:t>
                       </a:r>
                     </a:p>
                   </a:txBody>
@@ -5725,7 +6193,7 @@
         </p:nvGraphicFramePr>
         <p:xfrm>
           <a:off x="731520" y="1920240"/>
-          <a:ext cx="10698480" cy="1828800"/>
+          <a:ext cx="10698480" cy="1371600"/>
         </p:xfrm>
         <a:graphic>
           <a:graphicData uri="http://schemas.openxmlformats.org/drawingml/2006/table">
@@ -5918,7 +6386,7 @@
                           </a:solidFill>
                           <a:latin typeface="Calibri"/>
                         </a:rPr>
-                        <a:t>57</a:t>
+                        <a:t>60</a:t>
                       </a:r>
                     </a:p>
                   </a:txBody>
@@ -5941,7 +6409,7 @@
                           </a:solidFill>
                           <a:latin typeface="Calibri"/>
                         </a:rPr>
-                        <a:t>56</a:t>
+                        <a:t>55</a:t>
                       </a:r>
                     </a:p>
                   </a:txBody>
@@ -5964,7 +6432,7 @@
                           </a:solidFill>
                           <a:latin typeface="Calibri"/>
                         </a:rPr>
-                        <a:t>1</a:t>
+                        <a:t>5</a:t>
                       </a:r>
                     </a:p>
                   </a:txBody>
@@ -5987,7 +6455,7 @@
                           </a:solidFill>
                           <a:latin typeface="Calibri"/>
                         </a:rPr>
-                        <a:t>98.2%</a:t>
+                        <a:t>91.7%</a:t>
                       </a:r>
                     </a:p>
                   </a:txBody>
@@ -6010,7 +6478,7 @@
                           </a:solidFill>
                           <a:latin typeface="Calibri"/>
                         </a:rPr>
-                        <a:t>Excelente</a:t>
+                        <a:t>Regular</a:t>
                       </a:r>
                     </a:p>
                   </a:txBody>
@@ -6058,7 +6526,7 @@
                           </a:solidFill>
                           <a:latin typeface="Calibri"/>
                         </a:rPr>
-                        <a:t>4</a:t>
+                        <a:t>1</a:t>
                       </a:r>
                     </a:p>
                   </a:txBody>
@@ -6081,7 +6549,7 @@
                           </a:solidFill>
                           <a:latin typeface="Calibri"/>
                         </a:rPr>
-                        <a:t>4</a:t>
+                        <a:t>1</a:t>
                       </a:r>
                     </a:p>
                   </a:txBody>
@@ -6157,146 +6625,6 @@
                   <a:tcPr>
                     <a:solidFill>
                       <a:srgbClr val="F2F2F2"/>
-                    </a:solidFill>
-                  </a:tcPr>
-                </a:tc>
-              </a:tr>
-              <a:tr h="457200">
-                <a:tc>
-                  <a:txBody>
-                    <a:bodyPr/>
-                    <a:lstStyle/>
-                    <a:p>
-                      <a:pPr algn="l"/>
-                      <a:r>
-                        <a:rPr sz="1000" b="0">
-                          <a:solidFill>
-                            <a:srgbClr val="1D1B43"/>
-                          </a:solidFill>
-                          <a:latin typeface="Calibri"/>
-                        </a:rPr>
-                        <a:t>PR</a:t>
-                      </a:r>
-                    </a:p>
-                  </a:txBody>
-                  <a:tcPr>
-                    <a:solidFill>
-                      <a:srgbClr val="FFFFFF"/>
-                    </a:solidFill>
-                  </a:tcPr>
-                </a:tc>
-                <a:tc>
-                  <a:txBody>
-                    <a:bodyPr/>
-                    <a:lstStyle/>
-                    <a:p>
-                      <a:pPr algn="l"/>
-                      <a:r>
-                        <a:rPr sz="1000" b="0">
-                          <a:solidFill>
-                            <a:srgbClr val="1D1B43"/>
-                          </a:solidFill>
-                          <a:latin typeface="Calibri"/>
-                        </a:rPr>
-                        <a:t>1</a:t>
-                      </a:r>
-                    </a:p>
-                  </a:txBody>
-                  <a:tcPr>
-                    <a:solidFill>
-                      <a:srgbClr val="FFFFFF"/>
-                    </a:solidFill>
-                  </a:tcPr>
-                </a:tc>
-                <a:tc>
-                  <a:txBody>
-                    <a:bodyPr/>
-                    <a:lstStyle/>
-                    <a:p>
-                      <a:pPr algn="l"/>
-                      <a:r>
-                        <a:rPr sz="1000" b="0">
-                          <a:solidFill>
-                            <a:srgbClr val="1D1B43"/>
-                          </a:solidFill>
-                          <a:latin typeface="Calibri"/>
-                        </a:rPr>
-                        <a:t>1</a:t>
-                      </a:r>
-                    </a:p>
-                  </a:txBody>
-                  <a:tcPr>
-                    <a:solidFill>
-                      <a:srgbClr val="FFFFFF"/>
-                    </a:solidFill>
-                  </a:tcPr>
-                </a:tc>
-                <a:tc>
-                  <a:txBody>
-                    <a:bodyPr/>
-                    <a:lstStyle/>
-                    <a:p>
-                      <a:pPr algn="l"/>
-                      <a:r>
-                        <a:rPr sz="1000" b="0">
-                          <a:solidFill>
-                            <a:srgbClr val="1D1B43"/>
-                          </a:solidFill>
-                          <a:latin typeface="Calibri"/>
-                        </a:rPr>
-                        <a:t>0</a:t>
-                      </a:r>
-                    </a:p>
-                  </a:txBody>
-                  <a:tcPr>
-                    <a:solidFill>
-                      <a:srgbClr val="FFFFFF"/>
-                    </a:solidFill>
-                  </a:tcPr>
-                </a:tc>
-                <a:tc>
-                  <a:txBody>
-                    <a:bodyPr/>
-                    <a:lstStyle/>
-                    <a:p>
-                      <a:pPr algn="l"/>
-                      <a:r>
-                        <a:rPr sz="1000" b="0">
-                          <a:solidFill>
-                            <a:srgbClr val="1D1B43"/>
-                          </a:solidFill>
-                          <a:latin typeface="Calibri"/>
-                        </a:rPr>
-                        <a:t>100.0%</a:t>
-                      </a:r>
-                    </a:p>
-                  </a:txBody>
-                  <a:tcPr>
-                    <a:solidFill>
-                      <a:srgbClr val="FFFFFF"/>
-                    </a:solidFill>
-                  </a:tcPr>
-                </a:tc>
-                <a:tc>
-                  <a:txBody>
-                    <a:bodyPr/>
-                    <a:lstStyle/>
-                    <a:p>
-                      <a:pPr algn="l"/>
-                      <a:r>
-                        <a:rPr sz="1000" b="0">
-                          <a:solidFill>
-                            <a:srgbClr val="1D1B43"/>
-                          </a:solidFill>
-                          <a:latin typeface="Calibri"/>
-                        </a:rPr>
-                        <a:t>Excelente</a:t>
-                      </a:r>
-                    </a:p>
-                  </a:txBody>
-                  <a:tcPr>
-                    <a:solidFill>
-                      <a:srgbClr val="FFFFFF"/>
                     </a:solidFill>
                   </a:tcPr>
                 </a:tc>
@@ -6385,7 +6713,7 @@
                 </a:solidFill>
                 <a:latin typeface="Calibri"/>
               </a:rPr>
-              <a:t>TOP DESTINATARIOS (31 pontos)</a:t>
+              <a:t>TOP DESTINATARIOS (29 pontos)</a:t>
             </a:r>
           </a:p>
         </p:txBody>
@@ -6660,7 +6988,7 @@
                           </a:solidFill>
                           <a:latin typeface="Calibri"/>
                         </a:rPr>
-                        <a:t>BMB MATERIAL DE CONS - SUZANO / SP</a:t>
+                        <a:t>BMB MATERIAL DE CONS - SAO PAULO / SP</a:t>
                       </a:r>
                     </a:p>
                   </a:txBody>
@@ -6683,7 +7011,7 @@
                           </a:solidFill>
                           <a:latin typeface="Calibri"/>
                         </a:rPr>
-                        <a:t>6</a:t>
+                        <a:t>18</a:t>
                       </a:r>
                     </a:p>
                   </a:txBody>
@@ -6706,7 +7034,7 @@
                           </a:solidFill>
                           <a:latin typeface="Calibri"/>
                         </a:rPr>
-                        <a:t>6</a:t>
+                        <a:t>18</a:t>
                       </a:r>
                     </a:p>
                   </a:txBody>
@@ -6823,7 +7151,7 @@
                           </a:solidFill>
                           <a:latin typeface="Calibri"/>
                         </a:rPr>
-                        <a:t>BMB MATERIAL DE CONS - SAO PAULO / SP</a:t>
+                        <a:t>BMB MATERIAL DE CONS - SUZANO / SP</a:t>
                       </a:r>
                     </a:p>
                   </a:txBody>
@@ -6846,7 +7174,7 @@
                           </a:solidFill>
                           <a:latin typeface="Calibri"/>
                         </a:rPr>
-                        <a:t>5</a:t>
+                        <a:t>3</a:t>
                       </a:r>
                     </a:p>
                   </a:txBody>
@@ -6869,7 +7197,7 @@
                           </a:solidFill>
                           <a:latin typeface="Calibri"/>
                         </a:rPr>
-                        <a:t>5</a:t>
+                        <a:t>3</a:t>
                       </a:r>
                     </a:p>
                   </a:txBody>
@@ -6986,7 +7314,7 @@
                           </a:solidFill>
                           <a:latin typeface="Calibri"/>
                         </a:rPr>
-                        <a:t>UNI RAPIDO TRANSPORT - GUARULHOS / SP</a:t>
+                        <a:t>FM TRANSPORTES, LOCA - GUARULHOS / SP</a:t>
                       </a:r>
                     </a:p>
                   </a:txBody>
@@ -7009,7 +7337,7 @@
                           </a:solidFill>
                           <a:latin typeface="Calibri"/>
                         </a:rPr>
-                        <a:t>5</a:t>
+                        <a:t>3</a:t>
                       </a:r>
                     </a:p>
                   </a:txBody>
@@ -7032,7 +7360,7 @@
                           </a:solidFill>
                           <a:latin typeface="Calibri"/>
                         </a:rPr>
-                        <a:t>5</a:t>
+                        <a:t>3</a:t>
                       </a:r>
                     </a:p>
                   </a:txBody>
@@ -7149,7 +7477,7 @@
                           </a:solidFill>
                           <a:latin typeface="Calibri"/>
                         </a:rPr>
-                        <a:t>TRANS - AMIGOS TRANS - GUARULHOS / SP</a:t>
+                        <a:t>JORTEK EXPRESS - GUARULHOS / SP</a:t>
                       </a:r>
                     </a:p>
                   </a:txBody>
@@ -7172,7 +7500,7 @@
                           </a:solidFill>
                           <a:latin typeface="Calibri"/>
                         </a:rPr>
-                        <a:t>5</a:t>
+                        <a:t>3</a:t>
                       </a:r>
                     </a:p>
                   </a:txBody>
@@ -7195,7 +7523,7 @@
                           </a:solidFill>
                           <a:latin typeface="Calibri"/>
                         </a:rPr>
-                        <a:t>5</a:t>
+                        <a:t>2</a:t>
                       </a:r>
                     </a:p>
                   </a:txBody>
@@ -7218,7 +7546,7 @@
                           </a:solidFill>
                           <a:latin typeface="Calibri"/>
                         </a:rPr>
-                        <a:t>0</a:t>
+                        <a:t>1</a:t>
                       </a:r>
                     </a:p>
                   </a:txBody>
@@ -7241,7 +7569,7 @@
                           </a:solidFill>
                           <a:latin typeface="Calibri"/>
                         </a:rPr>
-                        <a:t>100.0%</a:t>
+                        <a:t>66.7%</a:t>
                       </a:r>
                     </a:p>
                   </a:txBody>
@@ -7264,7 +7592,7 @@
                           </a:solidFill>
                           <a:latin typeface="Calibri"/>
                         </a:rPr>
-                        <a:t>Excelente</a:t>
+                        <a:t>Atencao</a:t>
                       </a:r>
                     </a:p>
                   </a:txBody>
@@ -7312,7 +7640,7 @@
                           </a:solidFill>
                           <a:latin typeface="Calibri"/>
                         </a:rPr>
-                        <a:t>ITACORDA INDUSTRIA E - PENHA / SC</a:t>
+                        <a:t>MAX LONAS E ACESSORI - GUARULHOS / SP</a:t>
                       </a:r>
                     </a:p>
                   </a:txBody>
@@ -7335,7 +7663,7 @@
                           </a:solidFill>
                           <a:latin typeface="Calibri"/>
                         </a:rPr>
-                        <a:t>4</a:t>
+                        <a:t>3</a:t>
                       </a:r>
                     </a:p>
                   </a:txBody>
@@ -7358,7 +7686,7 @@
                           </a:solidFill>
                           <a:latin typeface="Calibri"/>
                         </a:rPr>
-                        <a:t>4</a:t>
+                        <a:t>3</a:t>
                       </a:r>
                     </a:p>
                   </a:txBody>
@@ -7475,7 +7803,7 @@
                           </a:solidFill>
                           <a:latin typeface="Calibri"/>
                         </a:rPr>
-                        <a:t>MAX LONAS E ACESSORI - GUARULHOS / SP</a:t>
+                        <a:t>SEVERINO MELO ALVES - SAO PAULO / SP</a:t>
                       </a:r>
                     </a:p>
                   </a:txBody>
@@ -7638,7 +7966,7 @@
                           </a:solidFill>
                           <a:latin typeface="Calibri"/>
                         </a:rPr>
-                        <a:t>CONSTRUDECOR S/A - GUARULHOS / SP</a:t>
+                        <a:t>DUCORTE FERRAMENTAS - SAO PAULO / SP</a:t>
                       </a:r>
                     </a:p>
                   </a:txBody>
@@ -7661,7 +7989,7 @@
                           </a:solidFill>
                           <a:latin typeface="Calibri"/>
                         </a:rPr>
-                        <a:t>3</a:t>
+                        <a:t>2</a:t>
                       </a:r>
                     </a:p>
                   </a:txBody>
@@ -7684,7 +8012,7 @@
                           </a:solidFill>
                           <a:latin typeface="Calibri"/>
                         </a:rPr>
-                        <a:t>3</a:t>
+                        <a:t>2</a:t>
                       </a:r>
                     </a:p>
                   </a:txBody>
@@ -7801,7 +8129,7 @@
                           </a:solidFill>
                           <a:latin typeface="Calibri"/>
                         </a:rPr>
-                        <a:t>VAILOG TRANSPORTES E - SAO PAULO / SP</a:t>
+                        <a:t>J B DE AGUILAR TRANS - SAO PAULO / SP</a:t>
                       </a:r>
                     </a:p>
                   </a:txBody>
@@ -7824,7 +8152,7 @@
                           </a:solidFill>
                           <a:latin typeface="Calibri"/>
                         </a:rPr>
-                        <a:t>3</a:t>
+                        <a:t>2</a:t>
                       </a:r>
                     </a:p>
                   </a:txBody>
@@ -7847,7 +8175,7 @@
                           </a:solidFill>
                           <a:latin typeface="Calibri"/>
                         </a:rPr>
-                        <a:t>3</a:t>
+                        <a:t>2</a:t>
                       </a:r>
                     </a:p>
                   </a:txBody>
@@ -7964,7 +8292,7 @@
                           </a:solidFill>
                           <a:latin typeface="Calibri"/>
                         </a:rPr>
-                        <a:t>RAPIDO XAPURI TRANSP - GUARULHOS / SP</a:t>
+                        <a:t>CLODOALDO COM DE ENC - GUARULHOS / SP</a:t>
                       </a:r>
                     </a:p>
                   </a:txBody>
@@ -8010,6 +8338,29 @@
                           </a:solidFill>
                           <a:latin typeface="Calibri"/>
                         </a:rPr>
+                        <a:t>0</a:t>
+                      </a:r>
+                    </a:p>
+                  </a:txBody>
+                  <a:tcPr>
+                    <a:solidFill>
+                      <a:srgbClr val="FFFFFF"/>
+                    </a:solidFill>
+                  </a:tcPr>
+                </a:tc>
+                <a:tc>
+                  <a:txBody>
+                    <a:bodyPr/>
+                    <a:lstStyle/>
+                    <a:p>
+                      <a:pPr algn="l"/>
+                      <a:r>
+                        <a:rPr sz="1000" b="0">
+                          <a:solidFill>
+                            <a:srgbClr val="1D1B43"/>
+                          </a:solidFill>
+                          <a:latin typeface="Calibri"/>
+                        </a:rPr>
                         <a:t>2</a:t>
                       </a:r>
                     </a:p>
@@ -8033,7 +8384,7 @@
                           </a:solidFill>
                           <a:latin typeface="Calibri"/>
                         </a:rPr>
-                        <a:t>0</a:t>
+                        <a:t>0.0%</a:t>
                       </a:r>
                     </a:p>
                   </a:txBody>
@@ -8056,30 +8407,7 @@
                           </a:solidFill>
                           <a:latin typeface="Calibri"/>
                         </a:rPr>
-                        <a:t>100.0%</a:t>
-                      </a:r>
-                    </a:p>
-                  </a:txBody>
-                  <a:tcPr>
-                    <a:solidFill>
-                      <a:srgbClr val="FFFFFF"/>
-                    </a:solidFill>
-                  </a:tcPr>
-                </a:tc>
-                <a:tc>
-                  <a:txBody>
-                    <a:bodyPr/>
-                    <a:lstStyle/>
-                    <a:p>
-                      <a:pPr algn="l"/>
-                      <a:r>
-                        <a:rPr sz="1000" b="0">
-                          <a:solidFill>
-                            <a:srgbClr val="1D1B43"/>
-                          </a:solidFill>
-                          <a:latin typeface="Calibri"/>
-                        </a:rPr>
-                        <a:t>Excelente</a:t>
+                        <a:t>Atencao</a:t>
                       </a:r>
                     </a:p>
                   </a:txBody>
@@ -8127,7 +8455,7 @@
                           </a:solidFill>
                           <a:latin typeface="Calibri"/>
                         </a:rPr>
-                        <a:t>TELECARGAS - SAO PAULO / SP</a:t>
+                        <a:t>TEMPO REAL TRANSPORT - GUARULHOS / SP</a:t>
                       </a:r>
                     </a:p>
                   </a:txBody>
@@ -8290,7 +8618,7 @@
                           </a:solidFill>
                           <a:latin typeface="Calibri"/>
                         </a:rPr>
-                        <a:t>TRANSPORTADORA PENHE - SAO PAULO / SP</a:t>
+                        <a:t>TRANSPRESS TRANSPORT - GUARULHOS / SP</a:t>
                       </a:r>
                     </a:p>
                   </a:txBody>
@@ -8336,7 +8664,7 @@
                           </a:solidFill>
                           <a:latin typeface="Calibri"/>
                         </a:rPr>
-                        <a:t>1</a:t>
+                        <a:t>2</a:t>
                       </a:r>
                     </a:p>
                   </a:txBody>
@@ -8359,7 +8687,7 @@
                           </a:solidFill>
                           <a:latin typeface="Calibri"/>
                         </a:rPr>
-                        <a:t>1</a:t>
+                        <a:t>0</a:t>
                       </a:r>
                     </a:p>
                   </a:txBody>
@@ -8382,7 +8710,7 @@
                           </a:solidFill>
                           <a:latin typeface="Calibri"/>
                         </a:rPr>
-                        <a:t>50.0%</a:t>
+                        <a:t>100.0%</a:t>
                       </a:r>
                     </a:p>
                   </a:txBody>
@@ -8405,7 +8733,7 @@
                           </a:solidFill>
                           <a:latin typeface="Calibri"/>
                         </a:rPr>
-                        <a:t>Atencao</a:t>
+                        <a:t>Excelente</a:t>
                       </a:r>
                     </a:p>
                   </a:txBody>
@@ -8453,7 +8781,7 @@
                           </a:solidFill>
                           <a:latin typeface="Calibri"/>
                         </a:rPr>
-                        <a:t>FIDELIZA LOGISTICA - SAO PAULO / SP</a:t>
+                        <a:t>AND LOG TRANSPORTES - SAO PAULO / SP</a:t>
                       </a:r>
                     </a:p>
                   </a:txBody>
@@ -8476,7 +8804,7 @@
                           </a:solidFill>
                           <a:latin typeface="Calibri"/>
                         </a:rPr>
-                        <a:t>2</a:t>
+                        <a:t>1</a:t>
                       </a:r>
                     </a:p>
                   </a:txBody>
@@ -8499,7 +8827,7 @@
                           </a:solidFill>
                           <a:latin typeface="Calibri"/>
                         </a:rPr>
-                        <a:t>2</a:t>
+                        <a:t>1</a:t>
                       </a:r>
                     </a:p>
                   </a:txBody>
@@ -8616,7 +8944,7 @@
                           </a:solidFill>
                           <a:latin typeface="Calibri"/>
                         </a:rPr>
-                        <a:t>W. O. DOS SANTOS ENC - GUARULHOS / SP</a:t>
+                        <a:t>7 OLIVEIRAS DISTRIBU - SAO PAULO / SP</a:t>
                       </a:r>
                     </a:p>
                   </a:txBody>
@@ -8639,7 +8967,7 @@
                           </a:solidFill>
                           <a:latin typeface="Calibri"/>
                         </a:rPr>
-                        <a:t>2</a:t>
+                        <a:t>1</a:t>
                       </a:r>
                     </a:p>
                   </a:txBody>
@@ -8662,7 +8990,7 @@
                           </a:solidFill>
                           <a:latin typeface="Calibri"/>
                         </a:rPr>
-                        <a:t>2</a:t>
+                        <a:t>0</a:t>
                       </a:r>
                     </a:p>
                   </a:txBody>
@@ -8685,7 +9013,7 @@
                           </a:solidFill>
                           <a:latin typeface="Calibri"/>
                         </a:rPr>
-                        <a:t>0</a:t>
+                        <a:t>1</a:t>
                       </a:r>
                     </a:p>
                   </a:txBody>
@@ -8708,7 +9036,7 @@
                           </a:solidFill>
                           <a:latin typeface="Calibri"/>
                         </a:rPr>
-                        <a:t>100.0%</a:t>
+                        <a:t>0.0%</a:t>
                       </a:r>
                     </a:p>
                   </a:txBody>
@@ -8731,7 +9059,7 @@
                           </a:solidFill>
                           <a:latin typeface="Calibri"/>
                         </a:rPr>
-                        <a:t>Excelente</a:t>
+                        <a:t>Atencao</a:t>
                       </a:r>
                     </a:p>
                   </a:txBody>
@@ -8779,7 +9107,7 @@
                           </a:solidFill>
                           <a:latin typeface="Calibri"/>
                         </a:rPr>
-                        <a:t>EDSON SILVA NASCIMEN - GUARULHOS / SP</a:t>
+                        <a:t>L.S. FERRAMENTAS LTD - SAO PAULO / SP</a:t>
                       </a:r>
                     </a:p>
                   </a:txBody>

--- a/ITACORDA_INDUSTRIA_E_COMERCIO.pptx
+++ b/ITACORDA_INDUSTRIA_E_COMERCIO.pptx
@@ -11,7 +11,6 @@
     <p:sldId id="259" r:id="rId10"/>
     <p:sldId id="260" r:id="rId11"/>
     <p:sldId id="261" r:id="rId12"/>
-    <p:sldId id="262" r:id="rId13"/>
   </p:sldIdLst>
   <p:sldSz cx="12188952" cy="6858000" type="screen4x3"/>
   <p:notesSz cx="6858000" cy="9144000"/>
@@ -143,29 +142,23 @@
           </c:spPr>
           <c:cat>
             <c:strRef>
-              <c:f>Sheet1!$A$2:$A$3</c:f>
+              <c:f>Sheet1!$A$2:$A$2</c:f>
               <c:strCache>
-                <c:ptCount val="2"/>
+                <c:ptCount val="1"/>
                 <c:pt idx="0">
                   <c:v>Abril 2026</c:v>
-                </c:pt>
-                <c:pt idx="1">
-                  <c:v>Maio 2026</c:v>
                 </c:pt>
               </c:strCache>
             </c:strRef>
           </c:cat>
           <c:val>
             <c:numRef>
-              <c:f>Sheet1!$B$2:$B$3</c:f>
+              <c:f>Sheet1!$B$2:$B$2</c:f>
               <c:numCache>
                 <c:formatCode>General</c:formatCode>
-                <c:ptCount val="2"/>
+                <c:ptCount val="1"/>
                 <c:pt idx="0">
-                  <c:v>62</c:v>
-                </c:pt>
-                <c:pt idx="1">
-                  <c:v>56</c:v>
+                  <c:v>66</c:v>
                 </c:pt>
               </c:numCache>
             </c:numRef>
@@ -192,29 +185,23 @@
           </c:spPr>
           <c:cat>
             <c:strRef>
-              <c:f>Sheet1!$A$2:$A$3</c:f>
+              <c:f>Sheet1!$A$2:$A$2</c:f>
               <c:strCache>
-                <c:ptCount val="2"/>
+                <c:ptCount val="1"/>
                 <c:pt idx="0">
                   <c:v>Abril 2026</c:v>
-                </c:pt>
-                <c:pt idx="1">
-                  <c:v>Maio 2026</c:v>
                 </c:pt>
               </c:strCache>
             </c:strRef>
           </c:cat>
           <c:val>
             <c:numRef>
-              <c:f>Sheet1!$C$2:$C$3</c:f>
+              <c:f>Sheet1!$C$2:$C$2</c:f>
               <c:numCache>
                 <c:formatCode>General</c:formatCode>
-                <c:ptCount val="2"/>
+                <c:ptCount val="1"/>
                 <c:pt idx="0">
                   <c:v>0</c:v>
-                </c:pt>
-                <c:pt idx="1">
-                  <c:v>5</c:v>
                 </c:pt>
               </c:numCache>
             </c:numRef>
@@ -3387,7 +3374,7 @@
                 </a:solidFill>
                 <a:latin typeface="Calibri"/>
               </a:rPr>
-              <a:t>INDICADORES MAIO 2026</a:t>
+              <a:t>INDICADORES ABRIL 2026</a:t>
             </a:r>
           </a:p>
         </p:txBody>
@@ -3494,14 +3481,13 @@
           <a:p>
             <a:pPr algn="ctr"/>
             <a:r>
-              <a:rPr sz="1600" b="1">
+              <a:rPr sz="1400" b="1">
                 <a:solidFill>
                   <a:srgbClr val="FFFFFF"/>
                 </a:solidFill>
                 <a:latin typeface="Calibri"/>
               </a:rPr>
-              <a:t>Nossa rota e ir alem das
-entregas!</a:t>
+              <a:t>Nossa rota e ir alem das entregas!</a:t>
             </a:r>
           </a:p>
         </p:txBody>
@@ -3709,7 +3695,7 @@
                 </a:solidFill>
                 <a:latin typeface="Calibri"/>
               </a:rPr>
-              <a:t>61</a:t>
+              <a:t>66</a:t>
             </a:r>
           </a:p>
         </p:txBody>
@@ -3824,7 +3810,7 @@
                 </a:solidFill>
                 <a:latin typeface="Calibri"/>
               </a:rPr>
-              <a:t>56</a:t>
+              <a:t>66</a:t>
             </a:r>
           </a:p>
         </p:txBody>
@@ -3935,11 +3921,11 @@
             <a:r>
               <a:rPr sz="2800" b="1">
                 <a:solidFill>
-                  <a:srgbClr val="EF4444"/>
+                  <a:srgbClr val="10B981"/>
                 </a:solidFill>
                 <a:latin typeface="Calibri"/>
               </a:rPr>
-              <a:t>5</a:t>
+              <a:t>0</a:t>
             </a:r>
           </a:p>
         </p:txBody>
@@ -4050,11 +4036,11 @@
             <a:r>
               <a:rPr sz="2800" b="1">
                 <a:solidFill>
-                  <a:srgbClr val="F59E0B"/>
+                  <a:srgbClr val="10B981"/>
                 </a:solidFill>
                 <a:latin typeface="Calibri"/>
               </a:rPr>
-              <a:t>91.8%</a:t>
+              <a:t>100.0%</a:t>
             </a:r>
           </a:p>
         </p:txBody>
@@ -4155,30 +4141,30 @@
                           </a:solidFill>
                           <a:latin typeface="Calibri"/>
                         </a:rPr>
+                        <a:t>Marco 2026</a:t>
+                      </a:r>
+                    </a:p>
+                  </a:txBody>
+                  <a:tcPr>
+                    <a:solidFill>
+                      <a:srgbClr val="1D1B43"/>
+                    </a:solidFill>
+                  </a:tcPr>
+                </a:tc>
+                <a:tc>
+                  <a:txBody>
+                    <a:bodyPr/>
+                    <a:lstStyle/>
+                    <a:p>
+                      <a:pPr algn="ctr"/>
+                      <a:r>
+                        <a:rPr sz="1100" b="1">
+                          <a:solidFill>
+                            <a:srgbClr val="FFFFFF"/>
+                          </a:solidFill>
+                          <a:latin typeface="Calibri"/>
+                        </a:rPr>
                         <a:t>Abril 2026</a:t>
-                      </a:r>
-                    </a:p>
-                  </a:txBody>
-                  <a:tcPr>
-                    <a:solidFill>
-                      <a:srgbClr val="1D1B43"/>
-                    </a:solidFill>
-                  </a:tcPr>
-                </a:tc>
-                <a:tc>
-                  <a:txBody>
-                    <a:bodyPr/>
-                    <a:lstStyle/>
-                    <a:p>
-                      <a:pPr algn="ctr"/>
-                      <a:r>
-                        <a:rPr sz="1100" b="1">
-                          <a:solidFill>
-                            <a:srgbClr val="FFFFFF"/>
-                          </a:solidFill>
-                          <a:latin typeface="Calibri"/>
-                        </a:rPr>
-                        <a:t>Maio 2026</a:t>
                       </a:r>
                     </a:p>
                   </a:txBody>
@@ -4249,7 +4235,7 @@
                           </a:solidFill>
                           <a:latin typeface="Calibri"/>
                         </a:rPr>
-                        <a:t>62</a:t>
+                        <a:t>-</a:t>
                       </a:r>
                     </a:p>
                   </a:txBody>
@@ -4272,7 +4258,7 @@
                           </a:solidFill>
                           <a:latin typeface="Calibri"/>
                         </a:rPr>
-                        <a:t>61</a:t>
+                        <a:t>66</a:t>
                       </a:r>
                     </a:p>
                   </a:txBody>
@@ -4295,7 +4281,7 @@
                           </a:solidFill>
                           <a:latin typeface="Calibri"/>
                         </a:rPr>
-                        <a:t>- 1</a:t>
+                        <a:t>-</a:t>
                       </a:r>
                     </a:p>
                   </a:txBody>
@@ -4343,7 +4329,7 @@
                           </a:solidFill>
                           <a:latin typeface="Calibri"/>
                         </a:rPr>
-                        <a:t>62</a:t>
+                        <a:t>-</a:t>
                       </a:r>
                     </a:p>
                   </a:txBody>
@@ -4366,7 +4352,7 @@
                           </a:solidFill>
                           <a:latin typeface="Calibri"/>
                         </a:rPr>
-                        <a:t>56</a:t>
+                        <a:t>66</a:t>
                       </a:r>
                     </a:p>
                   </a:txBody>
@@ -4389,7 +4375,7 @@
                           </a:solidFill>
                           <a:latin typeface="Calibri"/>
                         </a:rPr>
-                        <a:t>- 6</a:t>
+                        <a:t>-</a:t>
                       </a:r>
                     </a:p>
                   </a:txBody>
@@ -4437,6 +4423,29 @@
                           </a:solidFill>
                           <a:latin typeface="Calibri"/>
                         </a:rPr>
+                        <a:t>-</a:t>
+                      </a:r>
+                    </a:p>
+                  </a:txBody>
+                  <a:tcPr>
+                    <a:solidFill>
+                      <a:srgbClr val="FFFFFF"/>
+                    </a:solidFill>
+                  </a:tcPr>
+                </a:tc>
+                <a:tc>
+                  <a:txBody>
+                    <a:bodyPr/>
+                    <a:lstStyle/>
+                    <a:p>
+                      <a:pPr algn="l"/>
+                      <a:r>
+                        <a:rPr sz="1000" b="0">
+                          <a:solidFill>
+                            <a:srgbClr val="1D1B43"/>
+                          </a:solidFill>
+                          <a:latin typeface="Calibri"/>
+                        </a:rPr>
                         <a:t>0</a:t>
                       </a:r>
                     </a:p>
@@ -4460,30 +4469,7 @@
                           </a:solidFill>
                           <a:latin typeface="Calibri"/>
                         </a:rPr>
-                        <a:t>5</a:t>
-                      </a:r>
-                    </a:p>
-                  </a:txBody>
-                  <a:tcPr>
-                    <a:solidFill>
-                      <a:srgbClr val="FFFFFF"/>
-                    </a:solidFill>
-                  </a:tcPr>
-                </a:tc>
-                <a:tc>
-                  <a:txBody>
-                    <a:bodyPr/>
-                    <a:lstStyle/>
-                    <a:p>
-                      <a:pPr algn="l"/>
-                      <a:r>
-                        <a:rPr sz="1000" b="0">
-                          <a:solidFill>
-                            <a:srgbClr val="1D1B43"/>
-                          </a:solidFill>
-                          <a:latin typeface="Calibri"/>
-                        </a:rPr>
-                        <a:t>+ 5</a:t>
+                        <a:t>-</a:t>
                       </a:r>
                     </a:p>
                   </a:txBody>
@@ -4531,6 +4517,29 @@
                           </a:solidFill>
                           <a:latin typeface="Calibri"/>
                         </a:rPr>
+                        <a:t>-</a:t>
+                      </a:r>
+                    </a:p>
+                  </a:txBody>
+                  <a:tcPr>
+                    <a:solidFill>
+                      <a:srgbClr val="F2F2F2"/>
+                    </a:solidFill>
+                  </a:tcPr>
+                </a:tc>
+                <a:tc>
+                  <a:txBody>
+                    <a:bodyPr/>
+                    <a:lstStyle/>
+                    <a:p>
+                      <a:pPr algn="l"/>
+                      <a:r>
+                        <a:rPr sz="1000" b="0">
+                          <a:solidFill>
+                            <a:srgbClr val="1D1B43"/>
+                          </a:solidFill>
+                          <a:latin typeface="Calibri"/>
+                        </a:rPr>
                         <a:t>100.0%</a:t>
                       </a:r>
                     </a:p>
@@ -4554,30 +4563,7 @@
                           </a:solidFill>
                           <a:latin typeface="Calibri"/>
                         </a:rPr>
-                        <a:t>91.8%</a:t>
-                      </a:r>
-                    </a:p>
-                  </a:txBody>
-                  <a:tcPr>
-                    <a:solidFill>
-                      <a:srgbClr val="F2F2F2"/>
-                    </a:solidFill>
-                  </a:tcPr>
-                </a:tc>
-                <a:tc>
-                  <a:txBody>
-                    <a:bodyPr/>
-                    <a:lstStyle/>
-                    <a:p>
-                      <a:pPr algn="l"/>
-                      <a:r>
-                        <a:rPr sz="1000" b="0">
-                          <a:solidFill>
-                            <a:srgbClr val="1D1B43"/>
-                          </a:solidFill>
-                          <a:latin typeface="Calibri"/>
-                        </a:rPr>
-                        <a:t>- 8.2pp</a:t>
+                        <a:t>-</a:t>
                       </a:r>
                     </a:p>
                   </a:txBody>
@@ -4748,7 +4734,7 @@
         </p:nvGraphicFramePr>
         <p:xfrm>
           <a:off x="7955279" y="2286000"/>
-          <a:ext cx="4480560" cy="1316736"/>
+          <a:ext cx="4480560" cy="877824"/>
         </p:xfrm>
         <a:graphic>
           <a:graphicData uri="http://schemas.openxmlformats.org/drawingml/2006/table">
@@ -4917,7 +4903,7 @@
                           </a:solidFill>
                           <a:latin typeface="Calibri"/>
                         </a:rPr>
-                        <a:t>62</a:t>
+                        <a:t>66</a:t>
                       </a:r>
                     </a:p>
                   </a:txBody>
@@ -4940,7 +4926,7 @@
                           </a:solidFill>
                           <a:latin typeface="Calibri"/>
                         </a:rPr>
-                        <a:t>62</a:t>
+                        <a:t>66</a:t>
                       </a:r>
                     </a:p>
                   </a:txBody>
@@ -4993,123 +4979,6 @@
                   <a:tcPr>
                     <a:solidFill>
                       <a:srgbClr val="FFFFFF"/>
-                    </a:solidFill>
-                  </a:tcPr>
-                </a:tc>
-              </a:tr>
-              <a:tr h="438912">
-                <a:tc>
-                  <a:txBody>
-                    <a:bodyPr/>
-                    <a:lstStyle/>
-                    <a:p>
-                      <a:pPr algn="l"/>
-                      <a:r>
-                        <a:rPr sz="1000" b="0">
-                          <a:solidFill>
-                            <a:srgbClr val="1D1B43"/>
-                          </a:solidFill>
-                          <a:latin typeface="Calibri"/>
-                        </a:rPr>
-                        <a:t>Maio 2026</a:t>
-                      </a:r>
-                    </a:p>
-                  </a:txBody>
-                  <a:tcPr>
-                    <a:solidFill>
-                      <a:srgbClr val="F2F2F2"/>
-                    </a:solidFill>
-                  </a:tcPr>
-                </a:tc>
-                <a:tc>
-                  <a:txBody>
-                    <a:bodyPr/>
-                    <a:lstStyle/>
-                    <a:p>
-                      <a:pPr algn="l"/>
-                      <a:r>
-                        <a:rPr sz="1000" b="0">
-                          <a:solidFill>
-                            <a:srgbClr val="1D1B43"/>
-                          </a:solidFill>
-                          <a:latin typeface="Calibri"/>
-                        </a:rPr>
-                        <a:t>61</a:t>
-                      </a:r>
-                    </a:p>
-                  </a:txBody>
-                  <a:tcPr>
-                    <a:solidFill>
-                      <a:srgbClr val="F2F2F2"/>
-                    </a:solidFill>
-                  </a:tcPr>
-                </a:tc>
-                <a:tc>
-                  <a:txBody>
-                    <a:bodyPr/>
-                    <a:lstStyle/>
-                    <a:p>
-                      <a:pPr algn="l"/>
-                      <a:r>
-                        <a:rPr sz="1000" b="0">
-                          <a:solidFill>
-                            <a:srgbClr val="1D1B43"/>
-                          </a:solidFill>
-                          <a:latin typeface="Calibri"/>
-                        </a:rPr>
-                        <a:t>56</a:t>
-                      </a:r>
-                    </a:p>
-                  </a:txBody>
-                  <a:tcPr>
-                    <a:solidFill>
-                      <a:srgbClr val="F2F2F2"/>
-                    </a:solidFill>
-                  </a:tcPr>
-                </a:tc>
-                <a:tc>
-                  <a:txBody>
-                    <a:bodyPr/>
-                    <a:lstStyle/>
-                    <a:p>
-                      <a:pPr algn="l"/>
-                      <a:r>
-                        <a:rPr sz="1000" b="0">
-                          <a:solidFill>
-                            <a:srgbClr val="1D1B43"/>
-                          </a:solidFill>
-                          <a:latin typeface="Calibri"/>
-                        </a:rPr>
-                        <a:t>5</a:t>
-                      </a:r>
-                    </a:p>
-                  </a:txBody>
-                  <a:tcPr>
-                    <a:solidFill>
-                      <a:srgbClr val="F2F2F2"/>
-                    </a:solidFill>
-                  </a:tcPr>
-                </a:tc>
-                <a:tc>
-                  <a:txBody>
-                    <a:bodyPr/>
-                    <a:lstStyle/>
-                    <a:p>
-                      <a:pPr algn="l"/>
-                      <a:r>
-                        <a:rPr sz="1000" b="0">
-                          <a:solidFill>
-                            <a:srgbClr val="1D1B43"/>
-                          </a:solidFill>
-                          <a:latin typeface="Calibri"/>
-                        </a:rPr>
-                        <a:t>91.8%</a:t>
-                      </a:r>
-                    </a:p>
-                  </a:txBody>
-                  <a:tcPr>
-                    <a:solidFill>
-                      <a:srgbClr val="F2F2F2"/>
                     </a:solidFill>
                   </a:tcPr>
                 </a:tc>
@@ -5191,7 +5060,7 @@
                 </a:solidFill>
                 <a:latin typeface="Calibri"/>
               </a:rPr>
-              <a:t>PERFORMANCE: 91.8% - REGULAR</a:t>
+              <a:t>PERFORMANCE: 100.0% - EXCELENTE</a:t>
             </a:r>
           </a:p>
         </p:txBody>
@@ -5255,7 +5124,7 @@
         <p:spPr>
           <a:xfrm>
             <a:off x="749808" y="502920"/>
-            <a:ext cx="10058400" cy="914400"/>
+            <a:ext cx="9144000" cy="914400"/>
           </a:xfrm>
           <a:prstGeom prst="rect">
             <a:avLst/>
@@ -5270,13 +5139,13 @@
           <a:p>
             <a:pPr algn="l"/>
             <a:r>
-              <a:rPr sz="3200" b="1">
+              <a:rPr sz="4000" b="1">
                 <a:solidFill>
                   <a:srgbClr val="F97316"/>
                 </a:solidFill>
                 <a:latin typeface="Calibri"/>
               </a:rPr>
-              <a:t>OCORRENCIAS FORA DO PRAZO (5)</a:t>
+              <a:t>PERFORMANCE POR UF</a:t>
             </a:r>
           </a:p>
         </p:txBody>
@@ -5289,7 +5158,7 @@
         </p:nvSpPr>
         <p:spPr>
           <a:xfrm>
-            <a:off x="749808" y="1600200"/>
+            <a:off x="749808" y="1719072"/>
             <a:ext cx="10424160" cy="36576"/>
           </a:xfrm>
           <a:prstGeom prst="rect">
@@ -5333,8 +5202,8 @@
           <p:nvPr/>
         </p:nvGraphicFramePr>
         <p:xfrm>
-          <a:off x="457200" y="1828800"/>
-          <a:ext cx="11429999" cy="2304288"/>
+          <a:off x="731520" y="1920240"/>
+          <a:ext cx="10698480" cy="1828800"/>
         </p:xfrm>
         <a:graphic>
           <a:graphicData uri="http://schemas.openxmlformats.org/drawingml/2006/table">
@@ -5343,13 +5212,14 @@
                 <a:tableStyleId>{5C22544A-7EE6-4342-B048-85BDC9FD1C3A}</a:tableStyleId>
               </a:tblPr>
               <a:tblGrid>
-                <a:gridCol w="1280160"/>
-                <a:gridCol w="3749039"/>
-                <a:gridCol w="2103120"/>
+                <a:gridCol w="1097280"/>
+                <a:gridCol w="1645920"/>
+                <a:gridCol w="1645920"/>
+                <a:gridCol w="1645920"/>
                 <a:gridCol w="1554480"/>
-                <a:gridCol w="2743200"/>
+                <a:gridCol w="3108960"/>
               </a:tblGrid>
-              <a:tr h="384048">
+              <a:tr h="457200">
                 <a:tc>
                   <a:txBody>
                     <a:bodyPr/>
@@ -5363,7 +5233,7 @@
                           </a:solidFill>
                           <a:latin typeface="Calibri"/>
                         </a:rPr>
-                        <a:t>MD</a:t>
+                        <a:t>UF</a:t>
                       </a:r>
                     </a:p>
                   </a:txBody>
@@ -5386,7 +5256,7 @@
                           </a:solidFill>
                           <a:latin typeface="Calibri"/>
                         </a:rPr>
-                        <a:t>DESTINATARIO</a:t>
+                        <a:t>TOTAL</a:t>
                       </a:r>
                     </a:p>
                   </a:txBody>
@@ -5409,7 +5279,7 @@
                           </a:solidFill>
                           <a:latin typeface="Calibri"/>
                         </a:rPr>
-                        <a:t>CIDADE/UF</a:t>
+                        <a:t>NO PRAZO</a:t>
                       </a:r>
                     </a:p>
                   </a:txBody>
@@ -5432,7 +5302,7 @@
                           </a:solidFill>
                           <a:latin typeface="Calibri"/>
                         </a:rPr>
-                        <a:t>PREV. ENTREGA</a:t>
+                        <a:t>FORA</a:t>
                       </a:r>
                     </a:p>
                   </a:txBody>
@@ -5455,6 +5325,29 @@
                           </a:solidFill>
                           <a:latin typeface="Calibri"/>
                         </a:rPr>
+                        <a:t>TAXA</a:t>
+                      </a:r>
+                    </a:p>
+                  </a:txBody>
+                  <a:tcPr>
+                    <a:solidFill>
+                      <a:srgbClr val="1D1B43"/>
+                    </a:solidFill>
+                  </a:tcPr>
+                </a:tc>
+                <a:tc>
+                  <a:txBody>
+                    <a:bodyPr/>
+                    <a:lstStyle/>
+                    <a:p>
+                      <a:pPr algn="ctr"/>
+                      <a:r>
+                        <a:rPr sz="1100" b="1">
+                          <a:solidFill>
+                            <a:srgbClr val="FFFFFF"/>
+                          </a:solidFill>
+                          <a:latin typeface="Calibri"/>
+                        </a:rPr>
                         <a:t>STATUS</a:t>
                       </a:r>
                     </a:p>
@@ -5466,21 +5359,21 @@
                   </a:tcPr>
                 </a:tc>
               </a:tr>
-              <a:tr h="384048">
-                <a:tc>
-                  <a:txBody>
-                    <a:bodyPr/>
-                    <a:lstStyle/>
-                    <a:p>
-                      <a:pPr algn="l"/>
-                      <a:r>
-                        <a:rPr sz="1000" b="0">
-                          <a:solidFill>
-                            <a:srgbClr val="1D1B43"/>
-                          </a:solidFill>
-                          <a:latin typeface="Calibri"/>
-                        </a:rPr>
-                        <a:t>280638</a:t>
+              <a:tr h="457200">
+                <a:tc>
+                  <a:txBody>
+                    <a:bodyPr/>
+                    <a:lstStyle/>
+                    <a:p>
+                      <a:pPr algn="l"/>
+                      <a:r>
+                        <a:rPr sz="1000" b="0">
+                          <a:solidFill>
+                            <a:srgbClr val="1D1B43"/>
+                          </a:solidFill>
+                          <a:latin typeface="Calibri"/>
+                        </a:rPr>
+                        <a:t>SP</a:t>
                       </a:r>
                     </a:p>
                   </a:txBody>
@@ -5503,7 +5396,7 @@
                           </a:solidFill>
                           <a:latin typeface="Calibri"/>
                         </a:rPr>
-                        <a:t>CLODOALDO COM DE ENC - GUARULHOS / SP</a:t>
+                        <a:t>61</a:t>
                       </a:r>
                     </a:p>
                   </a:txBody>
@@ -5526,7 +5419,7 @@
                           </a:solidFill>
                           <a:latin typeface="Calibri"/>
                         </a:rPr>
-                        <a:t>GUARULHOS/SP</a:t>
+                        <a:t>61</a:t>
                       </a:r>
                     </a:p>
                   </a:txBody>
@@ -5549,7 +5442,7 @@
                           </a:solidFill>
                           <a:latin typeface="Calibri"/>
                         </a:rPr>
-                        <a:t>04/05/2026</a:t>
+                        <a:t>0</a:t>
                       </a:r>
                     </a:p>
                   </a:txBody>
@@ -5572,7 +5465,7 @@
                           </a:solidFill>
                           <a:latin typeface="Calibri"/>
                         </a:rPr>
-                        <a:t>ENTREGUE FORA DO PRAZO</a:t>
+                        <a:t>100.0%</a:t>
                       </a:r>
                     </a:p>
                   </a:txBody>
@@ -5582,22 +5475,45 @@
                     </a:solidFill>
                   </a:tcPr>
                 </a:tc>
+                <a:tc>
+                  <a:txBody>
+                    <a:bodyPr/>
+                    <a:lstStyle/>
+                    <a:p>
+                      <a:pPr algn="l"/>
+                      <a:r>
+                        <a:rPr sz="1000" b="0">
+                          <a:solidFill>
+                            <a:srgbClr val="1D1B43"/>
+                          </a:solidFill>
+                          <a:latin typeface="Calibri"/>
+                        </a:rPr>
+                        <a:t>Excelente</a:t>
+                      </a:r>
+                    </a:p>
+                  </a:txBody>
+                  <a:tcPr>
+                    <a:solidFill>
+                      <a:srgbClr val="FFFFFF"/>
+                    </a:solidFill>
+                  </a:tcPr>
+                </a:tc>
               </a:tr>
-              <a:tr h="384048">
-                <a:tc>
-                  <a:txBody>
-                    <a:bodyPr/>
-                    <a:lstStyle/>
-                    <a:p>
-                      <a:pPr algn="l"/>
-                      <a:r>
-                        <a:rPr sz="1000" b="0">
-                          <a:solidFill>
-                            <a:srgbClr val="1D1B43"/>
-                          </a:solidFill>
-                          <a:latin typeface="Calibri"/>
-                        </a:rPr>
-                        <a:t>280639</a:t>
+              <a:tr h="457200">
+                <a:tc>
+                  <a:txBody>
+                    <a:bodyPr/>
+                    <a:lstStyle/>
+                    <a:p>
+                      <a:pPr algn="l"/>
+                      <a:r>
+                        <a:rPr sz="1000" b="0">
+                          <a:solidFill>
+                            <a:srgbClr val="1D1B43"/>
+                          </a:solidFill>
+                          <a:latin typeface="Calibri"/>
+                        </a:rPr>
+                        <a:t>SC</a:t>
                       </a:r>
                     </a:p>
                   </a:txBody>
@@ -5620,7 +5536,7 @@
                           </a:solidFill>
                           <a:latin typeface="Calibri"/>
                         </a:rPr>
-                        <a:t>CLODOALDO COM DE ENC - GUARULHOS / SP</a:t>
+                        <a:t>4</a:t>
                       </a:r>
                     </a:p>
                   </a:txBody>
@@ -5643,7 +5559,7 @@
                           </a:solidFill>
                           <a:latin typeface="Calibri"/>
                         </a:rPr>
-                        <a:t>GUARULHOS/SP</a:t>
+                        <a:t>4</a:t>
                       </a:r>
                     </a:p>
                   </a:txBody>
@@ -5666,7 +5582,7 @@
                           </a:solidFill>
                           <a:latin typeface="Calibri"/>
                         </a:rPr>
-                        <a:t>04/05/2026</a:t>
+                        <a:t>0</a:t>
                       </a:r>
                     </a:p>
                   </a:txBody>
@@ -5689,7 +5605,7 @@
                           </a:solidFill>
                           <a:latin typeface="Calibri"/>
                         </a:rPr>
-                        <a:t>ENTREGUE FORA DO PRAZO</a:t>
+                        <a:t>100.0%</a:t>
                       </a:r>
                     </a:p>
                   </a:txBody>
@@ -5699,22 +5615,45 @@
                     </a:solidFill>
                   </a:tcPr>
                 </a:tc>
+                <a:tc>
+                  <a:txBody>
+                    <a:bodyPr/>
+                    <a:lstStyle/>
+                    <a:p>
+                      <a:pPr algn="l"/>
+                      <a:r>
+                        <a:rPr sz="1000" b="0">
+                          <a:solidFill>
+                            <a:srgbClr val="1D1B43"/>
+                          </a:solidFill>
+                          <a:latin typeface="Calibri"/>
+                        </a:rPr>
+                        <a:t>Excelente</a:t>
+                      </a:r>
+                    </a:p>
+                  </a:txBody>
+                  <a:tcPr>
+                    <a:solidFill>
+                      <a:srgbClr val="F2F2F2"/>
+                    </a:solidFill>
+                  </a:tcPr>
+                </a:tc>
               </a:tr>
-              <a:tr h="384048">
-                <a:tc>
-                  <a:txBody>
-                    <a:bodyPr/>
-                    <a:lstStyle/>
-                    <a:p>
-                      <a:pPr algn="l"/>
-                      <a:r>
-                        <a:rPr sz="1000" b="0">
-                          <a:solidFill>
-                            <a:srgbClr val="1D1B43"/>
-                          </a:solidFill>
-                          <a:latin typeface="Calibri"/>
-                        </a:rPr>
-                        <a:t>281514</a:t>
+              <a:tr h="457200">
+                <a:tc>
+                  <a:txBody>
+                    <a:bodyPr/>
+                    <a:lstStyle/>
+                    <a:p>
+                      <a:pPr algn="l"/>
+                      <a:r>
+                        <a:rPr sz="1000" b="0">
+                          <a:solidFill>
+                            <a:srgbClr val="1D1B43"/>
+                          </a:solidFill>
+                          <a:latin typeface="Calibri"/>
+                        </a:rPr>
+                        <a:t>PR</a:t>
                       </a:r>
                     </a:p>
                   </a:txBody>
@@ -5737,7 +5676,7 @@
                           </a:solidFill>
                           <a:latin typeface="Calibri"/>
                         </a:rPr>
-                        <a:t>JORTEK EXPRESS - GUARULHOS / SP</a:t>
+                        <a:t>1</a:t>
                       </a:r>
                     </a:p>
                   </a:txBody>
@@ -5760,7 +5699,7 @@
                           </a:solidFill>
                           <a:latin typeface="Calibri"/>
                         </a:rPr>
-                        <a:t>GUARULHOS/SP</a:t>
+                        <a:t>1</a:t>
                       </a:r>
                     </a:p>
                   </a:txBody>
@@ -5783,7 +5722,7 @@
                           </a:solidFill>
                           <a:latin typeface="Calibri"/>
                         </a:rPr>
-                        <a:t>07/05/2026</a:t>
+                        <a:t>0</a:t>
                       </a:r>
                     </a:p>
                   </a:txBody>
@@ -5806,7 +5745,7 @@
                           </a:solidFill>
                           <a:latin typeface="Calibri"/>
                         </a:rPr>
-                        <a:t>ENTREGUE FORA DO PRAZO</a:t>
+                        <a:t>100.0%</a:t>
                       </a:r>
                     </a:p>
                   </a:txBody>
@@ -5816,231 +5755,20 @@
                     </a:solidFill>
                   </a:tcPr>
                 </a:tc>
-              </a:tr>
-              <a:tr h="384048">
-                <a:tc>
-                  <a:txBody>
-                    <a:bodyPr/>
-                    <a:lstStyle/>
-                    <a:p>
-                      <a:pPr algn="l"/>
-                      <a:r>
-                        <a:rPr sz="1000" b="0">
-                          <a:solidFill>
-                            <a:srgbClr val="1D1B43"/>
-                          </a:solidFill>
-                          <a:latin typeface="Calibri"/>
-                        </a:rPr>
-                        <a:t>281845</a:t>
-                      </a:r>
-                    </a:p>
-                  </a:txBody>
-                  <a:tcPr>
-                    <a:solidFill>
-                      <a:srgbClr val="F2F2F2"/>
-                    </a:solidFill>
-                  </a:tcPr>
-                </a:tc>
-                <a:tc>
-                  <a:txBody>
-                    <a:bodyPr/>
-                    <a:lstStyle/>
-                    <a:p>
-                      <a:pPr algn="l"/>
-                      <a:r>
-                        <a:rPr sz="1000" b="0">
-                          <a:solidFill>
-                            <a:srgbClr val="1D1B43"/>
-                          </a:solidFill>
-                          <a:latin typeface="Calibri"/>
-                        </a:rPr>
-                        <a:t>7 OLIVEIRAS DISTRIBU - SAO PAULO / SP</a:t>
-                      </a:r>
-                    </a:p>
-                  </a:txBody>
-                  <a:tcPr>
-                    <a:solidFill>
-                      <a:srgbClr val="F2F2F2"/>
-                    </a:solidFill>
-                  </a:tcPr>
-                </a:tc>
-                <a:tc>
-                  <a:txBody>
-                    <a:bodyPr/>
-                    <a:lstStyle/>
-                    <a:p>
-                      <a:pPr algn="l"/>
-                      <a:r>
-                        <a:rPr sz="1000" b="0">
-                          <a:solidFill>
-                            <a:srgbClr val="1D1B43"/>
-                          </a:solidFill>
-                          <a:latin typeface="Calibri"/>
-                        </a:rPr>
-                        <a:t>SAO PAULO/SP</a:t>
-                      </a:r>
-                    </a:p>
-                  </a:txBody>
-                  <a:tcPr>
-                    <a:solidFill>
-                      <a:srgbClr val="F2F2F2"/>
-                    </a:solidFill>
-                  </a:tcPr>
-                </a:tc>
-                <a:tc>
-                  <a:txBody>
-                    <a:bodyPr/>
-                    <a:lstStyle/>
-                    <a:p>
-                      <a:pPr algn="l"/>
-                      <a:r>
-                        <a:rPr sz="1000" b="0">
-                          <a:solidFill>
-                            <a:srgbClr val="1D1B43"/>
-                          </a:solidFill>
-                          <a:latin typeface="Calibri"/>
-                        </a:rPr>
-                        <a:t>11/05/2026</a:t>
-                      </a:r>
-                    </a:p>
-                  </a:txBody>
-                  <a:tcPr>
-                    <a:solidFill>
-                      <a:srgbClr val="F2F2F2"/>
-                    </a:solidFill>
-                  </a:tcPr>
-                </a:tc>
-                <a:tc>
-                  <a:txBody>
-                    <a:bodyPr/>
-                    <a:lstStyle/>
-                    <a:p>
-                      <a:pPr algn="l"/>
-                      <a:r>
-                        <a:rPr sz="1000" b="0">
-                          <a:solidFill>
-                            <a:srgbClr val="1D1B43"/>
-                          </a:solidFill>
-                          <a:latin typeface="Calibri"/>
-                        </a:rPr>
-                        <a:t>ENTREGUE FORA DO PRAZO</a:t>
-                      </a:r>
-                    </a:p>
-                  </a:txBody>
-                  <a:tcPr>
-                    <a:solidFill>
-                      <a:srgbClr val="F2F2F2"/>
-                    </a:solidFill>
-                  </a:tcPr>
-                </a:tc>
-              </a:tr>
-              <a:tr h="384048">
-                <a:tc>
-                  <a:txBody>
-                    <a:bodyPr/>
-                    <a:lstStyle/>
-                    <a:p>
-                      <a:pPr algn="l"/>
-                      <a:r>
-                        <a:rPr sz="1000" b="0">
-                          <a:solidFill>
-                            <a:srgbClr val="1D1B43"/>
-                          </a:solidFill>
-                          <a:latin typeface="Calibri"/>
-                        </a:rPr>
-                        <a:t>282484</a:t>
-                      </a:r>
-                    </a:p>
-                  </a:txBody>
-                  <a:tcPr>
-                    <a:solidFill>
-                      <a:srgbClr val="FFFFFF"/>
-                    </a:solidFill>
-                  </a:tcPr>
-                </a:tc>
-                <a:tc>
-                  <a:txBody>
-                    <a:bodyPr/>
-                    <a:lstStyle/>
-                    <a:p>
-                      <a:pPr algn="l"/>
-                      <a:r>
-                        <a:rPr sz="1000" b="0">
-                          <a:solidFill>
-                            <a:srgbClr val="1D1B43"/>
-                          </a:solidFill>
-                          <a:latin typeface="Calibri"/>
-                        </a:rPr>
-                        <a:t>PRADA PLUS DO BRASIL - SAO PAULO / SP</a:t>
-                      </a:r>
-                    </a:p>
-                  </a:txBody>
-                  <a:tcPr>
-                    <a:solidFill>
-                      <a:srgbClr val="FFFFFF"/>
-                    </a:solidFill>
-                  </a:tcPr>
-                </a:tc>
-                <a:tc>
-                  <a:txBody>
-                    <a:bodyPr/>
-                    <a:lstStyle/>
-                    <a:p>
-                      <a:pPr algn="l"/>
-                      <a:r>
-                        <a:rPr sz="1000" b="0">
-                          <a:solidFill>
-                            <a:srgbClr val="1D1B43"/>
-                          </a:solidFill>
-                          <a:latin typeface="Calibri"/>
-                        </a:rPr>
-                        <a:t>SAO PAULO/SP</a:t>
-                      </a:r>
-                    </a:p>
-                  </a:txBody>
-                  <a:tcPr>
-                    <a:solidFill>
-                      <a:srgbClr val="FFFFFF"/>
-                    </a:solidFill>
-                  </a:tcPr>
-                </a:tc>
-                <a:tc>
-                  <a:txBody>
-                    <a:bodyPr/>
-                    <a:lstStyle/>
-                    <a:p>
-                      <a:pPr algn="l"/>
-                      <a:r>
-                        <a:rPr sz="1000" b="0">
-                          <a:solidFill>
-                            <a:srgbClr val="1D1B43"/>
-                          </a:solidFill>
-                          <a:latin typeface="Calibri"/>
-                        </a:rPr>
-                        <a:t>14/05/2026</a:t>
-                      </a:r>
-                    </a:p>
-                  </a:txBody>
-                  <a:tcPr>
-                    <a:solidFill>
-                      <a:srgbClr val="FFFFFF"/>
-                    </a:solidFill>
-                  </a:tcPr>
-                </a:tc>
-                <a:tc>
-                  <a:txBody>
-                    <a:bodyPr/>
-                    <a:lstStyle/>
-                    <a:p>
-                      <a:pPr algn="l"/>
-                      <a:r>
-                        <a:rPr sz="1000" b="0">
-                          <a:solidFill>
-                            <a:srgbClr val="1D1B43"/>
-                          </a:solidFill>
-                          <a:latin typeface="Calibri"/>
-                        </a:rPr>
-                        <a:t>ENTREGUE FORA DO PRAZO</a:t>
+                <a:tc>
+                  <a:txBody>
+                    <a:bodyPr/>
+                    <a:lstStyle/>
+                    <a:p>
+                      <a:pPr algn="l"/>
+                      <a:r>
+                        <a:rPr sz="1000" b="0">
+                          <a:solidFill>
+                            <a:srgbClr val="1D1B43"/>
+                          </a:solidFill>
+                          <a:latin typeface="Calibri"/>
+                        </a:rPr>
+                        <a:t>Excelente</a:t>
                       </a:r>
                     </a:p>
                   </a:txBody>
@@ -6114,584 +5842,6 @@
         <p:spPr>
           <a:xfrm>
             <a:off x="749808" y="502920"/>
-            <a:ext cx="9144000" cy="914400"/>
-          </a:xfrm>
-          <a:prstGeom prst="rect">
-            <a:avLst/>
-          </a:prstGeom>
-          <a:noFill/>
-        </p:spPr>
-        <p:txBody>
-          <a:bodyPr wrap="square">
-            <a:spAutoFit/>
-          </a:bodyPr>
-          <a:lstStyle/>
-          <a:p>
-            <a:pPr algn="l"/>
-            <a:r>
-              <a:rPr sz="4000" b="1">
-                <a:solidFill>
-                  <a:srgbClr val="F97316"/>
-                </a:solidFill>
-                <a:latin typeface="Calibri"/>
-              </a:rPr>
-              <a:t>PERFORMANCE POR UF</a:t>
-            </a:r>
-          </a:p>
-        </p:txBody>
-      </p:sp>
-      <p:sp>
-        <p:nvSpPr>
-          <p:cNvPr id="4" name="Rectangle 3"/>
-          <p:cNvSpPr/>
-          <p:nvPr/>
-        </p:nvSpPr>
-        <p:spPr>
-          <a:xfrm>
-            <a:off x="749808" y="1719072"/>
-            <a:ext cx="10424160" cy="36576"/>
-          </a:xfrm>
-          <a:prstGeom prst="rect">
-            <a:avLst/>
-          </a:prstGeom>
-          <a:solidFill>
-            <a:srgbClr val="F97316"/>
-          </a:solidFill>
-          <a:ln>
-            <a:noFill/>
-          </a:ln>
-        </p:spPr>
-        <p:style>
-          <a:lnRef idx="1">
-            <a:schemeClr val="accent1"/>
-          </a:lnRef>
-          <a:fillRef idx="3">
-            <a:schemeClr val="accent1"/>
-          </a:fillRef>
-          <a:effectRef idx="2">
-            <a:schemeClr val="accent1"/>
-          </a:effectRef>
-          <a:fontRef idx="minor">
-            <a:schemeClr val="lt1"/>
-          </a:fontRef>
-        </p:style>
-        <p:txBody>
-          <a:bodyPr rtlCol="0" anchor="ctr"/>
-          <a:lstStyle/>
-          <a:p>
-            <a:pPr algn="ctr"/>
-          </a:p>
-        </p:txBody>
-      </p:sp>
-      <p:graphicFrame>
-        <p:nvGraphicFramePr>
-          <p:cNvPr id="5" name="Table 4"/>
-          <p:cNvGraphicFramePr>
-            <a:graphicFrameLocks noGrp="1"/>
-          </p:cNvGraphicFramePr>
-          <p:nvPr/>
-        </p:nvGraphicFramePr>
-        <p:xfrm>
-          <a:off x="731520" y="1920240"/>
-          <a:ext cx="10698480" cy="1371600"/>
-        </p:xfrm>
-        <a:graphic>
-          <a:graphicData uri="http://schemas.openxmlformats.org/drawingml/2006/table">
-            <a:tbl>
-              <a:tblPr firstRow="1" bandRow="1">
-                <a:tableStyleId>{5C22544A-7EE6-4342-B048-85BDC9FD1C3A}</a:tableStyleId>
-              </a:tblPr>
-              <a:tblGrid>
-                <a:gridCol w="1097280"/>
-                <a:gridCol w="1645920"/>
-                <a:gridCol w="1645920"/>
-                <a:gridCol w="1645920"/>
-                <a:gridCol w="1554480"/>
-                <a:gridCol w="3108960"/>
-              </a:tblGrid>
-              <a:tr h="457200">
-                <a:tc>
-                  <a:txBody>
-                    <a:bodyPr/>
-                    <a:lstStyle/>
-                    <a:p>
-                      <a:pPr algn="ctr"/>
-                      <a:r>
-                        <a:rPr sz="1100" b="1">
-                          <a:solidFill>
-                            <a:srgbClr val="FFFFFF"/>
-                          </a:solidFill>
-                          <a:latin typeface="Calibri"/>
-                        </a:rPr>
-                        <a:t>UF</a:t>
-                      </a:r>
-                    </a:p>
-                  </a:txBody>
-                  <a:tcPr>
-                    <a:solidFill>
-                      <a:srgbClr val="1D1B43"/>
-                    </a:solidFill>
-                  </a:tcPr>
-                </a:tc>
-                <a:tc>
-                  <a:txBody>
-                    <a:bodyPr/>
-                    <a:lstStyle/>
-                    <a:p>
-                      <a:pPr algn="ctr"/>
-                      <a:r>
-                        <a:rPr sz="1100" b="1">
-                          <a:solidFill>
-                            <a:srgbClr val="FFFFFF"/>
-                          </a:solidFill>
-                          <a:latin typeface="Calibri"/>
-                        </a:rPr>
-                        <a:t>TOTAL</a:t>
-                      </a:r>
-                    </a:p>
-                  </a:txBody>
-                  <a:tcPr>
-                    <a:solidFill>
-                      <a:srgbClr val="1D1B43"/>
-                    </a:solidFill>
-                  </a:tcPr>
-                </a:tc>
-                <a:tc>
-                  <a:txBody>
-                    <a:bodyPr/>
-                    <a:lstStyle/>
-                    <a:p>
-                      <a:pPr algn="ctr"/>
-                      <a:r>
-                        <a:rPr sz="1100" b="1">
-                          <a:solidFill>
-                            <a:srgbClr val="FFFFFF"/>
-                          </a:solidFill>
-                          <a:latin typeface="Calibri"/>
-                        </a:rPr>
-                        <a:t>NO PRAZO</a:t>
-                      </a:r>
-                    </a:p>
-                  </a:txBody>
-                  <a:tcPr>
-                    <a:solidFill>
-                      <a:srgbClr val="1D1B43"/>
-                    </a:solidFill>
-                  </a:tcPr>
-                </a:tc>
-                <a:tc>
-                  <a:txBody>
-                    <a:bodyPr/>
-                    <a:lstStyle/>
-                    <a:p>
-                      <a:pPr algn="ctr"/>
-                      <a:r>
-                        <a:rPr sz="1100" b="1">
-                          <a:solidFill>
-                            <a:srgbClr val="FFFFFF"/>
-                          </a:solidFill>
-                          <a:latin typeface="Calibri"/>
-                        </a:rPr>
-                        <a:t>FORA</a:t>
-                      </a:r>
-                    </a:p>
-                  </a:txBody>
-                  <a:tcPr>
-                    <a:solidFill>
-                      <a:srgbClr val="1D1B43"/>
-                    </a:solidFill>
-                  </a:tcPr>
-                </a:tc>
-                <a:tc>
-                  <a:txBody>
-                    <a:bodyPr/>
-                    <a:lstStyle/>
-                    <a:p>
-                      <a:pPr algn="ctr"/>
-                      <a:r>
-                        <a:rPr sz="1100" b="1">
-                          <a:solidFill>
-                            <a:srgbClr val="FFFFFF"/>
-                          </a:solidFill>
-                          <a:latin typeface="Calibri"/>
-                        </a:rPr>
-                        <a:t>TAXA</a:t>
-                      </a:r>
-                    </a:p>
-                  </a:txBody>
-                  <a:tcPr>
-                    <a:solidFill>
-                      <a:srgbClr val="1D1B43"/>
-                    </a:solidFill>
-                  </a:tcPr>
-                </a:tc>
-                <a:tc>
-                  <a:txBody>
-                    <a:bodyPr/>
-                    <a:lstStyle/>
-                    <a:p>
-                      <a:pPr algn="ctr"/>
-                      <a:r>
-                        <a:rPr sz="1100" b="1">
-                          <a:solidFill>
-                            <a:srgbClr val="FFFFFF"/>
-                          </a:solidFill>
-                          <a:latin typeface="Calibri"/>
-                        </a:rPr>
-                        <a:t>STATUS</a:t>
-                      </a:r>
-                    </a:p>
-                  </a:txBody>
-                  <a:tcPr>
-                    <a:solidFill>
-                      <a:srgbClr val="1D1B43"/>
-                    </a:solidFill>
-                  </a:tcPr>
-                </a:tc>
-              </a:tr>
-              <a:tr h="457200">
-                <a:tc>
-                  <a:txBody>
-                    <a:bodyPr/>
-                    <a:lstStyle/>
-                    <a:p>
-                      <a:pPr algn="l"/>
-                      <a:r>
-                        <a:rPr sz="1000" b="0">
-                          <a:solidFill>
-                            <a:srgbClr val="1D1B43"/>
-                          </a:solidFill>
-                          <a:latin typeface="Calibri"/>
-                        </a:rPr>
-                        <a:t>SP</a:t>
-                      </a:r>
-                    </a:p>
-                  </a:txBody>
-                  <a:tcPr>
-                    <a:solidFill>
-                      <a:srgbClr val="FFFFFF"/>
-                    </a:solidFill>
-                  </a:tcPr>
-                </a:tc>
-                <a:tc>
-                  <a:txBody>
-                    <a:bodyPr/>
-                    <a:lstStyle/>
-                    <a:p>
-                      <a:pPr algn="l"/>
-                      <a:r>
-                        <a:rPr sz="1000" b="0">
-                          <a:solidFill>
-                            <a:srgbClr val="1D1B43"/>
-                          </a:solidFill>
-                          <a:latin typeface="Calibri"/>
-                        </a:rPr>
-                        <a:t>60</a:t>
-                      </a:r>
-                    </a:p>
-                  </a:txBody>
-                  <a:tcPr>
-                    <a:solidFill>
-                      <a:srgbClr val="FFFFFF"/>
-                    </a:solidFill>
-                  </a:tcPr>
-                </a:tc>
-                <a:tc>
-                  <a:txBody>
-                    <a:bodyPr/>
-                    <a:lstStyle/>
-                    <a:p>
-                      <a:pPr algn="l"/>
-                      <a:r>
-                        <a:rPr sz="1000" b="0">
-                          <a:solidFill>
-                            <a:srgbClr val="1D1B43"/>
-                          </a:solidFill>
-                          <a:latin typeface="Calibri"/>
-                        </a:rPr>
-                        <a:t>55</a:t>
-                      </a:r>
-                    </a:p>
-                  </a:txBody>
-                  <a:tcPr>
-                    <a:solidFill>
-                      <a:srgbClr val="FFFFFF"/>
-                    </a:solidFill>
-                  </a:tcPr>
-                </a:tc>
-                <a:tc>
-                  <a:txBody>
-                    <a:bodyPr/>
-                    <a:lstStyle/>
-                    <a:p>
-                      <a:pPr algn="l"/>
-                      <a:r>
-                        <a:rPr sz="1000" b="0">
-                          <a:solidFill>
-                            <a:srgbClr val="1D1B43"/>
-                          </a:solidFill>
-                          <a:latin typeface="Calibri"/>
-                        </a:rPr>
-                        <a:t>5</a:t>
-                      </a:r>
-                    </a:p>
-                  </a:txBody>
-                  <a:tcPr>
-                    <a:solidFill>
-                      <a:srgbClr val="FFFFFF"/>
-                    </a:solidFill>
-                  </a:tcPr>
-                </a:tc>
-                <a:tc>
-                  <a:txBody>
-                    <a:bodyPr/>
-                    <a:lstStyle/>
-                    <a:p>
-                      <a:pPr algn="l"/>
-                      <a:r>
-                        <a:rPr sz="1000" b="0">
-                          <a:solidFill>
-                            <a:srgbClr val="1D1B43"/>
-                          </a:solidFill>
-                          <a:latin typeface="Calibri"/>
-                        </a:rPr>
-                        <a:t>91.7%</a:t>
-                      </a:r>
-                    </a:p>
-                  </a:txBody>
-                  <a:tcPr>
-                    <a:solidFill>
-                      <a:srgbClr val="FFFFFF"/>
-                    </a:solidFill>
-                  </a:tcPr>
-                </a:tc>
-                <a:tc>
-                  <a:txBody>
-                    <a:bodyPr/>
-                    <a:lstStyle/>
-                    <a:p>
-                      <a:pPr algn="l"/>
-                      <a:r>
-                        <a:rPr sz="1000" b="0">
-                          <a:solidFill>
-                            <a:srgbClr val="1D1B43"/>
-                          </a:solidFill>
-                          <a:latin typeface="Calibri"/>
-                        </a:rPr>
-                        <a:t>Regular</a:t>
-                      </a:r>
-                    </a:p>
-                  </a:txBody>
-                  <a:tcPr>
-                    <a:solidFill>
-                      <a:srgbClr val="FFFFFF"/>
-                    </a:solidFill>
-                  </a:tcPr>
-                </a:tc>
-              </a:tr>
-              <a:tr h="457200">
-                <a:tc>
-                  <a:txBody>
-                    <a:bodyPr/>
-                    <a:lstStyle/>
-                    <a:p>
-                      <a:pPr algn="l"/>
-                      <a:r>
-                        <a:rPr sz="1000" b="0">
-                          <a:solidFill>
-                            <a:srgbClr val="1D1B43"/>
-                          </a:solidFill>
-                          <a:latin typeface="Calibri"/>
-                        </a:rPr>
-                        <a:t>SC</a:t>
-                      </a:r>
-                    </a:p>
-                  </a:txBody>
-                  <a:tcPr>
-                    <a:solidFill>
-                      <a:srgbClr val="F2F2F2"/>
-                    </a:solidFill>
-                  </a:tcPr>
-                </a:tc>
-                <a:tc>
-                  <a:txBody>
-                    <a:bodyPr/>
-                    <a:lstStyle/>
-                    <a:p>
-                      <a:pPr algn="l"/>
-                      <a:r>
-                        <a:rPr sz="1000" b="0">
-                          <a:solidFill>
-                            <a:srgbClr val="1D1B43"/>
-                          </a:solidFill>
-                          <a:latin typeface="Calibri"/>
-                        </a:rPr>
-                        <a:t>1</a:t>
-                      </a:r>
-                    </a:p>
-                  </a:txBody>
-                  <a:tcPr>
-                    <a:solidFill>
-                      <a:srgbClr val="F2F2F2"/>
-                    </a:solidFill>
-                  </a:tcPr>
-                </a:tc>
-                <a:tc>
-                  <a:txBody>
-                    <a:bodyPr/>
-                    <a:lstStyle/>
-                    <a:p>
-                      <a:pPr algn="l"/>
-                      <a:r>
-                        <a:rPr sz="1000" b="0">
-                          <a:solidFill>
-                            <a:srgbClr val="1D1B43"/>
-                          </a:solidFill>
-                          <a:latin typeface="Calibri"/>
-                        </a:rPr>
-                        <a:t>1</a:t>
-                      </a:r>
-                    </a:p>
-                  </a:txBody>
-                  <a:tcPr>
-                    <a:solidFill>
-                      <a:srgbClr val="F2F2F2"/>
-                    </a:solidFill>
-                  </a:tcPr>
-                </a:tc>
-                <a:tc>
-                  <a:txBody>
-                    <a:bodyPr/>
-                    <a:lstStyle/>
-                    <a:p>
-                      <a:pPr algn="l"/>
-                      <a:r>
-                        <a:rPr sz="1000" b="0">
-                          <a:solidFill>
-                            <a:srgbClr val="1D1B43"/>
-                          </a:solidFill>
-                          <a:latin typeface="Calibri"/>
-                        </a:rPr>
-                        <a:t>0</a:t>
-                      </a:r>
-                    </a:p>
-                  </a:txBody>
-                  <a:tcPr>
-                    <a:solidFill>
-                      <a:srgbClr val="F2F2F2"/>
-                    </a:solidFill>
-                  </a:tcPr>
-                </a:tc>
-                <a:tc>
-                  <a:txBody>
-                    <a:bodyPr/>
-                    <a:lstStyle/>
-                    <a:p>
-                      <a:pPr algn="l"/>
-                      <a:r>
-                        <a:rPr sz="1000" b="0">
-                          <a:solidFill>
-                            <a:srgbClr val="1D1B43"/>
-                          </a:solidFill>
-                          <a:latin typeface="Calibri"/>
-                        </a:rPr>
-                        <a:t>100.0%</a:t>
-                      </a:r>
-                    </a:p>
-                  </a:txBody>
-                  <a:tcPr>
-                    <a:solidFill>
-                      <a:srgbClr val="F2F2F2"/>
-                    </a:solidFill>
-                  </a:tcPr>
-                </a:tc>
-                <a:tc>
-                  <a:txBody>
-                    <a:bodyPr/>
-                    <a:lstStyle/>
-                    <a:p>
-                      <a:pPr algn="l"/>
-                      <a:r>
-                        <a:rPr sz="1000" b="0">
-                          <a:solidFill>
-                            <a:srgbClr val="1D1B43"/>
-                          </a:solidFill>
-                          <a:latin typeface="Calibri"/>
-                        </a:rPr>
-                        <a:t>Excelente</a:t>
-                      </a:r>
-                    </a:p>
-                  </a:txBody>
-                  <a:tcPr>
-                    <a:solidFill>
-                      <a:srgbClr val="F2F2F2"/>
-                    </a:solidFill>
-                  </a:tcPr>
-                </a:tc>
-              </a:tr>
-            </a:tbl>
-          </a:graphicData>
-        </a:graphic>
-      </p:graphicFrame>
-    </p:spTree>
-  </p:cSld>
-  <p:clrMapOvr>
-    <a:masterClrMapping/>
-  </p:clrMapOvr>
-</p:sld>
-</file>
-
-<file path=ppt/slides/slide6.xml><?xml version="1.0" encoding="utf-8"?>
-<p:sld xmlns:a="http://schemas.openxmlformats.org/drawingml/2006/main" xmlns:p="http://schemas.openxmlformats.org/presentationml/2006/main" xmlns:r="http://schemas.openxmlformats.org/officeDocument/2006/relationships">
-  <p:cSld>
-    <p:bg>
-      <p:bgPr>
-        <a:solidFill>
-          <a:srgbClr val="FFFFFF"/>
-        </a:solidFill>
-        <a:effectLst/>
-      </p:bgPr>
-    </p:bg>
-    <p:spTree>
-      <p:nvGrpSpPr>
-        <p:cNvPr id="1" name=""/>
-        <p:cNvGrpSpPr/>
-        <p:nvPr/>
-      </p:nvGrpSpPr>
-      <p:grpSpPr/>
-      <p:pic>
-        <p:nvPicPr>
-          <p:cNvPr id="2" name="Picture 1" descr="slide2_img3.png"/>
-          <p:cNvPicPr>
-            <a:picLocks noChangeAspect="1"/>
-          </p:cNvPicPr>
-          <p:nvPr/>
-        </p:nvPicPr>
-        <p:blipFill>
-          <a:blip r:embed="rId2"/>
-          <a:stretch>
-            <a:fillRect/>
-          </a:stretch>
-        </p:blipFill>
-        <p:spPr>
-          <a:xfrm>
-            <a:off x="10661904" y="155448"/>
-            <a:ext cx="1380744" cy="667512"/>
-          </a:xfrm>
-          <a:prstGeom prst="rect">
-            <a:avLst/>
-          </a:prstGeom>
-        </p:spPr>
-      </p:pic>
-      <p:sp>
-        <p:nvSpPr>
-          <p:cNvPr id="3" name="TextBox 2"/>
-          <p:cNvSpPr txBox="1"/>
-          <p:nvPr/>
-        </p:nvSpPr>
-        <p:spPr>
-          <a:xfrm>
-            <a:off x="749808" y="502920"/>
             <a:ext cx="10058400" cy="914400"/>
           </a:xfrm>
           <a:prstGeom prst="rect">
@@ -6713,7 +5863,7 @@
                 </a:solidFill>
                 <a:latin typeface="Calibri"/>
               </a:rPr>
-              <a:t>TOP DESTINATARIOS (29 pontos)</a:t>
+              <a:t>TOP DESTINATARIOS (31 pontos)</a:t>
             </a:r>
           </a:p>
         </p:txBody>
@@ -7011,7 +6161,7 @@
                           </a:solidFill>
                           <a:latin typeface="Calibri"/>
                         </a:rPr>
-                        <a:t>18</a:t>
+                        <a:t>9</a:t>
                       </a:r>
                     </a:p>
                   </a:txBody>
@@ -7034,7 +6184,7 @@
                           </a:solidFill>
                           <a:latin typeface="Calibri"/>
                         </a:rPr>
-                        <a:t>18</a:t>
+                        <a:t>9</a:t>
                       </a:r>
                     </a:p>
                   </a:txBody>
@@ -7174,7 +6324,7 @@
                           </a:solidFill>
                           <a:latin typeface="Calibri"/>
                         </a:rPr>
-                        <a:t>3</a:t>
+                        <a:t>6</a:t>
                       </a:r>
                     </a:p>
                   </a:txBody>
@@ -7197,7 +6347,7 @@
                           </a:solidFill>
                           <a:latin typeface="Calibri"/>
                         </a:rPr>
-                        <a:t>3</a:t>
+                        <a:t>6</a:t>
                       </a:r>
                     </a:p>
                   </a:txBody>
@@ -7314,7 +6464,7 @@
                           </a:solidFill>
                           <a:latin typeface="Calibri"/>
                         </a:rPr>
-                        <a:t>FM TRANSPORTES, LOCA - GUARULHOS / SP</a:t>
+                        <a:t>UNI RAPIDO TRANSPORT - GUARULHOS / SP</a:t>
                       </a:r>
                     </a:p>
                   </a:txBody>
@@ -7337,7 +6487,7 @@
                           </a:solidFill>
                           <a:latin typeface="Calibri"/>
                         </a:rPr>
-                        <a:t>3</a:t>
+                        <a:t>5</a:t>
                       </a:r>
                     </a:p>
                   </a:txBody>
@@ -7360,7 +6510,7 @@
                           </a:solidFill>
                           <a:latin typeface="Calibri"/>
                         </a:rPr>
-                        <a:t>3</a:t>
+                        <a:t>5</a:t>
                       </a:r>
                     </a:p>
                   </a:txBody>
@@ -7477,7 +6627,7 @@
                           </a:solidFill>
                           <a:latin typeface="Calibri"/>
                         </a:rPr>
-                        <a:t>JORTEK EXPRESS - GUARULHOS / SP</a:t>
+                        <a:t>TRANS - AMIGOS TRANS - GUARULHOS / SP</a:t>
                       </a:r>
                     </a:p>
                   </a:txBody>
@@ -7500,7 +6650,7 @@
                           </a:solidFill>
                           <a:latin typeface="Calibri"/>
                         </a:rPr>
-                        <a:t>3</a:t>
+                        <a:t>5</a:t>
                       </a:r>
                     </a:p>
                   </a:txBody>
@@ -7523,7 +6673,7 @@
                           </a:solidFill>
                           <a:latin typeface="Calibri"/>
                         </a:rPr>
-                        <a:t>2</a:t>
+                        <a:t>5</a:t>
                       </a:r>
                     </a:p>
                   </a:txBody>
@@ -7546,7 +6696,7 @@
                           </a:solidFill>
                           <a:latin typeface="Calibri"/>
                         </a:rPr>
-                        <a:t>1</a:t>
+                        <a:t>0</a:t>
                       </a:r>
                     </a:p>
                   </a:txBody>
@@ -7569,7 +6719,7 @@
                           </a:solidFill>
                           <a:latin typeface="Calibri"/>
                         </a:rPr>
-                        <a:t>66.7%</a:t>
+                        <a:t>100.0%</a:t>
                       </a:r>
                     </a:p>
                   </a:txBody>
@@ -7592,7 +6742,7 @@
                           </a:solidFill>
                           <a:latin typeface="Calibri"/>
                         </a:rPr>
-                        <a:t>Atencao</a:t>
+                        <a:t>Excelente</a:t>
                       </a:r>
                     </a:p>
                   </a:txBody>
@@ -7640,7 +6790,7 @@
                           </a:solidFill>
                           <a:latin typeface="Calibri"/>
                         </a:rPr>
-                        <a:t>MAX LONAS E ACESSORI - GUARULHOS / SP</a:t>
+                        <a:t>ITACORDA INDUSTRIA E - PENHA / SC</a:t>
                       </a:r>
                     </a:p>
                   </a:txBody>
@@ -7663,7 +6813,7 @@
                           </a:solidFill>
                           <a:latin typeface="Calibri"/>
                         </a:rPr>
-                        <a:t>3</a:t>
+                        <a:t>4</a:t>
                       </a:r>
                     </a:p>
                   </a:txBody>
@@ -7686,7 +6836,7 @@
                           </a:solidFill>
                           <a:latin typeface="Calibri"/>
                         </a:rPr>
-                        <a:t>3</a:t>
+                        <a:t>4</a:t>
                       </a:r>
                     </a:p>
                   </a:txBody>
@@ -7803,7 +6953,7 @@
                           </a:solidFill>
                           <a:latin typeface="Calibri"/>
                         </a:rPr>
-                        <a:t>SEVERINO MELO ALVES - SAO PAULO / SP</a:t>
+                        <a:t>MAX LONAS E ACESSORI - GUARULHOS / SP</a:t>
                       </a:r>
                     </a:p>
                   </a:txBody>
@@ -7966,7 +7116,7 @@
                           </a:solidFill>
                           <a:latin typeface="Calibri"/>
                         </a:rPr>
-                        <a:t>DUCORTE FERRAMENTAS - SAO PAULO / SP</a:t>
+                        <a:t>CONSTRUDECOR S/A - GUARULHOS / SP</a:t>
                       </a:r>
                     </a:p>
                   </a:txBody>
@@ -7989,7 +7139,7 @@
                           </a:solidFill>
                           <a:latin typeface="Calibri"/>
                         </a:rPr>
-                        <a:t>2</a:t>
+                        <a:t>3</a:t>
                       </a:r>
                     </a:p>
                   </a:txBody>
@@ -8012,7 +7162,7 @@
                           </a:solidFill>
                           <a:latin typeface="Calibri"/>
                         </a:rPr>
-                        <a:t>2</a:t>
+                        <a:t>3</a:t>
                       </a:r>
                     </a:p>
                   </a:txBody>
@@ -8129,7 +7279,7 @@
                           </a:solidFill>
                           <a:latin typeface="Calibri"/>
                         </a:rPr>
-                        <a:t>J B DE AGUILAR TRANS - SAO PAULO / SP</a:t>
+                        <a:t>VAILOG TRANSPORTES E - SAO PAULO / SP</a:t>
                       </a:r>
                     </a:p>
                   </a:txBody>
@@ -8152,7 +7302,7 @@
                           </a:solidFill>
                           <a:latin typeface="Calibri"/>
                         </a:rPr>
-                        <a:t>2</a:t>
+                        <a:t>3</a:t>
                       </a:r>
                     </a:p>
                   </a:txBody>
@@ -8175,7 +7325,7 @@
                           </a:solidFill>
                           <a:latin typeface="Calibri"/>
                         </a:rPr>
-                        <a:t>2</a:t>
+                        <a:t>3</a:t>
                       </a:r>
                     </a:p>
                   </a:txBody>
@@ -8292,7 +7442,7 @@
                           </a:solidFill>
                           <a:latin typeface="Calibri"/>
                         </a:rPr>
-                        <a:t>CLODOALDO COM DE ENC - GUARULHOS / SP</a:t>
+                        <a:t>RAPIDO XAPURI TRANSP - GUARULHOS / SP</a:t>
                       </a:r>
                     </a:p>
                   </a:txBody>
@@ -8338,6 +7488,29 @@
                           </a:solidFill>
                           <a:latin typeface="Calibri"/>
                         </a:rPr>
+                        <a:t>2</a:t>
+                      </a:r>
+                    </a:p>
+                  </a:txBody>
+                  <a:tcPr>
+                    <a:solidFill>
+                      <a:srgbClr val="FFFFFF"/>
+                    </a:solidFill>
+                  </a:tcPr>
+                </a:tc>
+                <a:tc>
+                  <a:txBody>
+                    <a:bodyPr/>
+                    <a:lstStyle/>
+                    <a:p>
+                      <a:pPr algn="l"/>
+                      <a:r>
+                        <a:rPr sz="1000" b="0">
+                          <a:solidFill>
+                            <a:srgbClr val="1D1B43"/>
+                          </a:solidFill>
+                          <a:latin typeface="Calibri"/>
+                        </a:rPr>
                         <a:t>0</a:t>
                       </a:r>
                     </a:p>
@@ -8361,7 +7534,7 @@
                           </a:solidFill>
                           <a:latin typeface="Calibri"/>
                         </a:rPr>
-                        <a:t>2</a:t>
+                        <a:t>100.0%</a:t>
                       </a:r>
                     </a:p>
                   </a:txBody>
@@ -8384,30 +7557,7 @@
                           </a:solidFill>
                           <a:latin typeface="Calibri"/>
                         </a:rPr>
-                        <a:t>0.0%</a:t>
-                      </a:r>
-                    </a:p>
-                  </a:txBody>
-                  <a:tcPr>
-                    <a:solidFill>
-                      <a:srgbClr val="FFFFFF"/>
-                    </a:solidFill>
-                  </a:tcPr>
-                </a:tc>
-                <a:tc>
-                  <a:txBody>
-                    <a:bodyPr/>
-                    <a:lstStyle/>
-                    <a:p>
-                      <a:pPr algn="l"/>
-                      <a:r>
-                        <a:rPr sz="1000" b="0">
-                          <a:solidFill>
-                            <a:srgbClr val="1D1B43"/>
-                          </a:solidFill>
-                          <a:latin typeface="Calibri"/>
-                        </a:rPr>
-                        <a:t>Atencao</a:t>
+                        <a:t>Excelente</a:t>
                       </a:r>
                     </a:p>
                   </a:txBody>
@@ -8455,7 +7605,7 @@
                           </a:solidFill>
                           <a:latin typeface="Calibri"/>
                         </a:rPr>
-                        <a:t>TEMPO REAL TRANSPORT - GUARULHOS / SP</a:t>
+                        <a:t>TELECARGAS - SAO PAULO / SP</a:t>
                       </a:r>
                     </a:p>
                   </a:txBody>
@@ -8618,7 +7768,7 @@
                           </a:solidFill>
                           <a:latin typeface="Calibri"/>
                         </a:rPr>
-                        <a:t>TRANSPRESS TRANSPORT - GUARULHOS / SP</a:t>
+                        <a:t>TRANSPORTADORA PENHE - SAO PAULO / SP</a:t>
                       </a:r>
                     </a:p>
                   </a:txBody>
@@ -8781,7 +7931,7 @@
                           </a:solidFill>
                           <a:latin typeface="Calibri"/>
                         </a:rPr>
-                        <a:t>AND LOG TRANSPORTES - SAO PAULO / SP</a:t>
+                        <a:t>FIDELIZA LOGISTICA - SAO PAULO / SP</a:t>
                       </a:r>
                     </a:p>
                   </a:txBody>
@@ -8804,7 +7954,7 @@
                           </a:solidFill>
                           <a:latin typeface="Calibri"/>
                         </a:rPr>
-                        <a:t>1</a:t>
+                        <a:t>2</a:t>
                       </a:r>
                     </a:p>
                   </a:txBody>
@@ -8827,7 +7977,7 @@
                           </a:solidFill>
                           <a:latin typeface="Calibri"/>
                         </a:rPr>
-                        <a:t>1</a:t>
+                        <a:t>2</a:t>
                       </a:r>
                     </a:p>
                   </a:txBody>
@@ -8944,7 +8094,7 @@
                           </a:solidFill>
                           <a:latin typeface="Calibri"/>
                         </a:rPr>
-                        <a:t>7 OLIVEIRAS DISTRIBU - SAO PAULO / SP</a:t>
+                        <a:t>W. O. DOS SANTOS ENC - GUARULHOS / SP</a:t>
                       </a:r>
                     </a:p>
                   </a:txBody>
@@ -8967,7 +8117,7 @@
                           </a:solidFill>
                           <a:latin typeface="Calibri"/>
                         </a:rPr>
-                        <a:t>1</a:t>
+                        <a:t>2</a:t>
                       </a:r>
                     </a:p>
                   </a:txBody>
@@ -8990,6 +8140,29 @@
                           </a:solidFill>
                           <a:latin typeface="Calibri"/>
                         </a:rPr>
+                        <a:t>2</a:t>
+                      </a:r>
+                    </a:p>
+                  </a:txBody>
+                  <a:tcPr>
+                    <a:solidFill>
+                      <a:srgbClr val="FFFFFF"/>
+                    </a:solidFill>
+                  </a:tcPr>
+                </a:tc>
+                <a:tc>
+                  <a:txBody>
+                    <a:bodyPr/>
+                    <a:lstStyle/>
+                    <a:p>
+                      <a:pPr algn="l"/>
+                      <a:r>
+                        <a:rPr sz="1000" b="0">
+                          <a:solidFill>
+                            <a:srgbClr val="1D1B43"/>
+                          </a:solidFill>
+                          <a:latin typeface="Calibri"/>
+                        </a:rPr>
                         <a:t>0</a:t>
                       </a:r>
                     </a:p>
@@ -9013,7 +8186,7 @@
                           </a:solidFill>
                           <a:latin typeface="Calibri"/>
                         </a:rPr>
-                        <a:t>1</a:t>
+                        <a:t>100.0%</a:t>
                       </a:r>
                     </a:p>
                   </a:txBody>
@@ -9036,30 +8209,7 @@
                           </a:solidFill>
                           <a:latin typeface="Calibri"/>
                         </a:rPr>
-                        <a:t>0.0%</a:t>
-                      </a:r>
-                    </a:p>
-                  </a:txBody>
-                  <a:tcPr>
-                    <a:solidFill>
-                      <a:srgbClr val="FFFFFF"/>
-                    </a:solidFill>
-                  </a:tcPr>
-                </a:tc>
-                <a:tc>
-                  <a:txBody>
-                    <a:bodyPr/>
-                    <a:lstStyle/>
-                    <a:p>
-                      <a:pPr algn="l"/>
-                      <a:r>
-                        <a:rPr sz="1000" b="0">
-                          <a:solidFill>
-                            <a:srgbClr val="1D1B43"/>
-                          </a:solidFill>
-                          <a:latin typeface="Calibri"/>
-                        </a:rPr>
-                        <a:t>Atencao</a:t>
+                        <a:t>Excelente</a:t>
                       </a:r>
                     </a:p>
                   </a:txBody>
@@ -9107,7 +8257,7 @@
                           </a:solidFill>
                           <a:latin typeface="Calibri"/>
                         </a:rPr>
-                        <a:t>L.S. FERRAMENTAS LTD - SAO PAULO / SP</a:t>
+                        <a:t>EDSON SILVA NASCIMEN - GUARULHOS / SP</a:t>
                       </a:r>
                     </a:p>
                   </a:txBody>
@@ -9245,7 +8395,7 @@
 </p:sld>
 </file>
 
-<file path=ppt/slides/slide7.xml><?xml version="1.0" encoding="utf-8"?>
+<file path=ppt/slides/slide6.xml><?xml version="1.0" encoding="utf-8"?>
 <p:sld xmlns:a="http://schemas.openxmlformats.org/drawingml/2006/main" xmlns:p="http://schemas.openxmlformats.org/presentationml/2006/main" xmlns:r="http://schemas.openxmlformats.org/officeDocument/2006/relationships">
   <p:cSld>
     <p:bg>

--- a/ITACORDA_INDUSTRIA_E_COMERCIO.pptx
+++ b/ITACORDA_INDUSTRIA_E_COMERCIO.pptx
@@ -142,10 +142,13 @@
           </c:spPr>
           <c:cat>
             <c:strRef>
-              <c:f>Sheet1!$A$2:$A$2</c:f>
+              <c:f>Sheet1!$A$2:$A$3</c:f>
               <c:strCache>
-                <c:ptCount val="1"/>
+                <c:ptCount val="2"/>
                 <c:pt idx="0">
+                  <c:v>Maio 2026</c:v>
+                </c:pt>
+                <c:pt idx="1">
                   <c:v>Abril 2026</c:v>
                 </c:pt>
               </c:strCache>
@@ -153,11 +156,14 @@
           </c:cat>
           <c:val>
             <c:numRef>
-              <c:f>Sheet1!$B$2:$B$2</c:f>
+              <c:f>Sheet1!$B$2:$B$3</c:f>
               <c:numCache>
                 <c:formatCode>General</c:formatCode>
-                <c:ptCount val="1"/>
+                <c:ptCount val="2"/>
                 <c:pt idx="0">
+                  <c:v>52</c:v>
+                </c:pt>
+                <c:pt idx="1">
                   <c:v>66</c:v>
                 </c:pt>
               </c:numCache>
@@ -185,10 +191,13 @@
           </c:spPr>
           <c:cat>
             <c:strRef>
-              <c:f>Sheet1!$A$2:$A$2</c:f>
+              <c:f>Sheet1!$A$2:$A$3</c:f>
               <c:strCache>
-                <c:ptCount val="1"/>
+                <c:ptCount val="2"/>
                 <c:pt idx="0">
+                  <c:v>Maio 2026</c:v>
+                </c:pt>
+                <c:pt idx="1">
                   <c:v>Abril 2026</c:v>
                 </c:pt>
               </c:strCache>
@@ -196,11 +205,14 @@
           </c:cat>
           <c:val>
             <c:numRef>
-              <c:f>Sheet1!$C$2:$C$2</c:f>
+              <c:f>Sheet1!$C$2:$C$3</c:f>
               <c:numCache>
                 <c:formatCode>General</c:formatCode>
-                <c:ptCount val="1"/>
+                <c:ptCount val="2"/>
                 <c:pt idx="0">
+                  <c:v>5</c:v>
+                </c:pt>
+                <c:pt idx="1">
                   <c:v>0</c:v>
                 </c:pt>
               </c:numCache>
@@ -4141,7 +4153,7 @@
                           </a:solidFill>
                           <a:latin typeface="Calibri"/>
                         </a:rPr>
-                        <a:t>Marco 2026</a:t>
+                        <a:t>Maio 2026</a:t>
                       </a:r>
                     </a:p>
                   </a:txBody>
@@ -4235,7 +4247,7 @@
                           </a:solidFill>
                           <a:latin typeface="Calibri"/>
                         </a:rPr>
-                        <a:t>-</a:t>
+                        <a:t>57</a:t>
                       </a:r>
                     </a:p>
                   </a:txBody>
@@ -4281,7 +4293,7 @@
                           </a:solidFill>
                           <a:latin typeface="Calibri"/>
                         </a:rPr>
-                        <a:t>-</a:t>
+                        <a:t>+ 9</a:t>
                       </a:r>
                     </a:p>
                   </a:txBody>
@@ -4329,7 +4341,7 @@
                           </a:solidFill>
                           <a:latin typeface="Calibri"/>
                         </a:rPr>
-                        <a:t>-</a:t>
+                        <a:t>52</a:t>
                       </a:r>
                     </a:p>
                   </a:txBody>
@@ -4375,7 +4387,7 @@
                           </a:solidFill>
                           <a:latin typeface="Calibri"/>
                         </a:rPr>
-                        <a:t>-</a:t>
+                        <a:t>+ 14</a:t>
                       </a:r>
                     </a:p>
                   </a:txBody>
@@ -4423,7 +4435,7 @@
                           </a:solidFill>
                           <a:latin typeface="Calibri"/>
                         </a:rPr>
-                        <a:t>-</a:t>
+                        <a:t>5</a:t>
                       </a:r>
                     </a:p>
                   </a:txBody>
@@ -4469,7 +4481,7 @@
                           </a:solidFill>
                           <a:latin typeface="Calibri"/>
                         </a:rPr>
-                        <a:t>-</a:t>
+                        <a:t>- 5</a:t>
                       </a:r>
                     </a:p>
                   </a:txBody>
@@ -4517,7 +4529,7 @@
                           </a:solidFill>
                           <a:latin typeface="Calibri"/>
                         </a:rPr>
-                        <a:t>-</a:t>
+                        <a:t>91.2%</a:t>
                       </a:r>
                     </a:p>
                   </a:txBody>
@@ -4563,7 +4575,7 @@
                           </a:solidFill>
                           <a:latin typeface="Calibri"/>
                         </a:rPr>
-                        <a:t>-</a:t>
+                        <a:t>+ 8.8pp</a:t>
                       </a:r>
                     </a:p>
                   </a:txBody>
@@ -4734,7 +4746,7 @@
         </p:nvGraphicFramePr>
         <p:xfrm>
           <a:off x="7955279" y="2286000"/>
-          <a:ext cx="4480560" cy="877824"/>
+          <a:ext cx="4480560" cy="1316736"/>
         </p:xfrm>
         <a:graphic>
           <a:graphicData uri="http://schemas.openxmlformats.org/drawingml/2006/table">
@@ -4880,13 +4892,130 @@
                           </a:solidFill>
                           <a:latin typeface="Calibri"/>
                         </a:rPr>
+                        <a:t>Maio 2026</a:t>
+                      </a:r>
+                    </a:p>
+                  </a:txBody>
+                  <a:tcPr>
+                    <a:solidFill>
+                      <a:srgbClr val="FFFFFF"/>
+                    </a:solidFill>
+                  </a:tcPr>
+                </a:tc>
+                <a:tc>
+                  <a:txBody>
+                    <a:bodyPr/>
+                    <a:lstStyle/>
+                    <a:p>
+                      <a:pPr algn="l"/>
+                      <a:r>
+                        <a:rPr sz="1000" b="0">
+                          <a:solidFill>
+                            <a:srgbClr val="1D1B43"/>
+                          </a:solidFill>
+                          <a:latin typeface="Calibri"/>
+                        </a:rPr>
+                        <a:t>57</a:t>
+                      </a:r>
+                    </a:p>
+                  </a:txBody>
+                  <a:tcPr>
+                    <a:solidFill>
+                      <a:srgbClr val="FFFFFF"/>
+                    </a:solidFill>
+                  </a:tcPr>
+                </a:tc>
+                <a:tc>
+                  <a:txBody>
+                    <a:bodyPr/>
+                    <a:lstStyle/>
+                    <a:p>
+                      <a:pPr algn="l"/>
+                      <a:r>
+                        <a:rPr sz="1000" b="0">
+                          <a:solidFill>
+                            <a:srgbClr val="1D1B43"/>
+                          </a:solidFill>
+                          <a:latin typeface="Calibri"/>
+                        </a:rPr>
+                        <a:t>52</a:t>
+                      </a:r>
+                    </a:p>
+                  </a:txBody>
+                  <a:tcPr>
+                    <a:solidFill>
+                      <a:srgbClr val="FFFFFF"/>
+                    </a:solidFill>
+                  </a:tcPr>
+                </a:tc>
+                <a:tc>
+                  <a:txBody>
+                    <a:bodyPr/>
+                    <a:lstStyle/>
+                    <a:p>
+                      <a:pPr algn="l"/>
+                      <a:r>
+                        <a:rPr sz="1000" b="0">
+                          <a:solidFill>
+                            <a:srgbClr val="1D1B43"/>
+                          </a:solidFill>
+                          <a:latin typeface="Calibri"/>
+                        </a:rPr>
+                        <a:t>5</a:t>
+                      </a:r>
+                    </a:p>
+                  </a:txBody>
+                  <a:tcPr>
+                    <a:solidFill>
+                      <a:srgbClr val="FFFFFF"/>
+                    </a:solidFill>
+                  </a:tcPr>
+                </a:tc>
+                <a:tc>
+                  <a:txBody>
+                    <a:bodyPr/>
+                    <a:lstStyle/>
+                    <a:p>
+                      <a:pPr algn="l"/>
+                      <a:r>
+                        <a:rPr sz="1000" b="0">
+                          <a:solidFill>
+                            <a:srgbClr val="1D1B43"/>
+                          </a:solidFill>
+                          <a:latin typeface="Calibri"/>
+                        </a:rPr>
+                        <a:t>91.2%</a:t>
+                      </a:r>
+                    </a:p>
+                  </a:txBody>
+                  <a:tcPr>
+                    <a:solidFill>
+                      <a:srgbClr val="FFFFFF"/>
+                    </a:solidFill>
+                  </a:tcPr>
+                </a:tc>
+              </a:tr>
+              <a:tr h="438912">
+                <a:tc>
+                  <a:txBody>
+                    <a:bodyPr/>
+                    <a:lstStyle/>
+                    <a:p>
+                      <a:pPr algn="l"/>
+                      <a:r>
+                        <a:rPr sz="1000" b="0">
+                          <a:solidFill>
+                            <a:srgbClr val="1D1B43"/>
+                          </a:solidFill>
+                          <a:latin typeface="Calibri"/>
+                        </a:rPr>
                         <a:t>Abril 2026</a:t>
                       </a:r>
                     </a:p>
                   </a:txBody>
                   <a:tcPr>
                     <a:solidFill>
-                      <a:srgbClr val="FFFFFF"/>
+                      <a:srgbClr val="F2F2F2"/>
                     </a:solidFill>
                   </a:tcPr>
                 </a:tc>
@@ -4909,7 +5038,7 @@
                   </a:txBody>
                   <a:tcPr>
                     <a:solidFill>
-                      <a:srgbClr val="FFFFFF"/>
+                      <a:srgbClr val="F2F2F2"/>
                     </a:solidFill>
                   </a:tcPr>
                 </a:tc>
@@ -4932,7 +5061,7 @@
                   </a:txBody>
                   <a:tcPr>
                     <a:solidFill>
-                      <a:srgbClr val="FFFFFF"/>
+                      <a:srgbClr val="F2F2F2"/>
                     </a:solidFill>
                   </a:tcPr>
                 </a:tc>
@@ -4955,7 +5084,7 @@
                   </a:txBody>
                   <a:tcPr>
                     <a:solidFill>
-                      <a:srgbClr val="FFFFFF"/>
+                      <a:srgbClr val="F2F2F2"/>
                     </a:solidFill>
                   </a:tcPr>
                 </a:tc>
@@ -4978,7 +5107,7 @@
                   </a:txBody>
                   <a:tcPr>
                     <a:solidFill>
-                      <a:srgbClr val="FFFFFF"/>
+                      <a:srgbClr val="F2F2F2"/>
                     </a:solidFill>
                   </a:tcPr>
                 </a:tc>

--- a/ITACORDA_INDUSTRIA_E_COMERCIO.pptx
+++ b/ITACORDA_INDUSTRIA_E_COMERCIO.pptx
@@ -161,7 +161,7 @@
                 <c:formatCode>General</c:formatCode>
                 <c:ptCount val="2"/>
                 <c:pt idx="0">
-                  <c:v>52</c:v>
+                  <c:v>63</c:v>
                 </c:pt>
                 <c:pt idx="1">
                   <c:v>66</c:v>
@@ -4247,7 +4247,7 @@
                           </a:solidFill>
                           <a:latin typeface="Calibri"/>
                         </a:rPr>
-                        <a:t>57</a:t>
+                        <a:t>68</a:t>
                       </a:r>
                     </a:p>
                   </a:txBody>
@@ -4293,7 +4293,7 @@
                           </a:solidFill>
                           <a:latin typeface="Calibri"/>
                         </a:rPr>
-                        <a:t>+ 9</a:t>
+                        <a:t>- 2</a:t>
                       </a:r>
                     </a:p>
                   </a:txBody>
@@ -4341,7 +4341,7 @@
                           </a:solidFill>
                           <a:latin typeface="Calibri"/>
                         </a:rPr>
-                        <a:t>52</a:t>
+                        <a:t>63</a:t>
                       </a:r>
                     </a:p>
                   </a:txBody>
@@ -4387,7 +4387,7 @@
                           </a:solidFill>
                           <a:latin typeface="Calibri"/>
                         </a:rPr>
-                        <a:t>+ 14</a:t>
+                        <a:t>+ 3</a:t>
                       </a:r>
                     </a:p>
                   </a:txBody>
@@ -4529,7 +4529,7 @@
                           </a:solidFill>
                           <a:latin typeface="Calibri"/>
                         </a:rPr>
-                        <a:t>91.2%</a:t>
+                        <a:t>92.6%</a:t>
                       </a:r>
                     </a:p>
                   </a:txBody>
@@ -4575,7 +4575,7 @@
                           </a:solidFill>
                           <a:latin typeface="Calibri"/>
                         </a:rPr>
-                        <a:t>+ 8.8pp</a:t>
+                        <a:t>+ 7.4pp</a:t>
                       </a:r>
                     </a:p>
                   </a:txBody>
@@ -4915,7 +4915,7 @@
                           </a:solidFill>
                           <a:latin typeface="Calibri"/>
                         </a:rPr>
-                        <a:t>57</a:t>
+                        <a:t>68</a:t>
                       </a:r>
                     </a:p>
                   </a:txBody>
@@ -4938,7 +4938,7 @@
                           </a:solidFill>
                           <a:latin typeface="Calibri"/>
                         </a:rPr>
-                        <a:t>52</a:t>
+                        <a:t>63</a:t>
                       </a:r>
                     </a:p>
                   </a:txBody>
@@ -4984,7 +4984,7 @@
                           </a:solidFill>
                           <a:latin typeface="Calibri"/>
                         </a:rPr>
-                        <a:t>91.2%</a:t>
+                        <a:t>92.6%</a:t>
                       </a:r>
                     </a:p>
                   </a:txBody>

--- a/ITACORDA_INDUSTRIA_E_COMERCIO.pptx
+++ b/ITACORDA_INDUSTRIA_E_COMERCIO.pptx
@@ -11,6 +11,7 @@
     <p:sldId id="259" r:id="rId10"/>
     <p:sldId id="260" r:id="rId11"/>
     <p:sldId id="261" r:id="rId12"/>
+    <p:sldId id="262" r:id="rId13"/>
   </p:sldIdLst>
   <p:sldSz cx="12188952" cy="6858000" type="screen4x3"/>
   <p:notesSz cx="6858000" cy="9144000"/>
@@ -146,10 +147,10 @@
               <c:strCache>
                 <c:ptCount val="2"/>
                 <c:pt idx="0">
-                  <c:v>Maio 2026</c:v>
+                  <c:v>Abril 2026</c:v>
                 </c:pt>
                 <c:pt idx="1">
-                  <c:v>Abril 2026</c:v>
+                  <c:v>Maio 2026</c:v>
                 </c:pt>
               </c:strCache>
             </c:strRef>
@@ -161,10 +162,10 @@
                 <c:formatCode>General</c:formatCode>
                 <c:ptCount val="2"/>
                 <c:pt idx="0">
-                  <c:v>63</c:v>
+                  <c:v>66</c:v>
                 </c:pt>
                 <c:pt idx="1">
-                  <c:v>66</c:v>
+                  <c:v>72</c:v>
                 </c:pt>
               </c:numCache>
             </c:numRef>
@@ -195,10 +196,10 @@
               <c:strCache>
                 <c:ptCount val="2"/>
                 <c:pt idx="0">
-                  <c:v>Maio 2026</c:v>
+                  <c:v>Abril 2026</c:v>
                 </c:pt>
                 <c:pt idx="1">
-                  <c:v>Abril 2026</c:v>
+                  <c:v>Maio 2026</c:v>
                 </c:pt>
               </c:strCache>
             </c:strRef>
@@ -210,10 +211,10 @@
                 <c:formatCode>General</c:formatCode>
                 <c:ptCount val="2"/>
                 <c:pt idx="0">
-                  <c:v>5</c:v>
+                  <c:v>0</c:v>
                 </c:pt>
                 <c:pt idx="1">
-                  <c:v>0</c:v>
+                  <c:v>4</c:v>
                 </c:pt>
               </c:numCache>
             </c:numRef>
@@ -3386,7 +3387,7 @@
                 </a:solidFill>
                 <a:latin typeface="Calibri"/>
               </a:rPr>
-              <a:t>INDICADORES ABRIL 2026</a:t>
+              <a:t>INDICADORES MAIO 2026</a:t>
             </a:r>
           </a:p>
         </p:txBody>
@@ -3707,7 +3708,7 @@
                 </a:solidFill>
                 <a:latin typeface="Calibri"/>
               </a:rPr>
-              <a:t>66</a:t>
+              <a:t>76</a:t>
             </a:r>
           </a:p>
         </p:txBody>
@@ -3822,7 +3823,7 @@
                 </a:solidFill>
                 <a:latin typeface="Calibri"/>
               </a:rPr>
-              <a:t>66</a:t>
+              <a:t>72</a:t>
             </a:r>
           </a:p>
         </p:txBody>
@@ -3933,11 +3934,11 @@
             <a:r>
               <a:rPr sz="2800" b="1">
                 <a:solidFill>
-                  <a:srgbClr val="10B981"/>
+                  <a:srgbClr val="EF4444"/>
                 </a:solidFill>
                 <a:latin typeface="Calibri"/>
               </a:rPr>
-              <a:t>0</a:t>
+              <a:t>4</a:t>
             </a:r>
           </a:p>
         </p:txBody>
@@ -4048,11 +4049,11 @@
             <a:r>
               <a:rPr sz="2800" b="1">
                 <a:solidFill>
-                  <a:srgbClr val="10B981"/>
+                  <a:srgbClr val="F59E0B"/>
                 </a:solidFill>
                 <a:latin typeface="Calibri"/>
               </a:rPr>
-              <a:t>100.0%</a:t>
+              <a:t>94.7%</a:t>
             </a:r>
           </a:p>
         </p:txBody>
@@ -4153,30 +4154,30 @@
                           </a:solidFill>
                           <a:latin typeface="Calibri"/>
                         </a:rPr>
+                        <a:t>Abril 2026</a:t>
+                      </a:r>
+                    </a:p>
+                  </a:txBody>
+                  <a:tcPr>
+                    <a:solidFill>
+                      <a:srgbClr val="1D1B43"/>
+                    </a:solidFill>
+                  </a:tcPr>
+                </a:tc>
+                <a:tc>
+                  <a:txBody>
+                    <a:bodyPr/>
+                    <a:lstStyle/>
+                    <a:p>
+                      <a:pPr algn="ctr"/>
+                      <a:r>
+                        <a:rPr sz="1100" b="1">
+                          <a:solidFill>
+                            <a:srgbClr val="FFFFFF"/>
+                          </a:solidFill>
+                          <a:latin typeface="Calibri"/>
+                        </a:rPr>
                         <a:t>Maio 2026</a:t>
-                      </a:r>
-                    </a:p>
-                  </a:txBody>
-                  <a:tcPr>
-                    <a:solidFill>
-                      <a:srgbClr val="1D1B43"/>
-                    </a:solidFill>
-                  </a:tcPr>
-                </a:tc>
-                <a:tc>
-                  <a:txBody>
-                    <a:bodyPr/>
-                    <a:lstStyle/>
-                    <a:p>
-                      <a:pPr algn="ctr"/>
-                      <a:r>
-                        <a:rPr sz="1100" b="1">
-                          <a:solidFill>
-                            <a:srgbClr val="FFFFFF"/>
-                          </a:solidFill>
-                          <a:latin typeface="Calibri"/>
-                        </a:rPr>
-                        <a:t>Abril 2026</a:t>
                       </a:r>
                     </a:p>
                   </a:txBody>
@@ -4247,7 +4248,7 @@
                           </a:solidFill>
                           <a:latin typeface="Calibri"/>
                         </a:rPr>
-                        <a:t>68</a:t>
+                        <a:t>66</a:t>
                       </a:r>
                     </a:p>
                   </a:txBody>
@@ -4270,7 +4271,7 @@
                           </a:solidFill>
                           <a:latin typeface="Calibri"/>
                         </a:rPr>
-                        <a:t>66</a:t>
+                        <a:t>76</a:t>
                       </a:r>
                     </a:p>
                   </a:txBody>
@@ -4293,7 +4294,7 @@
                           </a:solidFill>
                           <a:latin typeface="Calibri"/>
                         </a:rPr>
-                        <a:t>- 2</a:t>
+                        <a:t>+ 10</a:t>
                       </a:r>
                     </a:p>
                   </a:txBody>
@@ -4341,7 +4342,7 @@
                           </a:solidFill>
                           <a:latin typeface="Calibri"/>
                         </a:rPr>
-                        <a:t>63</a:t>
+                        <a:t>66</a:t>
                       </a:r>
                     </a:p>
                   </a:txBody>
@@ -4364,7 +4365,7 @@
                           </a:solidFill>
                           <a:latin typeface="Calibri"/>
                         </a:rPr>
-                        <a:t>66</a:t>
+                        <a:t>72</a:t>
                       </a:r>
                     </a:p>
                   </a:txBody>
@@ -4387,7 +4388,7 @@
                           </a:solidFill>
                           <a:latin typeface="Calibri"/>
                         </a:rPr>
-                        <a:t>+ 3</a:t>
+                        <a:t>+ 6</a:t>
                       </a:r>
                     </a:p>
                   </a:txBody>
@@ -4435,7 +4436,7 @@
                           </a:solidFill>
                           <a:latin typeface="Calibri"/>
                         </a:rPr>
-                        <a:t>5</a:t>
+                        <a:t>-</a:t>
                       </a:r>
                     </a:p>
                   </a:txBody>
@@ -4458,7 +4459,7 @@
                           </a:solidFill>
                           <a:latin typeface="Calibri"/>
                         </a:rPr>
-                        <a:t>0</a:t>
+                        <a:t>4</a:t>
                       </a:r>
                     </a:p>
                   </a:txBody>
@@ -4481,7 +4482,7 @@
                           </a:solidFill>
                           <a:latin typeface="Calibri"/>
                         </a:rPr>
-                        <a:t>- 5</a:t>
+                        <a:t>-</a:t>
                       </a:r>
                     </a:p>
                   </a:txBody>
@@ -4529,7 +4530,7 @@
                           </a:solidFill>
                           <a:latin typeface="Calibri"/>
                         </a:rPr>
-                        <a:t>92.6%</a:t>
+                        <a:t>100.0%</a:t>
                       </a:r>
                     </a:p>
                   </a:txBody>
@@ -4552,7 +4553,7 @@
                           </a:solidFill>
                           <a:latin typeface="Calibri"/>
                         </a:rPr>
-                        <a:t>100.0%</a:t>
+                        <a:t>94.7%</a:t>
                       </a:r>
                     </a:p>
                   </a:txBody>
@@ -4575,7 +4576,7 @@
                           </a:solidFill>
                           <a:latin typeface="Calibri"/>
                         </a:rPr>
-                        <a:t>+ 7.4pp</a:t>
+                        <a:t>- 5.3pp</a:t>
                       </a:r>
                     </a:p>
                   </a:txBody>
@@ -4892,7 +4893,7 @@
                           </a:solidFill>
                           <a:latin typeface="Calibri"/>
                         </a:rPr>
-                        <a:t>Maio 2026</a:t>
+                        <a:t>Abril 2026</a:t>
                       </a:r>
                     </a:p>
                   </a:txBody>
@@ -4915,7 +4916,7 @@
                           </a:solidFill>
                           <a:latin typeface="Calibri"/>
                         </a:rPr>
-                        <a:t>68</a:t>
+                        <a:t>66</a:t>
                       </a:r>
                     </a:p>
                   </a:txBody>
@@ -4938,7 +4939,7 @@
                           </a:solidFill>
                           <a:latin typeface="Calibri"/>
                         </a:rPr>
-                        <a:t>63</a:t>
+                        <a:t>66</a:t>
                       </a:r>
                     </a:p>
                   </a:txBody>
@@ -4961,7 +4962,7 @@
                           </a:solidFill>
                           <a:latin typeface="Calibri"/>
                         </a:rPr>
-                        <a:t>5</a:t>
+                        <a:t>0</a:t>
                       </a:r>
                     </a:p>
                   </a:txBody>
@@ -4984,7 +4985,7 @@
                           </a:solidFill>
                           <a:latin typeface="Calibri"/>
                         </a:rPr>
-                        <a:t>92.6%</a:t>
+                        <a:t>100.0%</a:t>
                       </a:r>
                     </a:p>
                   </a:txBody>
@@ -5009,7 +5010,7 @@
                           </a:solidFill>
                           <a:latin typeface="Calibri"/>
                         </a:rPr>
-                        <a:t>Abril 2026</a:t>
+                        <a:t>Maio 2026</a:t>
                       </a:r>
                     </a:p>
                   </a:txBody>
@@ -5032,7 +5033,7 @@
                           </a:solidFill>
                           <a:latin typeface="Calibri"/>
                         </a:rPr>
-                        <a:t>66</a:t>
+                        <a:t>76</a:t>
                       </a:r>
                     </a:p>
                   </a:txBody>
@@ -5055,7 +5056,7 @@
                           </a:solidFill>
                           <a:latin typeface="Calibri"/>
                         </a:rPr>
-                        <a:t>66</a:t>
+                        <a:t>72</a:t>
                       </a:r>
                     </a:p>
                   </a:txBody>
@@ -5078,7 +5079,7 @@
                           </a:solidFill>
                           <a:latin typeface="Calibri"/>
                         </a:rPr>
-                        <a:t>0</a:t>
+                        <a:t>4</a:t>
                       </a:r>
                     </a:p>
                   </a:txBody>
@@ -5101,7 +5102,7 @@
                           </a:solidFill>
                           <a:latin typeface="Calibri"/>
                         </a:rPr>
-                        <a:t>100.0%</a:t>
+                        <a:t>94.7%</a:t>
                       </a:r>
                     </a:p>
                   </a:txBody>
@@ -5189,7 +5190,7 @@
                 </a:solidFill>
                 <a:latin typeface="Calibri"/>
               </a:rPr>
-              <a:t>PERFORMANCE: 100.0% - EXCELENTE</a:t>
+              <a:t>PERFORMANCE: 94.7% - REGULAR</a:t>
             </a:r>
           </a:p>
         </p:txBody>
@@ -5253,7 +5254,7 @@
         <p:spPr>
           <a:xfrm>
             <a:off x="749808" y="502920"/>
-            <a:ext cx="9144000" cy="914400"/>
+            <a:ext cx="10058400" cy="914400"/>
           </a:xfrm>
           <a:prstGeom prst="rect">
             <a:avLst/>
@@ -5268,13 +5269,13 @@
           <a:p>
             <a:pPr algn="l"/>
             <a:r>
-              <a:rPr sz="4000" b="1">
+              <a:rPr sz="3200" b="1">
                 <a:solidFill>
                   <a:srgbClr val="F97316"/>
                 </a:solidFill>
                 <a:latin typeface="Calibri"/>
               </a:rPr>
-              <a:t>PERFORMANCE POR UF</a:t>
+              <a:t>OCORRENCIAS FORA DO PRAZO (4)</a:t>
             </a:r>
           </a:p>
         </p:txBody>
@@ -5287,7 +5288,7 @@
         </p:nvSpPr>
         <p:spPr>
           <a:xfrm>
-            <a:off x="749808" y="1719072"/>
+            <a:off x="749808" y="1600200"/>
             <a:ext cx="10424160" cy="36576"/>
           </a:xfrm>
           <a:prstGeom prst="rect">
@@ -5331,8 +5332,8 @@
           <p:nvPr/>
         </p:nvGraphicFramePr>
         <p:xfrm>
-          <a:off x="731520" y="1920240"/>
-          <a:ext cx="10698480" cy="1828800"/>
+          <a:off x="457200" y="1828800"/>
+          <a:ext cx="11429999" cy="1920240"/>
         </p:xfrm>
         <a:graphic>
           <a:graphicData uri="http://schemas.openxmlformats.org/drawingml/2006/table">
@@ -5341,14 +5342,13 @@
                 <a:tableStyleId>{5C22544A-7EE6-4342-B048-85BDC9FD1C3A}</a:tableStyleId>
               </a:tblPr>
               <a:tblGrid>
-                <a:gridCol w="1097280"/>
-                <a:gridCol w="1645920"/>
-                <a:gridCol w="1645920"/>
-                <a:gridCol w="1645920"/>
+                <a:gridCol w="1280160"/>
+                <a:gridCol w="3749039"/>
+                <a:gridCol w="2103120"/>
                 <a:gridCol w="1554480"/>
-                <a:gridCol w="3108960"/>
+                <a:gridCol w="2743200"/>
               </a:tblGrid>
-              <a:tr h="457200">
+              <a:tr h="384048">
                 <a:tc>
                   <a:txBody>
                     <a:bodyPr/>
@@ -5362,7 +5362,7 @@
                           </a:solidFill>
                           <a:latin typeface="Calibri"/>
                         </a:rPr>
-                        <a:t>UF</a:t>
+                        <a:t>MD</a:t>
                       </a:r>
                     </a:p>
                   </a:txBody>
@@ -5385,7 +5385,7 @@
                           </a:solidFill>
                           <a:latin typeface="Calibri"/>
                         </a:rPr>
-                        <a:t>TOTAL</a:t>
+                        <a:t>DESTINATARIO</a:t>
                       </a:r>
                     </a:p>
                   </a:txBody>
@@ -5408,7 +5408,7 @@
                           </a:solidFill>
                           <a:latin typeface="Calibri"/>
                         </a:rPr>
-                        <a:t>NO PRAZO</a:t>
+                        <a:t>CIDADE/UF</a:t>
                       </a:r>
                     </a:p>
                   </a:txBody>
@@ -5431,7 +5431,7 @@
                           </a:solidFill>
                           <a:latin typeface="Calibri"/>
                         </a:rPr>
-                        <a:t>FORA</a:t>
+                        <a:t>PREV. ENTREGA</a:t>
                       </a:r>
                     </a:p>
                   </a:txBody>
@@ -5454,7 +5454,7 @@
                           </a:solidFill>
                           <a:latin typeface="Calibri"/>
                         </a:rPr>
-                        <a:t>TAXA</a:t>
+                        <a:t>STATUS</a:t>
                       </a:r>
                     </a:p>
                   </a:txBody>
@@ -5464,45 +5464,22 @@
                     </a:solidFill>
                   </a:tcPr>
                 </a:tc>
-                <a:tc>
-                  <a:txBody>
-                    <a:bodyPr/>
-                    <a:lstStyle/>
-                    <a:p>
-                      <a:pPr algn="ctr"/>
-                      <a:r>
-                        <a:rPr sz="1100" b="1">
-                          <a:solidFill>
-                            <a:srgbClr val="FFFFFF"/>
-                          </a:solidFill>
-                          <a:latin typeface="Calibri"/>
-                        </a:rPr>
-                        <a:t>STATUS</a:t>
-                      </a:r>
-                    </a:p>
-                  </a:txBody>
-                  <a:tcPr>
-                    <a:solidFill>
-                      <a:srgbClr val="1D1B43"/>
-                    </a:solidFill>
-                  </a:tcPr>
-                </a:tc>
               </a:tr>
-              <a:tr h="457200">
-                <a:tc>
-                  <a:txBody>
-                    <a:bodyPr/>
-                    <a:lstStyle/>
-                    <a:p>
-                      <a:pPr algn="l"/>
-                      <a:r>
-                        <a:rPr sz="1000" b="0">
-                          <a:solidFill>
-                            <a:srgbClr val="1D1B43"/>
-                          </a:solidFill>
-                          <a:latin typeface="Calibri"/>
-                        </a:rPr>
-                        <a:t>SP</a:t>
+              <a:tr h="384048">
+                <a:tc>
+                  <a:txBody>
+                    <a:bodyPr/>
+                    <a:lstStyle/>
+                    <a:p>
+                      <a:pPr algn="l"/>
+                      <a:r>
+                        <a:rPr sz="1000" b="0">
+                          <a:solidFill>
+                            <a:srgbClr val="1D1B43"/>
+                          </a:solidFill>
+                          <a:latin typeface="Calibri"/>
+                        </a:rPr>
+                        <a:t>281514</a:t>
                       </a:r>
                     </a:p>
                   </a:txBody>
@@ -5525,7 +5502,7 @@
                           </a:solidFill>
                           <a:latin typeface="Calibri"/>
                         </a:rPr>
-                        <a:t>61</a:t>
+                        <a:t>JORTEK EXPRESS - GUARULHOS / SP</a:t>
                       </a:r>
                     </a:p>
                   </a:txBody>
@@ -5548,7 +5525,7 @@
                           </a:solidFill>
                           <a:latin typeface="Calibri"/>
                         </a:rPr>
-                        <a:t>61</a:t>
+                        <a:t>GUARULHOS/SP</a:t>
                       </a:r>
                     </a:p>
                   </a:txBody>
@@ -5571,7 +5548,7 @@
                           </a:solidFill>
                           <a:latin typeface="Calibri"/>
                         </a:rPr>
-                        <a:t>0</a:t>
+                        <a:t>07/05/2026</a:t>
                       </a:r>
                     </a:p>
                   </a:txBody>
@@ -5594,7 +5571,7 @@
                           </a:solidFill>
                           <a:latin typeface="Calibri"/>
                         </a:rPr>
-                        <a:t>100.0%</a:t>
+                        <a:t>ENTREGUE FORA DO PRAZO</a:t>
                       </a:r>
                     </a:p>
                   </a:txBody>
@@ -5604,20 +5581,139 @@
                     </a:solidFill>
                   </a:tcPr>
                 </a:tc>
-                <a:tc>
-                  <a:txBody>
-                    <a:bodyPr/>
-                    <a:lstStyle/>
-                    <a:p>
-                      <a:pPr algn="l"/>
-                      <a:r>
-                        <a:rPr sz="1000" b="0">
-                          <a:solidFill>
-                            <a:srgbClr val="1D1B43"/>
-                          </a:solidFill>
-                          <a:latin typeface="Calibri"/>
-                        </a:rPr>
-                        <a:t>Excelente</a:t>
+              </a:tr>
+              <a:tr h="384048">
+                <a:tc>
+                  <a:txBody>
+                    <a:bodyPr/>
+                    <a:lstStyle/>
+                    <a:p>
+                      <a:pPr algn="l"/>
+                      <a:r>
+                        <a:rPr sz="1000" b="0">
+                          <a:solidFill>
+                            <a:srgbClr val="1D1B43"/>
+                          </a:solidFill>
+                          <a:latin typeface="Calibri"/>
+                        </a:rPr>
+                        <a:t>281845</a:t>
+                      </a:r>
+                    </a:p>
+                  </a:txBody>
+                  <a:tcPr>
+                    <a:solidFill>
+                      <a:srgbClr val="F2F2F2"/>
+                    </a:solidFill>
+                  </a:tcPr>
+                </a:tc>
+                <a:tc>
+                  <a:txBody>
+                    <a:bodyPr/>
+                    <a:lstStyle/>
+                    <a:p>
+                      <a:pPr algn="l"/>
+                      <a:r>
+                        <a:rPr sz="1000" b="0">
+                          <a:solidFill>
+                            <a:srgbClr val="1D1B43"/>
+                          </a:solidFill>
+                          <a:latin typeface="Calibri"/>
+                        </a:rPr>
+                        <a:t>7 OLIVEIRAS DISTRIBU - SAO PAULO / SP</a:t>
+                      </a:r>
+                    </a:p>
+                  </a:txBody>
+                  <a:tcPr>
+                    <a:solidFill>
+                      <a:srgbClr val="F2F2F2"/>
+                    </a:solidFill>
+                  </a:tcPr>
+                </a:tc>
+                <a:tc>
+                  <a:txBody>
+                    <a:bodyPr/>
+                    <a:lstStyle/>
+                    <a:p>
+                      <a:pPr algn="l"/>
+                      <a:r>
+                        <a:rPr sz="1000" b="0">
+                          <a:solidFill>
+                            <a:srgbClr val="1D1B43"/>
+                          </a:solidFill>
+                          <a:latin typeface="Calibri"/>
+                        </a:rPr>
+                        <a:t>SAO PAULO/SP</a:t>
+                      </a:r>
+                    </a:p>
+                  </a:txBody>
+                  <a:tcPr>
+                    <a:solidFill>
+                      <a:srgbClr val="F2F2F2"/>
+                    </a:solidFill>
+                  </a:tcPr>
+                </a:tc>
+                <a:tc>
+                  <a:txBody>
+                    <a:bodyPr/>
+                    <a:lstStyle/>
+                    <a:p>
+                      <a:pPr algn="l"/>
+                      <a:r>
+                        <a:rPr sz="1000" b="0">
+                          <a:solidFill>
+                            <a:srgbClr val="1D1B43"/>
+                          </a:solidFill>
+                          <a:latin typeface="Calibri"/>
+                        </a:rPr>
+                        <a:t>11/05/2026</a:t>
+                      </a:r>
+                    </a:p>
+                  </a:txBody>
+                  <a:tcPr>
+                    <a:solidFill>
+                      <a:srgbClr val="F2F2F2"/>
+                    </a:solidFill>
+                  </a:tcPr>
+                </a:tc>
+                <a:tc>
+                  <a:txBody>
+                    <a:bodyPr/>
+                    <a:lstStyle/>
+                    <a:p>
+                      <a:pPr algn="l"/>
+                      <a:r>
+                        <a:rPr sz="1000" b="0">
+                          <a:solidFill>
+                            <a:srgbClr val="1D1B43"/>
+                          </a:solidFill>
+                          <a:latin typeface="Calibri"/>
+                        </a:rPr>
+                        <a:t>ENTREGUE FORA DO PRAZO</a:t>
+                      </a:r>
+                    </a:p>
+                  </a:txBody>
+                  <a:tcPr>
+                    <a:solidFill>
+                      <a:srgbClr val="F2F2F2"/>
+                    </a:solidFill>
+                  </a:tcPr>
+                </a:tc>
+              </a:tr>
+              <a:tr h="384048">
+                <a:tc>
+                  <a:txBody>
+                    <a:bodyPr/>
+                    <a:lstStyle/>
+                    <a:p>
+                      <a:pPr algn="l"/>
+                      <a:r>
+                        <a:rPr sz="1000" b="0">
+                          <a:solidFill>
+                            <a:srgbClr val="1D1B43"/>
+                          </a:solidFill>
+                          <a:latin typeface="Calibri"/>
+                        </a:rPr>
+                        <a:t>282484</a:t>
                       </a:r>
                     </a:p>
                   </a:txBody>
@@ -5627,22 +5723,114 @@
                     </a:solidFill>
                   </a:tcPr>
                 </a:tc>
+                <a:tc>
+                  <a:txBody>
+                    <a:bodyPr/>
+                    <a:lstStyle/>
+                    <a:p>
+                      <a:pPr algn="l"/>
+                      <a:r>
+                        <a:rPr sz="1000" b="0">
+                          <a:solidFill>
+                            <a:srgbClr val="1D1B43"/>
+                          </a:solidFill>
+                          <a:latin typeface="Calibri"/>
+                        </a:rPr>
+                        <a:t>PRADA PLUS DO BRASIL - SAO PAULO / SP</a:t>
+                      </a:r>
+                    </a:p>
+                  </a:txBody>
+                  <a:tcPr>
+                    <a:solidFill>
+                      <a:srgbClr val="FFFFFF"/>
+                    </a:solidFill>
+                  </a:tcPr>
+                </a:tc>
+                <a:tc>
+                  <a:txBody>
+                    <a:bodyPr/>
+                    <a:lstStyle/>
+                    <a:p>
+                      <a:pPr algn="l"/>
+                      <a:r>
+                        <a:rPr sz="1000" b="0">
+                          <a:solidFill>
+                            <a:srgbClr val="1D1B43"/>
+                          </a:solidFill>
+                          <a:latin typeface="Calibri"/>
+                        </a:rPr>
+                        <a:t>SAO PAULO/SP</a:t>
+                      </a:r>
+                    </a:p>
+                  </a:txBody>
+                  <a:tcPr>
+                    <a:solidFill>
+                      <a:srgbClr val="FFFFFF"/>
+                    </a:solidFill>
+                  </a:tcPr>
+                </a:tc>
+                <a:tc>
+                  <a:txBody>
+                    <a:bodyPr/>
+                    <a:lstStyle/>
+                    <a:p>
+                      <a:pPr algn="l"/>
+                      <a:r>
+                        <a:rPr sz="1000" b="0">
+                          <a:solidFill>
+                            <a:srgbClr val="1D1B43"/>
+                          </a:solidFill>
+                          <a:latin typeface="Calibri"/>
+                        </a:rPr>
+                        <a:t>14/05/2026</a:t>
+                      </a:r>
+                    </a:p>
+                  </a:txBody>
+                  <a:tcPr>
+                    <a:solidFill>
+                      <a:srgbClr val="FFFFFF"/>
+                    </a:solidFill>
+                  </a:tcPr>
+                </a:tc>
+                <a:tc>
+                  <a:txBody>
+                    <a:bodyPr/>
+                    <a:lstStyle/>
+                    <a:p>
+                      <a:pPr algn="l"/>
+                      <a:r>
+                        <a:rPr sz="1000" b="0">
+                          <a:solidFill>
+                            <a:srgbClr val="1D1B43"/>
+                          </a:solidFill>
+                          <a:latin typeface="Calibri"/>
+                        </a:rPr>
+                        <a:t>ENTREGUE FORA DO PRAZO</a:t>
+                      </a:r>
+                    </a:p>
+                  </a:txBody>
+                  <a:tcPr>
+                    <a:solidFill>
+                      <a:srgbClr val="FFFFFF"/>
+                    </a:solidFill>
+                  </a:tcPr>
+                </a:tc>
               </a:tr>
-              <a:tr h="457200">
-                <a:tc>
-                  <a:txBody>
-                    <a:bodyPr/>
-                    <a:lstStyle/>
-                    <a:p>
-                      <a:pPr algn="l"/>
-                      <a:r>
-                        <a:rPr sz="1000" b="0">
-                          <a:solidFill>
-                            <a:srgbClr val="1D1B43"/>
-                          </a:solidFill>
-                          <a:latin typeface="Calibri"/>
-                        </a:rPr>
-                        <a:t>SC</a:t>
+              <a:tr h="384048">
+                <a:tc>
+                  <a:txBody>
+                    <a:bodyPr/>
+                    <a:lstStyle/>
+                    <a:p>
+                      <a:pPr algn="l"/>
+                      <a:r>
+                        <a:rPr sz="1000" b="0">
+                          <a:solidFill>
+                            <a:srgbClr val="1D1B43"/>
+                          </a:solidFill>
+                          <a:latin typeface="Calibri"/>
+                        </a:rPr>
+                        <a:t>284394</a:t>
                       </a:r>
                     </a:p>
                   </a:txBody>
@@ -5665,7 +5853,7 @@
                           </a:solidFill>
                           <a:latin typeface="Calibri"/>
                         </a:rPr>
-                        <a:t>4</a:t>
+                        <a:t>CONSTRUDECOR S/A - GUARULHOS / SP</a:t>
                       </a:r>
                     </a:p>
                   </a:txBody>
@@ -5688,7 +5876,7 @@
                           </a:solidFill>
                           <a:latin typeface="Calibri"/>
                         </a:rPr>
-                        <a:t>4</a:t>
+                        <a:t>GUARULHOS/SP</a:t>
                       </a:r>
                     </a:p>
                   </a:txBody>
@@ -5711,7 +5899,7 @@
                           </a:solidFill>
                           <a:latin typeface="Calibri"/>
                         </a:rPr>
-                        <a:t>0</a:t>
+                        <a:t>27/05/2026</a:t>
                       </a:r>
                     </a:p>
                   </a:txBody>
@@ -5734,176 +5922,13 @@
                           </a:solidFill>
                           <a:latin typeface="Calibri"/>
                         </a:rPr>
-                        <a:t>100.0%</a:t>
+                        <a:t>FORA DO PRAZO</a:t>
                       </a:r>
                     </a:p>
                   </a:txBody>
                   <a:tcPr>
                     <a:solidFill>
                       <a:srgbClr val="F2F2F2"/>
-                    </a:solidFill>
-                  </a:tcPr>
-                </a:tc>
-                <a:tc>
-                  <a:txBody>
-                    <a:bodyPr/>
-                    <a:lstStyle/>
-                    <a:p>
-                      <a:pPr algn="l"/>
-                      <a:r>
-                        <a:rPr sz="1000" b="0">
-                          <a:solidFill>
-                            <a:srgbClr val="1D1B43"/>
-                          </a:solidFill>
-                          <a:latin typeface="Calibri"/>
-                        </a:rPr>
-                        <a:t>Excelente</a:t>
-                      </a:r>
-                    </a:p>
-                  </a:txBody>
-                  <a:tcPr>
-                    <a:solidFill>
-                      <a:srgbClr val="F2F2F2"/>
-                    </a:solidFill>
-                  </a:tcPr>
-                </a:tc>
-              </a:tr>
-              <a:tr h="457200">
-                <a:tc>
-                  <a:txBody>
-                    <a:bodyPr/>
-                    <a:lstStyle/>
-                    <a:p>
-                      <a:pPr algn="l"/>
-                      <a:r>
-                        <a:rPr sz="1000" b="0">
-                          <a:solidFill>
-                            <a:srgbClr val="1D1B43"/>
-                          </a:solidFill>
-                          <a:latin typeface="Calibri"/>
-                        </a:rPr>
-                        <a:t>PR</a:t>
-                      </a:r>
-                    </a:p>
-                  </a:txBody>
-                  <a:tcPr>
-                    <a:solidFill>
-                      <a:srgbClr val="FFFFFF"/>
-                    </a:solidFill>
-                  </a:tcPr>
-                </a:tc>
-                <a:tc>
-                  <a:txBody>
-                    <a:bodyPr/>
-                    <a:lstStyle/>
-                    <a:p>
-                      <a:pPr algn="l"/>
-                      <a:r>
-                        <a:rPr sz="1000" b="0">
-                          <a:solidFill>
-                            <a:srgbClr val="1D1B43"/>
-                          </a:solidFill>
-                          <a:latin typeface="Calibri"/>
-                        </a:rPr>
-                        <a:t>1</a:t>
-                      </a:r>
-                    </a:p>
-                  </a:txBody>
-                  <a:tcPr>
-                    <a:solidFill>
-                      <a:srgbClr val="FFFFFF"/>
-                    </a:solidFill>
-                  </a:tcPr>
-                </a:tc>
-                <a:tc>
-                  <a:txBody>
-                    <a:bodyPr/>
-                    <a:lstStyle/>
-                    <a:p>
-                      <a:pPr algn="l"/>
-                      <a:r>
-                        <a:rPr sz="1000" b="0">
-                          <a:solidFill>
-                            <a:srgbClr val="1D1B43"/>
-                          </a:solidFill>
-                          <a:latin typeface="Calibri"/>
-                        </a:rPr>
-                        <a:t>1</a:t>
-                      </a:r>
-                    </a:p>
-                  </a:txBody>
-                  <a:tcPr>
-                    <a:solidFill>
-                      <a:srgbClr val="FFFFFF"/>
-                    </a:solidFill>
-                  </a:tcPr>
-                </a:tc>
-                <a:tc>
-                  <a:txBody>
-                    <a:bodyPr/>
-                    <a:lstStyle/>
-                    <a:p>
-                      <a:pPr algn="l"/>
-                      <a:r>
-                        <a:rPr sz="1000" b="0">
-                          <a:solidFill>
-                            <a:srgbClr val="1D1B43"/>
-                          </a:solidFill>
-                          <a:latin typeface="Calibri"/>
-                        </a:rPr>
-                        <a:t>0</a:t>
-                      </a:r>
-                    </a:p>
-                  </a:txBody>
-                  <a:tcPr>
-                    <a:solidFill>
-                      <a:srgbClr val="FFFFFF"/>
-                    </a:solidFill>
-                  </a:tcPr>
-                </a:tc>
-                <a:tc>
-                  <a:txBody>
-                    <a:bodyPr/>
-                    <a:lstStyle/>
-                    <a:p>
-                      <a:pPr algn="l"/>
-                      <a:r>
-                        <a:rPr sz="1000" b="0">
-                          <a:solidFill>
-                            <a:srgbClr val="1D1B43"/>
-                          </a:solidFill>
-                          <a:latin typeface="Calibri"/>
-                        </a:rPr>
-                        <a:t>100.0%</a:t>
-                      </a:r>
-                    </a:p>
-                  </a:txBody>
-                  <a:tcPr>
-                    <a:solidFill>
-                      <a:srgbClr val="FFFFFF"/>
-                    </a:solidFill>
-                  </a:tcPr>
-                </a:tc>
-                <a:tc>
-                  <a:txBody>
-                    <a:bodyPr/>
-                    <a:lstStyle/>
-                    <a:p>
-                      <a:pPr algn="l"/>
-                      <a:r>
-                        <a:rPr sz="1000" b="0">
-                          <a:solidFill>
-                            <a:srgbClr val="1D1B43"/>
-                          </a:solidFill>
-                          <a:latin typeface="Calibri"/>
-                        </a:rPr>
-                        <a:t>Excelente</a:t>
-                      </a:r>
-                    </a:p>
-                  </a:txBody>
-                  <a:tcPr>
-                    <a:solidFill>
-                      <a:srgbClr val="FFFFFF"/>
                     </a:solidFill>
                   </a:tcPr>
                 </a:tc>
@@ -5971,6 +5996,584 @@
         <p:spPr>
           <a:xfrm>
             <a:off x="749808" y="502920"/>
+            <a:ext cx="9144000" cy="914400"/>
+          </a:xfrm>
+          <a:prstGeom prst="rect">
+            <a:avLst/>
+          </a:prstGeom>
+          <a:noFill/>
+        </p:spPr>
+        <p:txBody>
+          <a:bodyPr wrap="square">
+            <a:spAutoFit/>
+          </a:bodyPr>
+          <a:lstStyle/>
+          <a:p>
+            <a:pPr algn="l"/>
+            <a:r>
+              <a:rPr sz="4000" b="1">
+                <a:solidFill>
+                  <a:srgbClr val="F97316"/>
+                </a:solidFill>
+                <a:latin typeface="Calibri"/>
+              </a:rPr>
+              <a:t>PERFORMANCE POR UF</a:t>
+            </a:r>
+          </a:p>
+        </p:txBody>
+      </p:sp>
+      <p:sp>
+        <p:nvSpPr>
+          <p:cNvPr id="4" name="Rectangle 3"/>
+          <p:cNvSpPr/>
+          <p:nvPr/>
+        </p:nvSpPr>
+        <p:spPr>
+          <a:xfrm>
+            <a:off x="749808" y="1719072"/>
+            <a:ext cx="10424160" cy="36576"/>
+          </a:xfrm>
+          <a:prstGeom prst="rect">
+            <a:avLst/>
+          </a:prstGeom>
+          <a:solidFill>
+            <a:srgbClr val="F97316"/>
+          </a:solidFill>
+          <a:ln>
+            <a:noFill/>
+          </a:ln>
+        </p:spPr>
+        <p:style>
+          <a:lnRef idx="1">
+            <a:schemeClr val="accent1"/>
+          </a:lnRef>
+          <a:fillRef idx="3">
+            <a:schemeClr val="accent1"/>
+          </a:fillRef>
+          <a:effectRef idx="2">
+            <a:schemeClr val="accent1"/>
+          </a:effectRef>
+          <a:fontRef idx="minor">
+            <a:schemeClr val="lt1"/>
+          </a:fontRef>
+        </p:style>
+        <p:txBody>
+          <a:bodyPr rtlCol="0" anchor="ctr"/>
+          <a:lstStyle/>
+          <a:p>
+            <a:pPr algn="ctr"/>
+          </a:p>
+        </p:txBody>
+      </p:sp>
+      <p:graphicFrame>
+        <p:nvGraphicFramePr>
+          <p:cNvPr id="5" name="Table 4"/>
+          <p:cNvGraphicFramePr>
+            <a:graphicFrameLocks noGrp="1"/>
+          </p:cNvGraphicFramePr>
+          <p:nvPr/>
+        </p:nvGraphicFramePr>
+        <p:xfrm>
+          <a:off x="731520" y="1920240"/>
+          <a:ext cx="10698480" cy="1371600"/>
+        </p:xfrm>
+        <a:graphic>
+          <a:graphicData uri="http://schemas.openxmlformats.org/drawingml/2006/table">
+            <a:tbl>
+              <a:tblPr firstRow="1" bandRow="1">
+                <a:tableStyleId>{5C22544A-7EE6-4342-B048-85BDC9FD1C3A}</a:tableStyleId>
+              </a:tblPr>
+              <a:tblGrid>
+                <a:gridCol w="1097280"/>
+                <a:gridCol w="1645920"/>
+                <a:gridCol w="1645920"/>
+                <a:gridCol w="1645920"/>
+                <a:gridCol w="1554480"/>
+                <a:gridCol w="3108960"/>
+              </a:tblGrid>
+              <a:tr h="457200">
+                <a:tc>
+                  <a:txBody>
+                    <a:bodyPr/>
+                    <a:lstStyle/>
+                    <a:p>
+                      <a:pPr algn="ctr"/>
+                      <a:r>
+                        <a:rPr sz="1100" b="1">
+                          <a:solidFill>
+                            <a:srgbClr val="FFFFFF"/>
+                          </a:solidFill>
+                          <a:latin typeface="Calibri"/>
+                        </a:rPr>
+                        <a:t>UF</a:t>
+                      </a:r>
+                    </a:p>
+                  </a:txBody>
+                  <a:tcPr>
+                    <a:solidFill>
+                      <a:srgbClr val="1D1B43"/>
+                    </a:solidFill>
+                  </a:tcPr>
+                </a:tc>
+                <a:tc>
+                  <a:txBody>
+                    <a:bodyPr/>
+                    <a:lstStyle/>
+                    <a:p>
+                      <a:pPr algn="ctr"/>
+                      <a:r>
+                        <a:rPr sz="1100" b="1">
+                          <a:solidFill>
+                            <a:srgbClr val="FFFFFF"/>
+                          </a:solidFill>
+                          <a:latin typeface="Calibri"/>
+                        </a:rPr>
+                        <a:t>TOTAL</a:t>
+                      </a:r>
+                    </a:p>
+                  </a:txBody>
+                  <a:tcPr>
+                    <a:solidFill>
+                      <a:srgbClr val="1D1B43"/>
+                    </a:solidFill>
+                  </a:tcPr>
+                </a:tc>
+                <a:tc>
+                  <a:txBody>
+                    <a:bodyPr/>
+                    <a:lstStyle/>
+                    <a:p>
+                      <a:pPr algn="ctr"/>
+                      <a:r>
+                        <a:rPr sz="1100" b="1">
+                          <a:solidFill>
+                            <a:srgbClr val="FFFFFF"/>
+                          </a:solidFill>
+                          <a:latin typeface="Calibri"/>
+                        </a:rPr>
+                        <a:t>NO PRAZO</a:t>
+                      </a:r>
+                    </a:p>
+                  </a:txBody>
+                  <a:tcPr>
+                    <a:solidFill>
+                      <a:srgbClr val="1D1B43"/>
+                    </a:solidFill>
+                  </a:tcPr>
+                </a:tc>
+                <a:tc>
+                  <a:txBody>
+                    <a:bodyPr/>
+                    <a:lstStyle/>
+                    <a:p>
+                      <a:pPr algn="ctr"/>
+                      <a:r>
+                        <a:rPr sz="1100" b="1">
+                          <a:solidFill>
+                            <a:srgbClr val="FFFFFF"/>
+                          </a:solidFill>
+                          <a:latin typeface="Calibri"/>
+                        </a:rPr>
+                        <a:t>FORA</a:t>
+                      </a:r>
+                    </a:p>
+                  </a:txBody>
+                  <a:tcPr>
+                    <a:solidFill>
+                      <a:srgbClr val="1D1B43"/>
+                    </a:solidFill>
+                  </a:tcPr>
+                </a:tc>
+                <a:tc>
+                  <a:txBody>
+                    <a:bodyPr/>
+                    <a:lstStyle/>
+                    <a:p>
+                      <a:pPr algn="ctr"/>
+                      <a:r>
+                        <a:rPr sz="1100" b="1">
+                          <a:solidFill>
+                            <a:srgbClr val="FFFFFF"/>
+                          </a:solidFill>
+                          <a:latin typeface="Calibri"/>
+                        </a:rPr>
+                        <a:t>TAXA</a:t>
+                      </a:r>
+                    </a:p>
+                  </a:txBody>
+                  <a:tcPr>
+                    <a:solidFill>
+                      <a:srgbClr val="1D1B43"/>
+                    </a:solidFill>
+                  </a:tcPr>
+                </a:tc>
+                <a:tc>
+                  <a:txBody>
+                    <a:bodyPr/>
+                    <a:lstStyle/>
+                    <a:p>
+                      <a:pPr algn="ctr"/>
+                      <a:r>
+                        <a:rPr sz="1100" b="1">
+                          <a:solidFill>
+                            <a:srgbClr val="FFFFFF"/>
+                          </a:solidFill>
+                          <a:latin typeface="Calibri"/>
+                        </a:rPr>
+                        <a:t>STATUS</a:t>
+                      </a:r>
+                    </a:p>
+                  </a:txBody>
+                  <a:tcPr>
+                    <a:solidFill>
+                      <a:srgbClr val="1D1B43"/>
+                    </a:solidFill>
+                  </a:tcPr>
+                </a:tc>
+              </a:tr>
+              <a:tr h="457200">
+                <a:tc>
+                  <a:txBody>
+                    <a:bodyPr/>
+                    <a:lstStyle/>
+                    <a:p>
+                      <a:pPr algn="l"/>
+                      <a:r>
+                        <a:rPr sz="1000" b="0">
+                          <a:solidFill>
+                            <a:srgbClr val="1D1B43"/>
+                          </a:solidFill>
+                          <a:latin typeface="Calibri"/>
+                        </a:rPr>
+                        <a:t>SP</a:t>
+                      </a:r>
+                    </a:p>
+                  </a:txBody>
+                  <a:tcPr>
+                    <a:solidFill>
+                      <a:srgbClr val="FFFFFF"/>
+                    </a:solidFill>
+                  </a:tcPr>
+                </a:tc>
+                <a:tc>
+                  <a:txBody>
+                    <a:bodyPr/>
+                    <a:lstStyle/>
+                    <a:p>
+                      <a:pPr algn="l"/>
+                      <a:r>
+                        <a:rPr sz="1000" b="0">
+                          <a:solidFill>
+                            <a:srgbClr val="1D1B43"/>
+                          </a:solidFill>
+                          <a:latin typeface="Calibri"/>
+                        </a:rPr>
+                        <a:t>74</a:t>
+                      </a:r>
+                    </a:p>
+                  </a:txBody>
+                  <a:tcPr>
+                    <a:solidFill>
+                      <a:srgbClr val="FFFFFF"/>
+                    </a:solidFill>
+                  </a:tcPr>
+                </a:tc>
+                <a:tc>
+                  <a:txBody>
+                    <a:bodyPr/>
+                    <a:lstStyle/>
+                    <a:p>
+                      <a:pPr algn="l"/>
+                      <a:r>
+                        <a:rPr sz="1000" b="0">
+                          <a:solidFill>
+                            <a:srgbClr val="1D1B43"/>
+                          </a:solidFill>
+                          <a:latin typeface="Calibri"/>
+                        </a:rPr>
+                        <a:t>70</a:t>
+                      </a:r>
+                    </a:p>
+                  </a:txBody>
+                  <a:tcPr>
+                    <a:solidFill>
+                      <a:srgbClr val="FFFFFF"/>
+                    </a:solidFill>
+                  </a:tcPr>
+                </a:tc>
+                <a:tc>
+                  <a:txBody>
+                    <a:bodyPr/>
+                    <a:lstStyle/>
+                    <a:p>
+                      <a:pPr algn="l"/>
+                      <a:r>
+                        <a:rPr sz="1000" b="0">
+                          <a:solidFill>
+                            <a:srgbClr val="1D1B43"/>
+                          </a:solidFill>
+                          <a:latin typeface="Calibri"/>
+                        </a:rPr>
+                        <a:t>4</a:t>
+                      </a:r>
+                    </a:p>
+                  </a:txBody>
+                  <a:tcPr>
+                    <a:solidFill>
+                      <a:srgbClr val="FFFFFF"/>
+                    </a:solidFill>
+                  </a:tcPr>
+                </a:tc>
+                <a:tc>
+                  <a:txBody>
+                    <a:bodyPr/>
+                    <a:lstStyle/>
+                    <a:p>
+                      <a:pPr algn="l"/>
+                      <a:r>
+                        <a:rPr sz="1000" b="0">
+                          <a:solidFill>
+                            <a:srgbClr val="1D1B43"/>
+                          </a:solidFill>
+                          <a:latin typeface="Calibri"/>
+                        </a:rPr>
+                        <a:t>94.6%</a:t>
+                      </a:r>
+                    </a:p>
+                  </a:txBody>
+                  <a:tcPr>
+                    <a:solidFill>
+                      <a:srgbClr val="FFFFFF"/>
+                    </a:solidFill>
+                  </a:tcPr>
+                </a:tc>
+                <a:tc>
+                  <a:txBody>
+                    <a:bodyPr/>
+                    <a:lstStyle/>
+                    <a:p>
+                      <a:pPr algn="l"/>
+                      <a:r>
+                        <a:rPr sz="1000" b="0">
+                          <a:solidFill>
+                            <a:srgbClr val="1D1B43"/>
+                          </a:solidFill>
+                          <a:latin typeface="Calibri"/>
+                        </a:rPr>
+                        <a:t>Regular</a:t>
+                      </a:r>
+                    </a:p>
+                  </a:txBody>
+                  <a:tcPr>
+                    <a:solidFill>
+                      <a:srgbClr val="FFFFFF"/>
+                    </a:solidFill>
+                  </a:tcPr>
+                </a:tc>
+              </a:tr>
+              <a:tr h="457200">
+                <a:tc>
+                  <a:txBody>
+                    <a:bodyPr/>
+                    <a:lstStyle/>
+                    <a:p>
+                      <a:pPr algn="l"/>
+                      <a:r>
+                        <a:rPr sz="1000" b="0">
+                          <a:solidFill>
+                            <a:srgbClr val="1D1B43"/>
+                          </a:solidFill>
+                          <a:latin typeface="Calibri"/>
+                        </a:rPr>
+                        <a:t>SC</a:t>
+                      </a:r>
+                    </a:p>
+                  </a:txBody>
+                  <a:tcPr>
+                    <a:solidFill>
+                      <a:srgbClr val="F2F2F2"/>
+                    </a:solidFill>
+                  </a:tcPr>
+                </a:tc>
+                <a:tc>
+                  <a:txBody>
+                    <a:bodyPr/>
+                    <a:lstStyle/>
+                    <a:p>
+                      <a:pPr algn="l"/>
+                      <a:r>
+                        <a:rPr sz="1000" b="0">
+                          <a:solidFill>
+                            <a:srgbClr val="1D1B43"/>
+                          </a:solidFill>
+                          <a:latin typeface="Calibri"/>
+                        </a:rPr>
+                        <a:t>2</a:t>
+                      </a:r>
+                    </a:p>
+                  </a:txBody>
+                  <a:tcPr>
+                    <a:solidFill>
+                      <a:srgbClr val="F2F2F2"/>
+                    </a:solidFill>
+                  </a:tcPr>
+                </a:tc>
+                <a:tc>
+                  <a:txBody>
+                    <a:bodyPr/>
+                    <a:lstStyle/>
+                    <a:p>
+                      <a:pPr algn="l"/>
+                      <a:r>
+                        <a:rPr sz="1000" b="0">
+                          <a:solidFill>
+                            <a:srgbClr val="1D1B43"/>
+                          </a:solidFill>
+                          <a:latin typeface="Calibri"/>
+                        </a:rPr>
+                        <a:t>2</a:t>
+                      </a:r>
+                    </a:p>
+                  </a:txBody>
+                  <a:tcPr>
+                    <a:solidFill>
+                      <a:srgbClr val="F2F2F2"/>
+                    </a:solidFill>
+                  </a:tcPr>
+                </a:tc>
+                <a:tc>
+                  <a:txBody>
+                    <a:bodyPr/>
+                    <a:lstStyle/>
+                    <a:p>
+                      <a:pPr algn="l"/>
+                      <a:r>
+                        <a:rPr sz="1000" b="0">
+                          <a:solidFill>
+                            <a:srgbClr val="1D1B43"/>
+                          </a:solidFill>
+                          <a:latin typeface="Calibri"/>
+                        </a:rPr>
+                        <a:t>0</a:t>
+                      </a:r>
+                    </a:p>
+                  </a:txBody>
+                  <a:tcPr>
+                    <a:solidFill>
+                      <a:srgbClr val="F2F2F2"/>
+                    </a:solidFill>
+                  </a:tcPr>
+                </a:tc>
+                <a:tc>
+                  <a:txBody>
+                    <a:bodyPr/>
+                    <a:lstStyle/>
+                    <a:p>
+                      <a:pPr algn="l"/>
+                      <a:r>
+                        <a:rPr sz="1000" b="0">
+                          <a:solidFill>
+                            <a:srgbClr val="1D1B43"/>
+                          </a:solidFill>
+                          <a:latin typeface="Calibri"/>
+                        </a:rPr>
+                        <a:t>100.0%</a:t>
+                      </a:r>
+                    </a:p>
+                  </a:txBody>
+                  <a:tcPr>
+                    <a:solidFill>
+                      <a:srgbClr val="F2F2F2"/>
+                    </a:solidFill>
+                  </a:tcPr>
+                </a:tc>
+                <a:tc>
+                  <a:txBody>
+                    <a:bodyPr/>
+                    <a:lstStyle/>
+                    <a:p>
+                      <a:pPr algn="l"/>
+                      <a:r>
+                        <a:rPr sz="1000" b="0">
+                          <a:solidFill>
+                            <a:srgbClr val="1D1B43"/>
+                          </a:solidFill>
+                          <a:latin typeface="Calibri"/>
+                        </a:rPr>
+                        <a:t>Excelente</a:t>
+                      </a:r>
+                    </a:p>
+                  </a:txBody>
+                  <a:tcPr>
+                    <a:solidFill>
+                      <a:srgbClr val="F2F2F2"/>
+                    </a:solidFill>
+                  </a:tcPr>
+                </a:tc>
+              </a:tr>
+            </a:tbl>
+          </a:graphicData>
+        </a:graphic>
+      </p:graphicFrame>
+    </p:spTree>
+  </p:cSld>
+  <p:clrMapOvr>
+    <a:masterClrMapping/>
+  </p:clrMapOvr>
+</p:sld>
+</file>
+
+<file path=ppt/slides/slide6.xml><?xml version="1.0" encoding="utf-8"?>
+<p:sld xmlns:a="http://schemas.openxmlformats.org/drawingml/2006/main" xmlns:p="http://schemas.openxmlformats.org/presentationml/2006/main" xmlns:r="http://schemas.openxmlformats.org/officeDocument/2006/relationships">
+  <p:cSld>
+    <p:bg>
+      <p:bgPr>
+        <a:solidFill>
+          <a:srgbClr val="FFFFFF"/>
+        </a:solidFill>
+        <a:effectLst/>
+      </p:bgPr>
+    </p:bg>
+    <p:spTree>
+      <p:nvGrpSpPr>
+        <p:cNvPr id="1" name=""/>
+        <p:cNvGrpSpPr/>
+        <p:nvPr/>
+      </p:nvGrpSpPr>
+      <p:grpSpPr/>
+      <p:pic>
+        <p:nvPicPr>
+          <p:cNvPr id="2" name="Picture 1" descr="slide2_img3.png"/>
+          <p:cNvPicPr>
+            <a:picLocks noChangeAspect="1"/>
+          </p:cNvPicPr>
+          <p:nvPr/>
+        </p:nvPicPr>
+        <p:blipFill>
+          <a:blip r:embed="rId2"/>
+          <a:stretch>
+            <a:fillRect/>
+          </a:stretch>
+        </p:blipFill>
+        <p:spPr>
+          <a:xfrm>
+            <a:off x="10661904" y="155448"/>
+            <a:ext cx="1380744" cy="667512"/>
+          </a:xfrm>
+          <a:prstGeom prst="rect">
+            <a:avLst/>
+          </a:prstGeom>
+        </p:spPr>
+      </p:pic>
+      <p:sp>
+        <p:nvSpPr>
+          <p:cNvPr id="3" name="TextBox 2"/>
+          <p:cNvSpPr txBox="1"/>
+          <p:nvPr/>
+        </p:nvSpPr>
+        <p:spPr>
+          <a:xfrm>
+            <a:off x="749808" y="502920"/>
             <a:ext cx="10058400" cy="914400"/>
           </a:xfrm>
           <a:prstGeom prst="rect">
@@ -5992,7 +6595,7 @@
                 </a:solidFill>
                 <a:latin typeface="Calibri"/>
               </a:rPr>
-              <a:t>TOP DESTINATARIOS (31 pontos)</a:t>
+              <a:t>TOP DESTINATARIOS (34 pontos)</a:t>
             </a:r>
           </a:p>
         </p:txBody>
@@ -6290,7 +6893,7 @@
                           </a:solidFill>
                           <a:latin typeface="Calibri"/>
                         </a:rPr>
-                        <a:t>9</a:t>
+                        <a:t>18</a:t>
                       </a:r>
                     </a:p>
                   </a:txBody>
@@ -6313,7 +6916,7 @@
                           </a:solidFill>
                           <a:latin typeface="Calibri"/>
                         </a:rPr>
-                        <a:t>9</a:t>
+                        <a:t>18</a:t>
                       </a:r>
                     </a:p>
                   </a:txBody>
@@ -6430,7 +7033,7 @@
                           </a:solidFill>
                           <a:latin typeface="Calibri"/>
                         </a:rPr>
-                        <a:t>BMB MATERIAL DE CONS - SUZANO / SP</a:t>
+                        <a:t>MAX LONAS E ACESSORI - GUARULHOS / SP</a:t>
                       </a:r>
                     </a:p>
                   </a:txBody>
@@ -6593,7 +7196,7 @@
                           </a:solidFill>
                           <a:latin typeface="Calibri"/>
                         </a:rPr>
-                        <a:t>UNI RAPIDO TRANSPORT - GUARULHOS / SP</a:t>
+                        <a:t>JORTEK EXPRESS - GUARULHOS / SP</a:t>
                       </a:r>
                     </a:p>
                   </a:txBody>
@@ -6616,7 +7219,7 @@
                           </a:solidFill>
                           <a:latin typeface="Calibri"/>
                         </a:rPr>
-                        <a:t>5</a:t>
+                        <a:t>4</a:t>
                       </a:r>
                     </a:p>
                   </a:txBody>
@@ -6639,7 +7242,7 @@
                           </a:solidFill>
                           <a:latin typeface="Calibri"/>
                         </a:rPr>
-                        <a:t>5</a:t>
+                        <a:t>3</a:t>
                       </a:r>
                     </a:p>
                   </a:txBody>
@@ -6662,7 +7265,7 @@
                           </a:solidFill>
                           <a:latin typeface="Calibri"/>
                         </a:rPr>
-                        <a:t>0</a:t>
+                        <a:t>1</a:t>
                       </a:r>
                     </a:p>
                   </a:txBody>
@@ -6685,7 +7288,7 @@
                           </a:solidFill>
                           <a:latin typeface="Calibri"/>
                         </a:rPr>
-                        <a:t>100.0%</a:t>
+                        <a:t>75.0%</a:t>
                       </a:r>
                     </a:p>
                   </a:txBody>
@@ -6708,7 +7311,7 @@
                           </a:solidFill>
                           <a:latin typeface="Calibri"/>
                         </a:rPr>
-                        <a:t>Excelente</a:t>
+                        <a:t>Atencao</a:t>
                       </a:r>
                     </a:p>
                   </a:txBody>
@@ -6756,7 +7359,7 @@
                           </a:solidFill>
                           <a:latin typeface="Calibri"/>
                         </a:rPr>
-                        <a:t>TRANS - AMIGOS TRANS - GUARULHOS / SP</a:t>
+                        <a:t>BMB MATERIAL DE CONS - SUZANO / SP</a:t>
                       </a:r>
                     </a:p>
                   </a:txBody>
@@ -6779,7 +7382,7 @@
                           </a:solidFill>
                           <a:latin typeface="Calibri"/>
                         </a:rPr>
-                        <a:t>5</a:t>
+                        <a:t>4</a:t>
                       </a:r>
                     </a:p>
                   </a:txBody>
@@ -6802,7 +7405,7 @@
                           </a:solidFill>
                           <a:latin typeface="Calibri"/>
                         </a:rPr>
-                        <a:t>5</a:t>
+                        <a:t>4</a:t>
                       </a:r>
                     </a:p>
                   </a:txBody>
@@ -6919,7 +7522,7 @@
                           </a:solidFill>
                           <a:latin typeface="Calibri"/>
                         </a:rPr>
-                        <a:t>ITACORDA INDUSTRIA E - PENHA / SC</a:t>
+                        <a:t>J B DE AGUILAR TRANS - SAO PAULO / SP</a:t>
                       </a:r>
                     </a:p>
                   </a:txBody>
@@ -7082,7 +7685,7 @@
                           </a:solidFill>
                           <a:latin typeface="Calibri"/>
                         </a:rPr>
-                        <a:t>MAX LONAS E ACESSORI - GUARULHOS / SP</a:t>
+                        <a:t>FM TRANSPORTES, LOCA - GUARULHOS / SP</a:t>
                       </a:r>
                     </a:p>
                   </a:txBody>
@@ -7245,7 +7848,7 @@
                           </a:solidFill>
                           <a:latin typeface="Calibri"/>
                         </a:rPr>
-                        <a:t>CONSTRUDECOR S/A - GUARULHOS / SP</a:t>
+                        <a:t>SEVERINO MELO ALVES - SAO PAULO / SP</a:t>
                       </a:r>
                     </a:p>
                   </a:txBody>
@@ -7408,7 +8011,7 @@
                           </a:solidFill>
                           <a:latin typeface="Calibri"/>
                         </a:rPr>
-                        <a:t>VAILOG TRANSPORTES E - SAO PAULO / SP</a:t>
+                        <a:t>TEMPO REAL TRANSPORT - GUARULHOS / SP</a:t>
                       </a:r>
                     </a:p>
                   </a:txBody>
@@ -7431,7 +8034,7 @@
                           </a:solidFill>
                           <a:latin typeface="Calibri"/>
                         </a:rPr>
-                        <a:t>3</a:t>
+                        <a:t>2</a:t>
                       </a:r>
                     </a:p>
                   </a:txBody>
@@ -7454,7 +8057,7 @@
                           </a:solidFill>
                           <a:latin typeface="Calibri"/>
                         </a:rPr>
-                        <a:t>3</a:t>
+                        <a:t>2</a:t>
                       </a:r>
                     </a:p>
                   </a:txBody>
@@ -7571,7 +8174,7 @@
                           </a:solidFill>
                           <a:latin typeface="Calibri"/>
                         </a:rPr>
-                        <a:t>RAPIDO XAPURI TRANSP - GUARULHOS / SP</a:t>
+                        <a:t>ITACORDA INDUSTRIA E - PENHA / SC</a:t>
                       </a:r>
                     </a:p>
                   </a:txBody>
@@ -7734,7 +8337,7 @@
                           </a:solidFill>
                           <a:latin typeface="Calibri"/>
                         </a:rPr>
-                        <a:t>TELECARGAS - SAO PAULO / SP</a:t>
+                        <a:t>DUCORTE FERRAMENTAS - SAO PAULO / SP</a:t>
                       </a:r>
                     </a:p>
                   </a:txBody>
@@ -7897,7 +8500,7 @@
                           </a:solidFill>
                           <a:latin typeface="Calibri"/>
                         </a:rPr>
-                        <a:t>TRANSPORTADORA PENHE - SAO PAULO / SP</a:t>
+                        <a:t>STM TRANSPORTES RODO - GUARULHOS / SP</a:t>
                       </a:r>
                     </a:p>
                   </a:txBody>
@@ -8060,7 +8663,7 @@
                           </a:solidFill>
                           <a:latin typeface="Calibri"/>
                         </a:rPr>
-                        <a:t>FIDELIZA LOGISTICA - SAO PAULO / SP</a:t>
+                        <a:t>CLODOALDO COM DE ENC - GUARULHOS / SP</a:t>
                       </a:r>
                     </a:p>
                   </a:txBody>
@@ -8223,7 +8826,7 @@
                           </a:solidFill>
                           <a:latin typeface="Calibri"/>
                         </a:rPr>
-                        <a:t>W. O. DOS SANTOS ENC - GUARULHOS / SP</a:t>
+                        <a:t>RAPIDO XAPURI TRANSP - GUARULHOS / SP</a:t>
                       </a:r>
                     </a:p>
                   </a:txBody>
@@ -8386,7 +8989,7 @@
                           </a:solidFill>
                           <a:latin typeface="Calibri"/>
                         </a:rPr>
-                        <a:t>EDSON SILVA NASCIMEN - GUARULHOS / SP</a:t>
+                        <a:t>TRANSPRESS TRANSPORT - GUARULHOS / SP</a:t>
                       </a:r>
                     </a:p>
                   </a:txBody>
@@ -8409,7 +9012,7 @@
                           </a:solidFill>
                           <a:latin typeface="Calibri"/>
                         </a:rPr>
-                        <a:t>1</a:t>
+                        <a:t>2</a:t>
                       </a:r>
                     </a:p>
                   </a:txBody>
@@ -8432,7 +9035,7 @@
                           </a:solidFill>
                           <a:latin typeface="Calibri"/>
                         </a:rPr>
-                        <a:t>1</a:t>
+                        <a:t>2</a:t>
                       </a:r>
                     </a:p>
                   </a:txBody>
@@ -8524,7 +9127,7 @@
 </p:sld>
 </file>
 
-<file path=ppt/slides/slide6.xml><?xml version="1.0" encoding="utf-8"?>
+<file path=ppt/slides/slide7.xml><?xml version="1.0" encoding="utf-8"?>
 <p:sld xmlns:a="http://schemas.openxmlformats.org/drawingml/2006/main" xmlns:p="http://schemas.openxmlformats.org/presentationml/2006/main" xmlns:r="http://schemas.openxmlformats.org/officeDocument/2006/relationships">
   <p:cSld>
     <p:bg>
